--- a/rev2/rev2.pptx
+++ b/rev2/rev2.pptx
@@ -41,16 +41,17 @@
     <p:sldId id="286" r:id="rId36"/>
     <p:sldId id="287" r:id="rId37"/>
     <p:sldId id="288" r:id="rId38"/>
+    <p:sldId id="289" r:id="rId39"/>
   </p:sldIdLst>
   <p:sldSz cy="6858000" cx="12192000"/>
   <p:notesSz cx="6858000" cy="9144000"/>
   <p:embeddedFontLst>
     <p:embeddedFont>
       <p:font typeface="Montserrat"/>
-      <p:regular r:id="rId39"/>
-      <p:bold r:id="rId40"/>
-      <p:italic r:id="rId41"/>
-      <p:boldItalic r:id="rId42"/>
+      <p:regular r:id="rId40"/>
+      <p:bold r:id="rId41"/>
+      <p:italic r:id="rId42"/>
+      <p:boldItalic r:id="rId43"/>
     </p:embeddedFont>
   </p:embeddedFontLst>
   <p:defaultTextStyle>
@@ -303,7 +304,7 @@
       </p15:sldGuideLst>
     </p:ext>
     <p:ext uri="GoogleSlidesCustomDataVersion2">
-      <go:slidesCustomData xmlns:go="http://customooxmlschemas.google.com/" r:id="rId43" roundtripDataSignature="AMtx7mj0S6IuSVPji6YAFqT9wnG+PN6GPQ=="/>
+      <go:slidesCustomData xmlns:go="http://customooxmlschemas.google.com/" r:id="rId44" roundtripDataSignature="AMtx7mhDtGWhRXpGdSsTdov/iCcZFoyH+Q=="/>
     </p:ext>
   </p:extLst>
 </p:presentation>
@@ -999,7 +1000,7 @@
   <p:cSld>
     <p:spTree>
       <p:nvGrpSpPr>
-        <p:cNvPr id="153" name="Shape 153"/>
+        <p:cNvPr id="177" name="Shape 177"/>
         <p:cNvGrpSpPr/>
         <p:nvPr/>
       </p:nvGrpSpPr>
@@ -1013,7 +1014,7 @@
       </p:grpSpPr>
       <p:sp>
         <p:nvSpPr>
-          <p:cNvPr id="154" name="Google Shape;154;p19:notes"/>
+          <p:cNvPr id="178" name="Google Shape;178;p8:notes"/>
           <p:cNvSpPr txBox="1"/>
           <p:nvPr>
             <p:ph idx="1" type="body"/>
@@ -1060,7 +1061,7 @@
       </p:sp>
       <p:sp>
         <p:nvSpPr>
-          <p:cNvPr id="155" name="Google Shape;155;p19:notes"/>
+          <p:cNvPr id="179" name="Google Shape;179;p8:notes"/>
           <p:cNvSpPr/>
           <p:nvPr>
             <p:ph idx="2" type="sldImg"/>
@@ -1116,7 +1117,7 @@
   <p:cSld>
     <p:spTree>
       <p:nvGrpSpPr>
-        <p:cNvPr id="160" name="Shape 160"/>
+        <p:cNvPr id="184" name="Shape 184"/>
         <p:cNvGrpSpPr/>
         <p:nvPr/>
       </p:nvGrpSpPr>
@@ -1130,7 +1131,7 @@
       </p:grpSpPr>
       <p:sp>
         <p:nvSpPr>
-          <p:cNvPr id="161" name="Google Shape;161;p20:notes"/>
+          <p:cNvPr id="185" name="Google Shape;185;p19:notes"/>
           <p:cNvSpPr txBox="1"/>
           <p:nvPr>
             <p:ph idx="1" type="body"/>
@@ -1177,7 +1178,7 @@
       </p:sp>
       <p:sp>
         <p:nvSpPr>
-          <p:cNvPr id="162" name="Google Shape;162;p20:notes"/>
+          <p:cNvPr id="186" name="Google Shape;186;p19:notes"/>
           <p:cNvSpPr/>
           <p:nvPr>
             <p:ph idx="2" type="sldImg"/>
@@ -1233,7 +1234,7 @@
   <p:cSld>
     <p:spTree>
       <p:nvGrpSpPr>
-        <p:cNvPr id="167" name="Shape 167"/>
+        <p:cNvPr id="191" name="Shape 191"/>
         <p:cNvGrpSpPr/>
         <p:nvPr/>
       </p:nvGrpSpPr>
@@ -1247,7 +1248,7 @@
       </p:grpSpPr>
       <p:sp>
         <p:nvSpPr>
-          <p:cNvPr id="168" name="Google Shape;168;p21:notes"/>
+          <p:cNvPr id="192" name="Google Shape;192;p20:notes"/>
           <p:cNvSpPr txBox="1"/>
           <p:nvPr>
             <p:ph idx="1" type="body"/>
@@ -1294,7 +1295,7 @@
       </p:sp>
       <p:sp>
         <p:nvSpPr>
-          <p:cNvPr id="169" name="Google Shape;169;p21:notes"/>
+          <p:cNvPr id="193" name="Google Shape;193;p20:notes"/>
           <p:cNvSpPr/>
           <p:nvPr>
             <p:ph idx="2" type="sldImg"/>
@@ -1350,7 +1351,7 @@
   <p:cSld>
     <p:spTree>
       <p:nvGrpSpPr>
-        <p:cNvPr id="174" name="Shape 174"/>
+        <p:cNvPr id="198" name="Shape 198"/>
         <p:cNvGrpSpPr/>
         <p:nvPr/>
       </p:nvGrpSpPr>
@@ -1364,7 +1365,7 @@
       </p:grpSpPr>
       <p:sp>
         <p:nvSpPr>
-          <p:cNvPr id="175" name="Google Shape;175;p22:notes"/>
+          <p:cNvPr id="199" name="Google Shape;199;p21:notes"/>
           <p:cNvSpPr txBox="1"/>
           <p:nvPr>
             <p:ph idx="1" type="body"/>
@@ -1411,7 +1412,7 @@
       </p:sp>
       <p:sp>
         <p:nvSpPr>
-          <p:cNvPr id="176" name="Google Shape;176;p22:notes"/>
+          <p:cNvPr id="200" name="Google Shape;200;p21:notes"/>
           <p:cNvSpPr/>
           <p:nvPr>
             <p:ph idx="2" type="sldImg"/>
@@ -1467,7 +1468,7 @@
   <p:cSld>
     <p:spTree>
       <p:nvGrpSpPr>
-        <p:cNvPr id="181" name="Shape 181"/>
+        <p:cNvPr id="205" name="Shape 205"/>
         <p:cNvGrpSpPr/>
         <p:nvPr/>
       </p:nvGrpSpPr>
@@ -1481,7 +1482,7 @@
       </p:grpSpPr>
       <p:sp>
         <p:nvSpPr>
-          <p:cNvPr id="182" name="Google Shape;182;p23:notes"/>
+          <p:cNvPr id="206" name="Google Shape;206;p22:notes"/>
           <p:cNvSpPr txBox="1"/>
           <p:nvPr>
             <p:ph idx="1" type="body"/>
@@ -1528,7 +1529,7 @@
       </p:sp>
       <p:sp>
         <p:nvSpPr>
-          <p:cNvPr id="183" name="Google Shape;183;p23:notes"/>
+          <p:cNvPr id="207" name="Google Shape;207;p22:notes"/>
           <p:cNvSpPr/>
           <p:nvPr>
             <p:ph idx="2" type="sldImg"/>
@@ -1584,7 +1585,7 @@
   <p:cSld>
     <p:spTree>
       <p:nvGrpSpPr>
-        <p:cNvPr id="189" name="Shape 189"/>
+        <p:cNvPr id="212" name="Shape 212"/>
         <p:cNvGrpSpPr/>
         <p:nvPr/>
       </p:nvGrpSpPr>
@@ -1598,7 +1599,7 @@
       </p:grpSpPr>
       <p:sp>
         <p:nvSpPr>
-          <p:cNvPr id="190" name="Google Shape;190;p24:notes"/>
+          <p:cNvPr id="213" name="Google Shape;213;p23:notes"/>
           <p:cNvSpPr txBox="1"/>
           <p:nvPr>
             <p:ph idx="1" type="body"/>
@@ -1645,7 +1646,7 @@
       </p:sp>
       <p:sp>
         <p:nvSpPr>
-          <p:cNvPr id="191" name="Google Shape;191;p24:notes"/>
+          <p:cNvPr id="214" name="Google Shape;214;p23:notes"/>
           <p:cNvSpPr/>
           <p:nvPr>
             <p:ph idx="2" type="sldImg"/>
@@ -1701,7 +1702,7 @@
   <p:cSld>
     <p:spTree>
       <p:nvGrpSpPr>
-        <p:cNvPr id="196" name="Shape 196"/>
+        <p:cNvPr id="220" name="Shape 220"/>
         <p:cNvGrpSpPr/>
         <p:nvPr/>
       </p:nvGrpSpPr>
@@ -1715,7 +1716,7 @@
       </p:grpSpPr>
       <p:sp>
         <p:nvSpPr>
-          <p:cNvPr id="197" name="Google Shape;197;g3d0496d8fde_0_7:notes"/>
+          <p:cNvPr id="221" name="Google Shape;221;p24:notes"/>
           <p:cNvSpPr txBox="1"/>
           <p:nvPr>
             <p:ph idx="1" type="body"/>
@@ -1762,7 +1763,7 @@
       </p:sp>
       <p:sp>
         <p:nvSpPr>
-          <p:cNvPr id="198" name="Google Shape;198;g3d0496d8fde_0_7:notes"/>
+          <p:cNvPr id="222" name="Google Shape;222;p24:notes"/>
           <p:cNvSpPr/>
           <p:nvPr>
             <p:ph idx="2" type="sldImg"/>
@@ -1818,7 +1819,7 @@
   <p:cSld>
     <p:spTree>
       <p:nvGrpSpPr>
-        <p:cNvPr id="201" name="Shape 201"/>
+        <p:cNvPr id="227" name="Shape 227"/>
         <p:cNvGrpSpPr/>
         <p:nvPr/>
       </p:nvGrpSpPr>
@@ -1832,7 +1833,7 @@
       </p:grpSpPr>
       <p:sp>
         <p:nvSpPr>
-          <p:cNvPr id="202" name="Google Shape;202;g3d0496d8fde_0_69:notes"/>
+          <p:cNvPr id="228" name="Google Shape;228;g3d0496d8fde_0_7:notes"/>
           <p:cNvSpPr txBox="1"/>
           <p:nvPr>
             <p:ph idx="1" type="body"/>
@@ -1879,7 +1880,7 @@
       </p:sp>
       <p:sp>
         <p:nvSpPr>
-          <p:cNvPr id="203" name="Google Shape;203;g3d0496d8fde_0_69:notes"/>
+          <p:cNvPr id="229" name="Google Shape;229;g3d0496d8fde_0_7:notes"/>
           <p:cNvSpPr/>
           <p:nvPr>
             <p:ph idx="2" type="sldImg"/>
@@ -1935,7 +1936,7 @@
   <p:cSld>
     <p:spTree>
       <p:nvGrpSpPr>
-        <p:cNvPr id="207" name="Shape 207"/>
+        <p:cNvPr id="232" name="Shape 232"/>
         <p:cNvGrpSpPr/>
         <p:nvPr/>
       </p:nvGrpSpPr>
@@ -1949,7 +1950,7 @@
       </p:grpSpPr>
       <p:sp>
         <p:nvSpPr>
-          <p:cNvPr id="208" name="Google Shape;208;g3d0496d8fde_0_85:notes"/>
+          <p:cNvPr id="233" name="Google Shape;233;g3d0496d8fde_0_69:notes"/>
           <p:cNvSpPr txBox="1"/>
           <p:nvPr>
             <p:ph idx="1" type="body"/>
@@ -1996,7 +1997,7 @@
       </p:sp>
       <p:sp>
         <p:nvSpPr>
-          <p:cNvPr id="209" name="Google Shape;209;g3d0496d8fde_0_85:notes"/>
+          <p:cNvPr id="234" name="Google Shape;234;g3d0496d8fde_0_69:notes"/>
           <p:cNvSpPr/>
           <p:nvPr>
             <p:ph idx="2" type="sldImg"/>
@@ -2052,7 +2053,7 @@
   <p:cSld>
     <p:spTree>
       <p:nvGrpSpPr>
-        <p:cNvPr id="213" name="Shape 213"/>
+        <p:cNvPr id="238" name="Shape 238"/>
         <p:cNvGrpSpPr/>
         <p:nvPr/>
       </p:nvGrpSpPr>
@@ -2066,7 +2067,7 @@
       </p:grpSpPr>
       <p:sp>
         <p:nvSpPr>
-          <p:cNvPr id="214" name="Google Shape;214;g3d0496d8fde_0_77:notes"/>
+          <p:cNvPr id="239" name="Google Shape;239;g3d0496d8fde_0_85:notes"/>
           <p:cNvSpPr txBox="1"/>
           <p:nvPr>
             <p:ph idx="1" type="body"/>
@@ -2113,7 +2114,7 @@
       </p:sp>
       <p:sp>
         <p:nvSpPr>
-          <p:cNvPr id="215" name="Google Shape;215;g3d0496d8fde_0_77:notes"/>
+          <p:cNvPr id="240" name="Google Shape;240;g3d0496d8fde_0_85:notes"/>
           <p:cNvSpPr/>
           <p:nvPr>
             <p:ph idx="2" type="sldImg"/>
@@ -2286,7 +2287,7 @@
   <p:cSld>
     <p:spTree>
       <p:nvGrpSpPr>
-        <p:cNvPr id="219" name="Shape 219"/>
+        <p:cNvPr id="244" name="Shape 244"/>
         <p:cNvGrpSpPr/>
         <p:nvPr/>
       </p:nvGrpSpPr>
@@ -2300,7 +2301,7 @@
       </p:grpSpPr>
       <p:sp>
         <p:nvSpPr>
-          <p:cNvPr id="220" name="Google Shape;220;g3d0496d8fde_0_93:notes"/>
+          <p:cNvPr id="245" name="Google Shape;245;g3d0496d8fde_0_77:notes"/>
           <p:cNvSpPr txBox="1"/>
           <p:nvPr>
             <p:ph idx="1" type="body"/>
@@ -2347,7 +2348,7 @@
       </p:sp>
       <p:sp>
         <p:nvSpPr>
-          <p:cNvPr id="221" name="Google Shape;221;g3d0496d8fde_0_93:notes"/>
+          <p:cNvPr id="246" name="Google Shape;246;g3d0496d8fde_0_77:notes"/>
           <p:cNvSpPr/>
           <p:nvPr>
             <p:ph idx="2" type="sldImg"/>
@@ -2403,7 +2404,7 @@
   <p:cSld>
     <p:spTree>
       <p:nvGrpSpPr>
-        <p:cNvPr id="225" name="Shape 225"/>
+        <p:cNvPr id="250" name="Shape 250"/>
         <p:cNvGrpSpPr/>
         <p:nvPr/>
       </p:nvGrpSpPr>
@@ -2417,7 +2418,7 @@
       </p:grpSpPr>
       <p:sp>
         <p:nvSpPr>
-          <p:cNvPr id="226" name="Google Shape;226;g3d0496d8fde_0_100:notes"/>
+          <p:cNvPr id="251" name="Google Shape;251;g3d0496d8fde_0_93:notes"/>
           <p:cNvSpPr txBox="1"/>
           <p:nvPr>
             <p:ph idx="1" type="body"/>
@@ -2464,7 +2465,7 @@
       </p:sp>
       <p:sp>
         <p:nvSpPr>
-          <p:cNvPr id="227" name="Google Shape;227;g3d0496d8fde_0_100:notes"/>
+          <p:cNvPr id="252" name="Google Shape;252;g3d0496d8fde_0_93:notes"/>
           <p:cNvSpPr/>
           <p:nvPr>
             <p:ph idx="2" type="sldImg"/>
@@ -2520,7 +2521,7 @@
   <p:cSld>
     <p:spTree>
       <p:nvGrpSpPr>
-        <p:cNvPr id="231" name="Shape 231"/>
+        <p:cNvPr id="256" name="Shape 256"/>
         <p:cNvGrpSpPr/>
         <p:nvPr/>
       </p:nvGrpSpPr>
@@ -2534,7 +2535,7 @@
       </p:grpSpPr>
       <p:sp>
         <p:nvSpPr>
-          <p:cNvPr id="232" name="Google Shape;232;g3d0689a4217_0_3:notes"/>
+          <p:cNvPr id="257" name="Google Shape;257;g3d0496d8fde_0_100:notes"/>
           <p:cNvSpPr txBox="1"/>
           <p:nvPr>
             <p:ph idx="1" type="body"/>
@@ -2581,7 +2582,7 @@
       </p:sp>
       <p:sp>
         <p:nvSpPr>
-          <p:cNvPr id="233" name="Google Shape;233;g3d0689a4217_0_3:notes"/>
+          <p:cNvPr id="258" name="Google Shape;258;g3d0496d8fde_0_100:notes"/>
           <p:cNvSpPr/>
           <p:nvPr>
             <p:ph idx="2" type="sldImg"/>
@@ -2637,7 +2638,7 @@
   <p:cSld>
     <p:spTree>
       <p:nvGrpSpPr>
-        <p:cNvPr id="237" name="Shape 237"/>
+        <p:cNvPr id="262" name="Shape 262"/>
         <p:cNvGrpSpPr/>
         <p:nvPr/>
       </p:nvGrpSpPr>
@@ -2651,7 +2652,7 @@
       </p:grpSpPr>
       <p:sp>
         <p:nvSpPr>
-          <p:cNvPr id="238" name="Google Shape;238;g3d0496d8fde_0_65:notes"/>
+          <p:cNvPr id="263" name="Google Shape;263;g3d0689a4217_0_3:notes"/>
           <p:cNvSpPr txBox="1"/>
           <p:nvPr>
             <p:ph idx="1" type="body"/>
@@ -2698,7 +2699,7 @@
       </p:sp>
       <p:sp>
         <p:nvSpPr>
-          <p:cNvPr id="239" name="Google Shape;239;g3d0496d8fde_0_65:notes"/>
+          <p:cNvPr id="264" name="Google Shape;264;g3d0689a4217_0_3:notes"/>
           <p:cNvSpPr/>
           <p:nvPr>
             <p:ph idx="2" type="sldImg"/>
@@ -2754,7 +2755,7 @@
   <p:cSld>
     <p:spTree>
       <p:nvGrpSpPr>
-        <p:cNvPr id="242" name="Shape 242"/>
+        <p:cNvPr id="268" name="Shape 268"/>
         <p:cNvGrpSpPr/>
         <p:nvPr/>
       </p:nvGrpSpPr>
@@ -2768,7 +2769,7 @@
       </p:grpSpPr>
       <p:sp>
         <p:nvSpPr>
-          <p:cNvPr id="243" name="Google Shape;243;g3d0496d8fde_0_0:notes"/>
+          <p:cNvPr id="269" name="Google Shape;269;g3d0496d8fde_0_65:notes"/>
           <p:cNvSpPr txBox="1"/>
           <p:nvPr>
             <p:ph idx="1" type="body"/>
@@ -2815,7 +2816,7 @@
       </p:sp>
       <p:sp>
         <p:nvSpPr>
-          <p:cNvPr id="244" name="Google Shape;244;g3d0496d8fde_0_0:notes"/>
+          <p:cNvPr id="270" name="Google Shape;270;g3d0496d8fde_0_65:notes"/>
           <p:cNvSpPr/>
           <p:nvPr>
             <p:ph idx="2" type="sldImg"/>
@@ -2871,7 +2872,7 @@
   <p:cSld>
     <p:spTree>
       <p:nvGrpSpPr>
-        <p:cNvPr id="249" name="Shape 249"/>
+        <p:cNvPr id="273" name="Shape 273"/>
         <p:cNvGrpSpPr/>
         <p:nvPr/>
       </p:nvGrpSpPr>
@@ -2885,7 +2886,7 @@
       </p:grpSpPr>
       <p:sp>
         <p:nvSpPr>
-          <p:cNvPr id="250" name="Google Shape;250;g3d0496d8fde_0_17:notes"/>
+          <p:cNvPr id="274" name="Google Shape;274;g3d0496d8fde_0_0:notes"/>
           <p:cNvSpPr txBox="1"/>
           <p:nvPr>
             <p:ph idx="1" type="body"/>
@@ -2932,7 +2933,7 @@
       </p:sp>
       <p:sp>
         <p:nvSpPr>
-          <p:cNvPr id="251" name="Google Shape;251;g3d0496d8fde_0_17:notes"/>
+          <p:cNvPr id="275" name="Google Shape;275;g3d0496d8fde_0_0:notes"/>
           <p:cNvSpPr/>
           <p:nvPr>
             <p:ph idx="2" type="sldImg"/>
@@ -2988,7 +2989,7 @@
   <p:cSld>
     <p:spTree>
       <p:nvGrpSpPr>
-        <p:cNvPr id="256" name="Shape 256"/>
+        <p:cNvPr id="280" name="Shape 280"/>
         <p:cNvGrpSpPr/>
         <p:nvPr/>
       </p:nvGrpSpPr>
@@ -3002,7 +3003,7 @@
       </p:grpSpPr>
       <p:sp>
         <p:nvSpPr>
-          <p:cNvPr id="257" name="Google Shape;257;g3d0496d8fde_0_31:notes"/>
+          <p:cNvPr id="281" name="Google Shape;281;g3d0496d8fde_0_17:notes"/>
           <p:cNvSpPr txBox="1"/>
           <p:nvPr>
             <p:ph idx="1" type="body"/>
@@ -3049,7 +3050,7 @@
       </p:sp>
       <p:sp>
         <p:nvSpPr>
-          <p:cNvPr id="258" name="Google Shape;258;g3d0496d8fde_0_31:notes"/>
+          <p:cNvPr id="282" name="Google Shape;282;g3d0496d8fde_0_17:notes"/>
           <p:cNvSpPr/>
           <p:nvPr>
             <p:ph idx="2" type="sldImg"/>
@@ -3105,7 +3106,7 @@
   <p:cSld>
     <p:spTree>
       <p:nvGrpSpPr>
-        <p:cNvPr id="263" name="Shape 263"/>
+        <p:cNvPr id="287" name="Shape 287"/>
         <p:cNvGrpSpPr/>
         <p:nvPr/>
       </p:nvGrpSpPr>
@@ -3119,7 +3120,7 @@
       </p:grpSpPr>
       <p:sp>
         <p:nvSpPr>
-          <p:cNvPr id="264" name="Google Shape;264;g3d0496d8fde_0_37:notes"/>
+          <p:cNvPr id="288" name="Google Shape;288;g3d0496d8fde_0_31:notes"/>
           <p:cNvSpPr txBox="1"/>
           <p:nvPr>
             <p:ph idx="1" type="body"/>
@@ -3166,7 +3167,7 @@
       </p:sp>
       <p:sp>
         <p:nvSpPr>
-          <p:cNvPr id="265" name="Google Shape;265;g3d0496d8fde_0_37:notes"/>
+          <p:cNvPr id="289" name="Google Shape;289;g3d0496d8fde_0_31:notes"/>
           <p:cNvSpPr/>
           <p:nvPr>
             <p:ph idx="2" type="sldImg"/>
@@ -3222,7 +3223,7 @@
   <p:cSld>
     <p:spTree>
       <p:nvGrpSpPr>
-        <p:cNvPr id="269" name="Shape 269"/>
+        <p:cNvPr id="294" name="Shape 294"/>
         <p:cNvGrpSpPr/>
         <p:nvPr/>
       </p:nvGrpSpPr>
@@ -3236,7 +3237,7 @@
       </p:grpSpPr>
       <p:sp>
         <p:nvSpPr>
-          <p:cNvPr id="270" name="Google Shape;270;g3d0496d8fde_0_43:notes"/>
+          <p:cNvPr id="295" name="Google Shape;295;g3d0496d8fde_0_37:notes"/>
           <p:cNvSpPr txBox="1"/>
           <p:nvPr>
             <p:ph idx="1" type="body"/>
@@ -3283,7 +3284,7 @@
       </p:sp>
       <p:sp>
         <p:nvSpPr>
-          <p:cNvPr id="271" name="Google Shape;271;g3d0496d8fde_0_43:notes"/>
+          <p:cNvPr id="296" name="Google Shape;296;g3d0496d8fde_0_37:notes"/>
           <p:cNvSpPr/>
           <p:nvPr>
             <p:ph idx="2" type="sldImg"/>
@@ -3339,7 +3340,7 @@
   <p:cSld>
     <p:spTree>
       <p:nvGrpSpPr>
-        <p:cNvPr id="275" name="Shape 275"/>
+        <p:cNvPr id="300" name="Shape 300"/>
         <p:cNvGrpSpPr/>
         <p:nvPr/>
       </p:nvGrpSpPr>
@@ -3353,7 +3354,7 @@
       </p:grpSpPr>
       <p:sp>
         <p:nvSpPr>
-          <p:cNvPr id="276" name="Google Shape;276;g3d0496d8fde_0_53:notes"/>
+          <p:cNvPr id="301" name="Google Shape;301;g3d0496d8fde_0_43:notes"/>
           <p:cNvSpPr txBox="1"/>
           <p:nvPr>
             <p:ph idx="1" type="body"/>
@@ -3400,7 +3401,7 @@
       </p:sp>
       <p:sp>
         <p:nvSpPr>
-          <p:cNvPr id="277" name="Google Shape;277;g3d0496d8fde_0_53:notes"/>
+          <p:cNvPr id="302" name="Google Shape;302;g3d0496d8fde_0_43:notes"/>
           <p:cNvSpPr/>
           <p:nvPr>
             <p:ph idx="2" type="sldImg"/>
@@ -3470,7 +3471,7 @@
       </p:grpSpPr>
       <p:sp>
         <p:nvSpPr>
-          <p:cNvPr id="82" name="Google Shape;82;g3cc93861824_0_7:notes"/>
+          <p:cNvPr id="82" name="Google Shape;82;g3d0689a4217_2_0:notes"/>
           <p:cNvSpPr txBox="1"/>
           <p:nvPr>
             <p:ph idx="1" type="body"/>
@@ -3517,7 +3518,7 @@
       </p:sp>
       <p:sp>
         <p:nvSpPr>
-          <p:cNvPr id="83" name="Google Shape;83;g3cc93861824_0_7:notes"/>
+          <p:cNvPr id="83" name="Google Shape;83;g3d0689a4217_2_0:notes"/>
           <p:cNvSpPr/>
           <p:nvPr>
             <p:ph idx="2" type="sldImg"/>
@@ -3525,8 +3526,8 @@
         </p:nvSpPr>
         <p:spPr>
           <a:xfrm>
-            <a:off x="381000" y="685800"/>
-            <a:ext cx="6096000" cy="3429000"/>
+            <a:off x="1143225" y="685800"/>
+            <a:ext cx="4572300" cy="3429000"/>
           </a:xfrm>
           <a:custGeom>
             <a:rect b="b" l="l" r="r" t="t"/>
@@ -3573,7 +3574,7 @@
   <p:cSld>
     <p:spTree>
       <p:nvGrpSpPr>
-        <p:cNvPr id="281" name="Shape 281"/>
+        <p:cNvPr id="306" name="Shape 306"/>
         <p:cNvGrpSpPr/>
         <p:nvPr/>
       </p:nvGrpSpPr>
@@ -3587,7 +3588,7 @@
       </p:grpSpPr>
       <p:sp>
         <p:nvSpPr>
-          <p:cNvPr id="282" name="Google Shape;282;g3d0496d8fde_0_59:notes"/>
+          <p:cNvPr id="307" name="Google Shape;307;g3d0496d8fde_0_53:notes"/>
           <p:cNvSpPr txBox="1"/>
           <p:nvPr>
             <p:ph idx="1" type="body"/>
@@ -3634,7 +3635,7 @@
       </p:sp>
       <p:sp>
         <p:nvSpPr>
-          <p:cNvPr id="283" name="Google Shape;283;g3d0496d8fde_0_59:notes"/>
+          <p:cNvPr id="308" name="Google Shape;308;g3d0496d8fde_0_53:notes"/>
           <p:cNvSpPr/>
           <p:nvPr>
             <p:ph idx="2" type="sldImg"/>
@@ -3690,7 +3691,7 @@
   <p:cSld>
     <p:spTree>
       <p:nvGrpSpPr>
-        <p:cNvPr id="287" name="Shape 287"/>
+        <p:cNvPr id="312" name="Shape 312"/>
         <p:cNvGrpSpPr/>
         <p:nvPr/>
       </p:nvGrpSpPr>
@@ -3704,7 +3705,7 @@
       </p:grpSpPr>
       <p:sp>
         <p:nvSpPr>
-          <p:cNvPr id="288" name="Google Shape;288;g3d0496d8fde_0_49:notes"/>
+          <p:cNvPr id="313" name="Google Shape;313;g3d0496d8fde_0_59:notes"/>
           <p:cNvSpPr txBox="1"/>
           <p:nvPr>
             <p:ph idx="1" type="body"/>
@@ -3751,7 +3752,7 @@
       </p:sp>
       <p:sp>
         <p:nvSpPr>
-          <p:cNvPr id="289" name="Google Shape;289;g3d0496d8fde_0_49:notes"/>
+          <p:cNvPr id="314" name="Google Shape;314;g3d0496d8fde_0_59:notes"/>
           <p:cNvSpPr/>
           <p:nvPr>
             <p:ph idx="2" type="sldImg"/>
@@ -3807,7 +3808,7 @@
   <p:cSld>
     <p:spTree>
       <p:nvGrpSpPr>
-        <p:cNvPr id="292" name="Shape 292"/>
+        <p:cNvPr id="318" name="Shape 318"/>
         <p:cNvGrpSpPr/>
         <p:nvPr/>
       </p:nvGrpSpPr>
@@ -3821,7 +3822,7 @@
       </p:grpSpPr>
       <p:sp>
         <p:nvSpPr>
-          <p:cNvPr id="293" name="Google Shape;293;g3d0689a4217_0_10:notes"/>
+          <p:cNvPr id="319" name="Google Shape;319;g3d0496d8fde_0_49:notes"/>
           <p:cNvSpPr txBox="1"/>
           <p:nvPr>
             <p:ph idx="1" type="body"/>
@@ -3868,7 +3869,124 @@
       </p:sp>
       <p:sp>
         <p:nvSpPr>
-          <p:cNvPr id="294" name="Google Shape;294;g3d0689a4217_0_10:notes"/>
+          <p:cNvPr id="320" name="Google Shape;320;g3d0496d8fde_0_49:notes"/>
+          <p:cNvSpPr/>
+          <p:nvPr>
+            <p:ph idx="2" type="sldImg"/>
+          </p:nvPr>
+        </p:nvSpPr>
+        <p:spPr>
+          <a:xfrm>
+            <a:off x="381000" y="685800"/>
+            <a:ext cx="6096000" cy="3429000"/>
+          </a:xfrm>
+          <a:custGeom>
+            <a:rect b="b" l="l" r="r" t="t"/>
+            <a:pathLst>
+              <a:path extrusionOk="0" h="120000" w="120000">
+                <a:moveTo>
+                  <a:pt x="0" y="0"/>
+                </a:moveTo>
+                <a:lnTo>
+                  <a:pt x="120000" y="0"/>
+                </a:lnTo>
+                <a:lnTo>
+                  <a:pt x="120000" y="120000"/>
+                </a:lnTo>
+                <a:lnTo>
+                  <a:pt x="0" y="120000"/>
+                </a:lnTo>
+                <a:close/>
+              </a:path>
+            </a:pathLst>
+          </a:custGeom>
+          <a:noFill/>
+          <a:ln cap="flat" cmpd="sng" w="9525">
+            <a:solidFill>
+              <a:srgbClr val="000000"/>
+            </a:solidFill>
+            <a:prstDash val="solid"/>
+            <a:round/>
+            <a:headEnd len="sm" w="sm" type="none"/>
+            <a:tailEnd len="sm" w="sm" type="none"/>
+          </a:ln>
+        </p:spPr>
+      </p:sp>
+    </p:spTree>
+  </p:cSld>
+  <p:clrMapOvr>
+    <a:masterClrMapping/>
+  </p:clrMapOvr>
+</p:notes>
+</file>
+
+<file path=ppt/notesSlides/notesSlide33.xml><?xml version="1.0" encoding="utf-8"?>
+<p:notes xmlns:a="http://schemas.openxmlformats.org/drawingml/2006/main" xmlns:r="http://schemas.openxmlformats.org/officeDocument/2006/relationships" xmlns:mc="http://schemas.openxmlformats.org/markup-compatibility/2006" xmlns:mv="urn:schemas-microsoft-com:mac:vml" xmlns:p="http://schemas.openxmlformats.org/presentationml/2006/main" xmlns:c="http://schemas.openxmlformats.org/drawingml/2006/chart" xmlns:dgm="http://schemas.openxmlformats.org/drawingml/2006/diagram" xmlns:o="urn:schemas-microsoft-com:office:office" xmlns:v="urn:schemas-microsoft-com:vml" xmlns:pvml="urn:schemas-microsoft-com:office:powerpoint" xmlns:com="http://schemas.openxmlformats.org/drawingml/2006/compatibility" xmlns:p14="http://schemas.microsoft.com/office/powerpoint/2010/main" xmlns:p15="http://schemas.microsoft.com/office/powerpoint/2012/main" xmlns:ahyp="http://schemas.microsoft.com/office/drawing/2018/hyperlinkcolor" showMasterPhAnim="0" showMasterSp="0">
+  <p:cSld>
+    <p:spTree>
+      <p:nvGrpSpPr>
+        <p:cNvPr id="323" name="Shape 323"/>
+        <p:cNvGrpSpPr/>
+        <p:nvPr/>
+      </p:nvGrpSpPr>
+      <p:grpSpPr>
+        <a:xfrm>
+          <a:off x="0" y="0"/>
+          <a:ext cx="0" cy="0"/>
+          <a:chOff x="0" y="0"/>
+          <a:chExt cx="0" cy="0"/>
+        </a:xfrm>
+      </p:grpSpPr>
+      <p:sp>
+        <p:nvSpPr>
+          <p:cNvPr id="324" name="Google Shape;324;g3d0689a4217_0_10:notes"/>
+          <p:cNvSpPr txBox="1"/>
+          <p:nvPr>
+            <p:ph idx="1" type="body"/>
+          </p:nvPr>
+        </p:nvSpPr>
+        <p:spPr>
+          <a:xfrm>
+            <a:off x="685800" y="4343400"/>
+            <a:ext cx="5486400" cy="4114800"/>
+          </a:xfrm>
+          <a:prstGeom prst="rect">
+            <a:avLst/>
+          </a:prstGeom>
+          <a:noFill/>
+          <a:ln>
+            <a:noFill/>
+          </a:ln>
+        </p:spPr>
+        <p:txBody>
+          <a:bodyPr anchorCtr="0" anchor="t" bIns="91425" lIns="91425" spcFirstLastPara="1" rIns="91425" wrap="square" tIns="91425">
+            <a:noAutofit/>
+          </a:bodyPr>
+          <a:lstStyle/>
+          <a:p>
+            <a:pPr indent="0" lvl="0" marL="0" rtl="0" algn="l">
+              <a:lnSpc>
+                <a:spcPct val="100000"/>
+              </a:lnSpc>
+              <a:spcBef>
+                <a:spcPts val="0"/>
+              </a:spcBef>
+              <a:spcAft>
+                <a:spcPts val="0"/>
+              </a:spcAft>
+              <a:buSzPts val="1100"/>
+              <a:buNone/>
+            </a:pPr>
+            <a:r>
+              <a:t/>
+            </a:r>
+            <a:endParaRPr/>
+          </a:p>
+        </p:txBody>
+      </p:sp>
+      <p:sp>
+        <p:nvSpPr>
+          <p:cNvPr id="325" name="Google Shape;325;g3d0689a4217_0_10:notes"/>
           <p:cNvSpPr/>
           <p:nvPr>
             <p:ph idx="2" type="sldImg"/>
@@ -3919,12 +4037,12 @@
 </p:notes>
 </file>
 
-<file path=ppt/notesSlides/notesSlide33.xml><?xml version="1.0" encoding="utf-8"?>
+<file path=ppt/notesSlides/notesSlide34.xml><?xml version="1.0" encoding="utf-8"?>
 <p:notes xmlns:a="http://schemas.openxmlformats.org/drawingml/2006/main" xmlns:r="http://schemas.openxmlformats.org/officeDocument/2006/relationships" xmlns:mc="http://schemas.openxmlformats.org/markup-compatibility/2006" xmlns:mv="urn:schemas-microsoft-com:mac:vml" xmlns:p="http://schemas.openxmlformats.org/presentationml/2006/main" xmlns:c="http://schemas.openxmlformats.org/drawingml/2006/chart" xmlns:dgm="http://schemas.openxmlformats.org/drawingml/2006/diagram" xmlns:o="urn:schemas-microsoft-com:office:office" xmlns:v="urn:schemas-microsoft-com:vml" xmlns:pvml="urn:schemas-microsoft-com:office:powerpoint" xmlns:com="http://schemas.openxmlformats.org/drawingml/2006/compatibility" xmlns:p14="http://schemas.microsoft.com/office/powerpoint/2010/main" xmlns:p15="http://schemas.microsoft.com/office/powerpoint/2012/main" xmlns:ahyp="http://schemas.microsoft.com/office/drawing/2018/hyperlinkcolor" showMasterPhAnim="0" showMasterSp="0">
   <p:cSld>
     <p:spTree>
       <p:nvGrpSpPr>
-        <p:cNvPr id="298" name="Shape 298"/>
+        <p:cNvPr id="329" name="Shape 329"/>
         <p:cNvGrpSpPr/>
         <p:nvPr/>
       </p:nvGrpSpPr>
@@ -3938,7 +4056,7 @@
       </p:grpSpPr>
       <p:sp>
         <p:nvSpPr>
-          <p:cNvPr id="299" name="Google Shape;299;g3625a4a1d6b_0_0:notes"/>
+          <p:cNvPr id="330" name="Google Shape;330;g3625a4a1d6b_0_0:notes"/>
           <p:cNvSpPr txBox="1"/>
           <p:nvPr>
             <p:ph idx="1" type="body"/>
@@ -3985,7 +4103,7 @@
       </p:sp>
       <p:sp>
         <p:nvSpPr>
-          <p:cNvPr id="300" name="Google Shape;300;g3625a4a1d6b_0_0:notes"/>
+          <p:cNvPr id="331" name="Google Shape;331;g3625a4a1d6b_0_0:notes"/>
           <p:cNvSpPr/>
           <p:nvPr>
             <p:ph idx="2" type="sldImg"/>
@@ -4041,7 +4159,7 @@
   <p:cSld>
     <p:spTree>
       <p:nvGrpSpPr>
-        <p:cNvPr id="86" name="Shape 86"/>
+        <p:cNvPr id="112" name="Shape 112"/>
         <p:cNvGrpSpPr/>
         <p:nvPr/>
       </p:nvGrpSpPr>
@@ -4055,7 +4173,7 @@
       </p:grpSpPr>
       <p:sp>
         <p:nvSpPr>
-          <p:cNvPr id="87" name="Google Shape;87;p2:notes"/>
+          <p:cNvPr id="113" name="Google Shape;113;g3cc93861824_0_7:notes"/>
           <p:cNvSpPr txBox="1"/>
           <p:nvPr>
             <p:ph idx="1" type="body"/>
@@ -4102,7 +4220,7 @@
       </p:sp>
       <p:sp>
         <p:nvSpPr>
-          <p:cNvPr id="88" name="Google Shape;88;p2:notes"/>
+          <p:cNvPr id="114" name="Google Shape;114;g3cc93861824_0_7:notes"/>
           <p:cNvSpPr/>
           <p:nvPr>
             <p:ph idx="2" type="sldImg"/>
@@ -4158,7 +4276,7 @@
   <p:cSld>
     <p:spTree>
       <p:nvGrpSpPr>
-        <p:cNvPr id="102" name="Shape 102"/>
+        <p:cNvPr id="117" name="Shape 117"/>
         <p:cNvGrpSpPr/>
         <p:nvPr/>
       </p:nvGrpSpPr>
@@ -4172,7 +4290,7 @@
       </p:grpSpPr>
       <p:sp>
         <p:nvSpPr>
-          <p:cNvPr id="103" name="Google Shape;103;p3:notes"/>
+          <p:cNvPr id="118" name="Google Shape;118;p2:notes"/>
           <p:cNvSpPr txBox="1"/>
           <p:nvPr>
             <p:ph idx="1" type="body"/>
@@ -4219,7 +4337,7 @@
       </p:sp>
       <p:sp>
         <p:nvSpPr>
-          <p:cNvPr id="104" name="Google Shape;104;p3:notes"/>
+          <p:cNvPr id="119" name="Google Shape;119;p2:notes"/>
           <p:cNvSpPr/>
           <p:nvPr>
             <p:ph idx="2" type="sldImg"/>
@@ -4275,7 +4393,7 @@
   <p:cSld>
     <p:spTree>
       <p:nvGrpSpPr>
-        <p:cNvPr id="109" name="Shape 109"/>
+        <p:cNvPr id="133" name="Shape 133"/>
         <p:cNvGrpSpPr/>
         <p:nvPr/>
       </p:nvGrpSpPr>
@@ -4289,7 +4407,7 @@
       </p:grpSpPr>
       <p:sp>
         <p:nvSpPr>
-          <p:cNvPr id="110" name="Google Shape;110;p5:notes"/>
+          <p:cNvPr id="134" name="Google Shape;134;p3:notes"/>
           <p:cNvSpPr txBox="1"/>
           <p:nvPr>
             <p:ph idx="1" type="body"/>
@@ -4336,7 +4454,7 @@
       </p:sp>
       <p:sp>
         <p:nvSpPr>
-          <p:cNvPr id="111" name="Google Shape;111;p5:notes"/>
+          <p:cNvPr id="135" name="Google Shape;135;p3:notes"/>
           <p:cNvSpPr/>
           <p:nvPr>
             <p:ph idx="2" type="sldImg"/>
@@ -4392,7 +4510,7 @@
   <p:cSld>
     <p:spTree>
       <p:nvGrpSpPr>
-        <p:cNvPr id="123" name="Shape 123"/>
+        <p:cNvPr id="140" name="Shape 140"/>
         <p:cNvGrpSpPr/>
         <p:nvPr/>
       </p:nvGrpSpPr>
@@ -4406,7 +4524,7 @@
       </p:grpSpPr>
       <p:sp>
         <p:nvSpPr>
-          <p:cNvPr id="124" name="Google Shape;124;p6:notes"/>
+          <p:cNvPr id="141" name="Google Shape;141;p5:notes"/>
           <p:cNvSpPr txBox="1"/>
           <p:nvPr>
             <p:ph idx="1" type="body"/>
@@ -4453,7 +4571,7 @@
       </p:sp>
       <p:sp>
         <p:nvSpPr>
-          <p:cNvPr id="125" name="Google Shape;125;p6:notes"/>
+          <p:cNvPr id="142" name="Google Shape;142;p5:notes"/>
           <p:cNvSpPr/>
           <p:nvPr>
             <p:ph idx="2" type="sldImg"/>
@@ -4509,7 +4627,7 @@
   <p:cSld>
     <p:spTree>
       <p:nvGrpSpPr>
-        <p:cNvPr id="137" name="Shape 137"/>
+        <p:cNvPr id="154" name="Shape 154"/>
         <p:cNvGrpSpPr/>
         <p:nvPr/>
       </p:nvGrpSpPr>
@@ -4523,7 +4641,7 @@
       </p:grpSpPr>
       <p:sp>
         <p:nvSpPr>
-          <p:cNvPr id="138" name="Google Shape;138;p7:notes"/>
+          <p:cNvPr id="155" name="Google Shape;155;p6:notes"/>
           <p:cNvSpPr txBox="1"/>
           <p:nvPr>
             <p:ph idx="1" type="body"/>
@@ -4570,7 +4688,7 @@
       </p:sp>
       <p:sp>
         <p:nvSpPr>
-          <p:cNvPr id="139" name="Google Shape;139;p7:notes"/>
+          <p:cNvPr id="156" name="Google Shape;156;p6:notes"/>
           <p:cNvSpPr/>
           <p:nvPr>
             <p:ph idx="2" type="sldImg"/>
@@ -4626,7 +4744,7 @@
   <p:cSld>
     <p:spTree>
       <p:nvGrpSpPr>
-        <p:cNvPr id="146" name="Shape 146"/>
+        <p:cNvPr id="168" name="Shape 168"/>
         <p:cNvGrpSpPr/>
         <p:nvPr/>
       </p:nvGrpSpPr>
@@ -4640,7 +4758,7 @@
       </p:grpSpPr>
       <p:sp>
         <p:nvSpPr>
-          <p:cNvPr id="147" name="Google Shape;147;p8:notes"/>
+          <p:cNvPr id="169" name="Google Shape;169;p7:notes"/>
           <p:cNvSpPr txBox="1"/>
           <p:nvPr>
             <p:ph idx="1" type="body"/>
@@ -4687,7 +4805,7 @@
       </p:sp>
       <p:sp>
         <p:nvSpPr>
-          <p:cNvPr id="148" name="Google Shape;148;p8:notes"/>
+          <p:cNvPr id="170" name="Google Shape;170;p7:notes"/>
           <p:cNvSpPr/>
           <p:nvPr>
             <p:ph idx="2" type="sldImg"/>
@@ -12695,7 +12813,7 @@
         <p:spPr>
           <a:xfrm>
             <a:off x="560200" y="2567225"/>
-            <a:ext cx="3808800" cy="461700"/>
+            <a:ext cx="7829100" cy="461700"/>
           </a:xfrm>
           <a:prstGeom prst="rect">
             <a:avLst/>
@@ -12729,7 +12847,7 @@
             </a:pPr>
             <a:r>
               <a:rPr lang="ru-RU"/>
-              <a:t>Бинарные уязвимости</a:t>
+              <a:t>Модуль “Бинарные уязвимости”</a:t>
             </a:r>
             <a:endParaRPr>
               <a:latin typeface="Montserrat"/>
@@ -12751,7 +12869,7 @@
         <p:spPr>
           <a:xfrm>
             <a:off x="560198" y="3198175"/>
-            <a:ext cx="7069555" cy="1754286"/>
+            <a:ext cx="7069500" cy="1754700"/>
           </a:xfrm>
           <a:prstGeom prst="rect">
             <a:avLst/>
@@ -12785,7 +12903,7 @@
             </a:pPr>
             <a:r>
               <a:rPr lang="ru-RU"/>
-              <a:t>Модуль 2. Динамический анализ. Введение в бинарные уязвимости</a:t>
+              <a:t>Урок 2. Динамический анализ. Введение в бинарные уязвимости</a:t>
             </a:r>
             <a:endParaRPr/>
           </a:p>
@@ -12804,7 +12922,7 @@
   <p:cSld>
     <p:spTree>
       <p:nvGrpSpPr>
-        <p:cNvPr id="156" name="Shape 156"/>
+        <p:cNvPr id="180" name="Shape 180"/>
         <p:cNvGrpSpPr/>
         <p:nvPr/>
       </p:nvGrpSpPr>
@@ -12818,7 +12936,7 @@
       </p:grpSpPr>
       <p:sp>
         <p:nvSpPr>
-          <p:cNvPr id="157" name="Google Shape;157;p19"/>
+          <p:cNvPr id="181" name="Google Shape;181;p8"/>
           <p:cNvSpPr txBox="1"/>
           <p:nvPr>
             <p:ph type="title"/>
@@ -12862,7 +12980,7 @@
             </a:pPr>
             <a:r>
               <a:rPr lang="ru-RU"/>
-              <a:t>Точки останова (breakpoints)</a:t>
+              <a:t>Запуск и подготовка к отладке</a:t>
             </a:r>
             <a:endParaRPr/>
           </a:p>
@@ -12870,7 +12988,343 @@
       </p:sp>
       <p:sp>
         <p:nvSpPr>
-          <p:cNvPr id="158" name="Google Shape;158;p19"/>
+          <p:cNvPr id="182" name="Google Shape;182;p8"/>
+          <p:cNvSpPr txBox="1"/>
+          <p:nvPr>
+            <p:ph idx="2" type="body"/>
+          </p:nvPr>
+        </p:nvSpPr>
+        <p:spPr>
+          <a:xfrm>
+            <a:off x="559575" y="1771050"/>
+            <a:ext cx="6636600" cy="3170058"/>
+          </a:xfrm>
+          <a:prstGeom prst="rect">
+            <a:avLst/>
+          </a:prstGeom>
+          <a:noFill/>
+          <a:ln>
+            <a:noFill/>
+          </a:ln>
+        </p:spPr>
+        <p:txBody>
+          <a:bodyPr anchorCtr="0" anchor="t" bIns="45700" lIns="91425" spcFirstLastPara="1" rIns="91425" wrap="square" tIns="45700">
+            <a:spAutoFit/>
+          </a:bodyPr>
+          <a:lstStyle/>
+          <a:p>
+            <a:pPr indent="-355600" lvl="0" marL="457200" rtl="0" algn="l">
+              <a:lnSpc>
+                <a:spcPct val="100000"/>
+              </a:lnSpc>
+              <a:spcBef>
+                <a:spcPts val="0"/>
+              </a:spcBef>
+              <a:spcAft>
+                <a:spcPts val="0"/>
+              </a:spcAft>
+              <a:buClr>
+                <a:schemeClr val="dk2"/>
+              </a:buClr>
+              <a:buSzPts val="2000"/>
+              <a:buAutoNum type="arabicPeriod"/>
+            </a:pPr>
+            <a:r>
+              <a:rPr i="1" lang="ru-RU" sz="2000"/>
+              <a:t>gdb ./main</a:t>
+            </a:r>
+            <a:endParaRPr/>
+          </a:p>
+          <a:p>
+            <a:pPr indent="-355600" lvl="0" marL="457200" rtl="0" algn="l">
+              <a:lnSpc>
+                <a:spcPct val="100000"/>
+              </a:lnSpc>
+              <a:spcBef>
+                <a:spcPts val="0"/>
+              </a:spcBef>
+              <a:spcAft>
+                <a:spcPts val="0"/>
+              </a:spcAft>
+              <a:buClr>
+                <a:schemeClr val="dk2"/>
+              </a:buClr>
+              <a:buSzPts val="2000"/>
+              <a:buAutoNum type="arabicPeriod"/>
+            </a:pPr>
+            <a:r>
+              <a:rPr lang="ru-RU" sz="2000"/>
+              <a:t>gdb –args ./main secret</a:t>
+            </a:r>
+            <a:endParaRPr/>
+          </a:p>
+          <a:p>
+            <a:pPr indent="-355600" lvl="0" marL="457200" rtl="0" algn="l">
+              <a:lnSpc>
+                <a:spcPct val="100000"/>
+              </a:lnSpc>
+              <a:spcBef>
+                <a:spcPts val="0"/>
+              </a:spcBef>
+              <a:spcAft>
+                <a:spcPts val="0"/>
+              </a:spcAft>
+              <a:buClr>
+                <a:schemeClr val="dk2"/>
+              </a:buClr>
+              <a:buSzPts val="2000"/>
+              <a:buAutoNum type="arabicPeriod"/>
+            </a:pPr>
+            <a:r>
+              <a:rPr lang="ru-RU" sz="2000"/>
+              <a:t>set args secret</a:t>
+            </a:r>
+            <a:endParaRPr/>
+          </a:p>
+          <a:p>
+            <a:pPr indent="-355600" lvl="0" marL="457200" rtl="0" algn="l">
+              <a:lnSpc>
+                <a:spcPct val="100000"/>
+              </a:lnSpc>
+              <a:spcBef>
+                <a:spcPts val="0"/>
+              </a:spcBef>
+              <a:spcAft>
+                <a:spcPts val="0"/>
+              </a:spcAft>
+              <a:buClr>
+                <a:schemeClr val="dk2"/>
+              </a:buClr>
+              <a:buSzPts val="2000"/>
+              <a:buAutoNum type="arabicPeriod"/>
+            </a:pPr>
+            <a:r>
+              <a:rPr lang="ru-RU" sz="2000"/>
+              <a:t>show args</a:t>
+            </a:r>
+            <a:endParaRPr sz="2000"/>
+          </a:p>
+          <a:p>
+            <a:pPr indent="-355600" lvl="0" marL="457200" rtl="0" algn="l">
+              <a:lnSpc>
+                <a:spcPct val="100000"/>
+              </a:lnSpc>
+              <a:spcBef>
+                <a:spcPts val="0"/>
+              </a:spcBef>
+              <a:spcAft>
+                <a:spcPts val="0"/>
+              </a:spcAft>
+              <a:buClr>
+                <a:schemeClr val="dk2"/>
+              </a:buClr>
+              <a:buSzPts val="2000"/>
+              <a:buAutoNum type="arabicPeriod"/>
+            </a:pPr>
+            <a:r>
+              <a:rPr lang="ru-RU" sz="2000"/>
+              <a:t>run / r (далее можно написать аргументы командной строки)</a:t>
+            </a:r>
+            <a:endParaRPr sz="2000"/>
+          </a:p>
+          <a:p>
+            <a:pPr indent="-355600" lvl="0" marL="457200" rtl="0" algn="l">
+              <a:lnSpc>
+                <a:spcPct val="100000"/>
+              </a:lnSpc>
+              <a:spcBef>
+                <a:spcPts val="0"/>
+              </a:spcBef>
+              <a:spcAft>
+                <a:spcPts val="0"/>
+              </a:spcAft>
+              <a:buClr>
+                <a:schemeClr val="dk2"/>
+              </a:buClr>
+              <a:buSzPts val="2000"/>
+              <a:buAutoNum type="arabicPeriod"/>
+            </a:pPr>
+            <a:r>
+              <a:rPr lang="ru-RU" sz="2000"/>
+              <a:t>quit / q</a:t>
+            </a:r>
+            <a:endParaRPr/>
+          </a:p>
+          <a:p>
+            <a:pPr indent="-228600" lvl="0" marL="457200" rtl="0" algn="l">
+              <a:lnSpc>
+                <a:spcPct val="100000"/>
+              </a:lnSpc>
+              <a:spcBef>
+                <a:spcPts val="0"/>
+              </a:spcBef>
+              <a:spcAft>
+                <a:spcPts val="0"/>
+              </a:spcAft>
+              <a:buClr>
+                <a:schemeClr val="dk2"/>
+              </a:buClr>
+              <a:buSzPts val="2000"/>
+              <a:buNone/>
+            </a:pPr>
+            <a:r>
+              <a:t/>
+            </a:r>
+            <a:endParaRPr sz="2000"/>
+          </a:p>
+          <a:p>
+            <a:pPr indent="-228600" lvl="0" marL="457200" rtl="0" algn="l">
+              <a:lnSpc>
+                <a:spcPct val="100000"/>
+              </a:lnSpc>
+              <a:spcBef>
+                <a:spcPts val="0"/>
+              </a:spcBef>
+              <a:spcAft>
+                <a:spcPts val="0"/>
+              </a:spcAft>
+              <a:buClr>
+                <a:schemeClr val="dk2"/>
+              </a:buClr>
+              <a:buSzPts val="2000"/>
+              <a:buNone/>
+            </a:pPr>
+            <a:r>
+              <a:t/>
+            </a:r>
+            <a:endParaRPr sz="2000"/>
+          </a:p>
+          <a:p>
+            <a:pPr indent="-228600" lvl="0" marL="457200" rtl="0" algn="l">
+              <a:lnSpc>
+                <a:spcPct val="100000"/>
+              </a:lnSpc>
+              <a:spcBef>
+                <a:spcPts val="0"/>
+              </a:spcBef>
+              <a:spcAft>
+                <a:spcPts val="0"/>
+              </a:spcAft>
+              <a:buClr>
+                <a:schemeClr val="dk2"/>
+              </a:buClr>
+              <a:buSzPts val="2000"/>
+              <a:buNone/>
+            </a:pPr>
+            <a:r>
+              <a:t/>
+            </a:r>
+            <a:endParaRPr i="1" sz="2000"/>
+          </a:p>
+        </p:txBody>
+      </p:sp>
+      <p:pic>
+        <p:nvPicPr>
+          <p:cNvPr descr="Devlopment #Developer #Debug #Debugging #Meme #FunnyFriday #FridayFun  #Caddycode" id="183" name="Google Shape;183;p8"/>
+          <p:cNvPicPr preferRelativeResize="0"/>
+          <p:nvPr/>
+        </p:nvPicPr>
+        <p:blipFill rotWithShape="1">
+          <a:blip r:embed="rId3">
+            <a:alphaModFix/>
+          </a:blip>
+          <a:srcRect b="0" l="0" r="0" t="0"/>
+          <a:stretch/>
+        </p:blipFill>
+        <p:spPr>
+          <a:xfrm>
+            <a:off x="7512710" y="2417470"/>
+            <a:ext cx="3849540" cy="3082699"/>
+          </a:xfrm>
+          <a:prstGeom prst="rect">
+            <a:avLst/>
+          </a:prstGeom>
+          <a:noFill/>
+          <a:ln>
+            <a:noFill/>
+          </a:ln>
+        </p:spPr>
+      </p:pic>
+    </p:spTree>
+  </p:cSld>
+  <p:clrMapOvr>
+    <a:masterClrMapping/>
+  </p:clrMapOvr>
+</p:sld>
+</file>
+
+<file path=ppt/slides/slide11.xml><?xml version="1.0" encoding="utf-8"?>
+<p:sld xmlns:a="http://schemas.openxmlformats.org/drawingml/2006/main" xmlns:r="http://schemas.openxmlformats.org/officeDocument/2006/relationships" xmlns:mc="http://schemas.openxmlformats.org/markup-compatibility/2006" xmlns:mv="urn:schemas-microsoft-com:mac:vml" xmlns:p="http://schemas.openxmlformats.org/presentationml/2006/main" xmlns:c="http://schemas.openxmlformats.org/drawingml/2006/chart" xmlns:dgm="http://schemas.openxmlformats.org/drawingml/2006/diagram" xmlns:o="urn:schemas-microsoft-com:office:office" xmlns:v="urn:schemas-microsoft-com:vml" xmlns:pvml="urn:schemas-microsoft-com:office:powerpoint" xmlns:com="http://schemas.openxmlformats.org/drawingml/2006/compatibility" xmlns:p14="http://schemas.microsoft.com/office/powerpoint/2010/main" xmlns:p15="http://schemas.microsoft.com/office/powerpoint/2012/main" xmlns:ahyp="http://schemas.microsoft.com/office/drawing/2018/hyperlinkcolor">
+  <p:cSld>
+    <p:spTree>
+      <p:nvGrpSpPr>
+        <p:cNvPr id="187" name="Shape 187"/>
+        <p:cNvGrpSpPr/>
+        <p:nvPr/>
+      </p:nvGrpSpPr>
+      <p:grpSpPr>
+        <a:xfrm>
+          <a:off x="0" y="0"/>
+          <a:ext cx="0" cy="0"/>
+          <a:chOff x="0" y="0"/>
+          <a:chExt cx="0" cy="0"/>
+        </a:xfrm>
+      </p:grpSpPr>
+      <p:sp>
+        <p:nvSpPr>
+          <p:cNvPr id="188" name="Google Shape;188;p19"/>
+          <p:cNvSpPr txBox="1"/>
+          <p:nvPr>
+            <p:ph type="title"/>
+          </p:nvPr>
+        </p:nvSpPr>
+        <p:spPr>
+          <a:xfrm>
+            <a:off x="559572" y="359101"/>
+            <a:ext cx="11081700" cy="523200"/>
+          </a:xfrm>
+          <a:prstGeom prst="rect">
+            <a:avLst/>
+          </a:prstGeom>
+          <a:noFill/>
+          <a:ln>
+            <a:noFill/>
+          </a:ln>
+        </p:spPr>
+        <p:txBody>
+          <a:bodyPr anchorCtr="0" anchor="ctr" bIns="45700" lIns="91425" spcFirstLastPara="1" rIns="91425" wrap="square" tIns="45700">
+            <a:spAutoFit/>
+          </a:bodyPr>
+          <a:lstStyle/>
+          <a:p>
+            <a:pPr indent="0" lvl="0" marL="0" rtl="0" algn="l">
+              <a:lnSpc>
+                <a:spcPct val="100000"/>
+              </a:lnSpc>
+              <a:spcBef>
+                <a:spcPts val="0"/>
+              </a:spcBef>
+              <a:spcAft>
+                <a:spcPts val="0"/>
+              </a:spcAft>
+              <a:buClr>
+                <a:schemeClr val="lt1"/>
+              </a:buClr>
+              <a:buSzPts val="2800"/>
+              <a:buFont typeface="Montserrat"/>
+              <a:buNone/>
+            </a:pPr>
+            <a:r>
+              <a:rPr lang="ru-RU"/>
+              <a:t>Точки останова (breakpoints)</a:t>
+            </a:r>
+            <a:endParaRPr/>
+          </a:p>
+        </p:txBody>
+      </p:sp>
+      <p:sp>
+        <p:nvSpPr>
+          <p:cNvPr id="189" name="Google Shape;189;p19"/>
           <p:cNvSpPr txBox="1"/>
           <p:nvPr>
             <p:ph idx="2" type="body"/>
@@ -13160,7 +13614,7 @@
       </p:sp>
       <p:pic>
         <p:nvPicPr>
-          <p:cNvPr descr="This is the right way : r/ProgrammerHumor" id="159" name="Google Shape;159;p19"/>
+          <p:cNvPr descr="This is the right way : r/ProgrammerHumor" id="190" name="Google Shape;190;p19"/>
           <p:cNvPicPr preferRelativeResize="0"/>
           <p:nvPr/>
         </p:nvPicPr>
@@ -13193,12 +13647,12 @@
 </p:sld>
 </file>
 
-<file path=ppt/slides/slide11.xml><?xml version="1.0" encoding="utf-8"?>
+<file path=ppt/slides/slide12.xml><?xml version="1.0" encoding="utf-8"?>
 <p:sld xmlns:a="http://schemas.openxmlformats.org/drawingml/2006/main" xmlns:r="http://schemas.openxmlformats.org/officeDocument/2006/relationships" xmlns:mc="http://schemas.openxmlformats.org/markup-compatibility/2006" xmlns:mv="urn:schemas-microsoft-com:mac:vml" xmlns:p="http://schemas.openxmlformats.org/presentationml/2006/main" xmlns:c="http://schemas.openxmlformats.org/drawingml/2006/chart" xmlns:dgm="http://schemas.openxmlformats.org/drawingml/2006/diagram" xmlns:o="urn:schemas-microsoft-com:office:office" xmlns:v="urn:schemas-microsoft-com:vml" xmlns:pvml="urn:schemas-microsoft-com:office:powerpoint" xmlns:com="http://schemas.openxmlformats.org/drawingml/2006/compatibility" xmlns:p14="http://schemas.microsoft.com/office/powerpoint/2010/main" xmlns:p15="http://schemas.microsoft.com/office/powerpoint/2012/main" xmlns:ahyp="http://schemas.microsoft.com/office/drawing/2018/hyperlinkcolor">
   <p:cSld>
     <p:spTree>
       <p:nvGrpSpPr>
-        <p:cNvPr id="163" name="Shape 163"/>
+        <p:cNvPr id="194" name="Shape 194"/>
         <p:cNvGrpSpPr/>
         <p:nvPr/>
       </p:nvGrpSpPr>
@@ -13212,7 +13666,7 @@
       </p:grpSpPr>
       <p:sp>
         <p:nvSpPr>
-          <p:cNvPr id="164" name="Google Shape;164;p20"/>
+          <p:cNvPr id="195" name="Google Shape;195;p20"/>
           <p:cNvSpPr txBox="1"/>
           <p:nvPr>
             <p:ph type="title"/>
@@ -13264,7 +13718,7 @@
       </p:sp>
       <p:sp>
         <p:nvSpPr>
-          <p:cNvPr id="165" name="Google Shape;165;p20"/>
+          <p:cNvPr id="196" name="Google Shape;196;p20"/>
           <p:cNvSpPr txBox="1"/>
           <p:nvPr>
             <p:ph idx="2" type="body"/>
@@ -13514,7 +13968,7 @@
       </p:sp>
       <p:pic>
         <p:nvPicPr>
-          <p:cNvPr descr="Breakpoints Memes · ProgrammerHumor.io" id="166" name="Google Shape;166;p20"/>
+          <p:cNvPr descr="Breakpoints Memes · ProgrammerHumor.io" id="197" name="Google Shape;197;p20"/>
           <p:cNvPicPr preferRelativeResize="0"/>
           <p:nvPr/>
         </p:nvPicPr>
@@ -13547,12 +14001,12 @@
 </p:sld>
 </file>
 
-<file path=ppt/slides/slide12.xml><?xml version="1.0" encoding="utf-8"?>
+<file path=ppt/slides/slide13.xml><?xml version="1.0" encoding="utf-8"?>
 <p:sld xmlns:a="http://schemas.openxmlformats.org/drawingml/2006/main" xmlns:r="http://schemas.openxmlformats.org/officeDocument/2006/relationships" xmlns:mc="http://schemas.openxmlformats.org/markup-compatibility/2006" xmlns:mv="urn:schemas-microsoft-com:mac:vml" xmlns:p="http://schemas.openxmlformats.org/presentationml/2006/main" xmlns:c="http://schemas.openxmlformats.org/drawingml/2006/chart" xmlns:dgm="http://schemas.openxmlformats.org/drawingml/2006/diagram" xmlns:o="urn:schemas-microsoft-com:office:office" xmlns:v="urn:schemas-microsoft-com:vml" xmlns:pvml="urn:schemas-microsoft-com:office:powerpoint" xmlns:com="http://schemas.openxmlformats.org/drawingml/2006/compatibility" xmlns:p14="http://schemas.microsoft.com/office/powerpoint/2010/main" xmlns:p15="http://schemas.microsoft.com/office/powerpoint/2012/main" xmlns:ahyp="http://schemas.microsoft.com/office/drawing/2018/hyperlinkcolor">
   <p:cSld>
     <p:spTree>
       <p:nvGrpSpPr>
-        <p:cNvPr id="170" name="Shape 170"/>
+        <p:cNvPr id="201" name="Shape 201"/>
         <p:cNvGrpSpPr/>
         <p:nvPr/>
       </p:nvGrpSpPr>
@@ -13566,7 +14020,7 @@
       </p:grpSpPr>
       <p:sp>
         <p:nvSpPr>
-          <p:cNvPr id="171" name="Google Shape;171;p21"/>
+          <p:cNvPr id="202" name="Google Shape;202;p21"/>
           <p:cNvSpPr txBox="1"/>
           <p:nvPr>
             <p:ph type="title"/>
@@ -13618,7 +14072,7 @@
       </p:sp>
       <p:sp>
         <p:nvSpPr>
-          <p:cNvPr id="172" name="Google Shape;172;p21"/>
+          <p:cNvPr id="203" name="Google Shape;203;p21"/>
           <p:cNvSpPr txBox="1"/>
           <p:nvPr>
             <p:ph idx="2" type="body"/>
@@ -13862,7 +14316,7 @@
       </p:sp>
       <p:pic>
         <p:nvPicPr>
-          <p:cNvPr descr="Step by step debugging : r/ProgrammerHumor" id="173" name="Google Shape;173;p21"/>
+          <p:cNvPr descr="Step by step debugging : r/ProgrammerHumor" id="204" name="Google Shape;204;p21"/>
           <p:cNvPicPr preferRelativeResize="0"/>
           <p:nvPr/>
         </p:nvPicPr>
@@ -13895,12 +14349,12 @@
 </p:sld>
 </file>
 
-<file path=ppt/slides/slide13.xml><?xml version="1.0" encoding="utf-8"?>
+<file path=ppt/slides/slide14.xml><?xml version="1.0" encoding="utf-8"?>
 <p:sld xmlns:a="http://schemas.openxmlformats.org/drawingml/2006/main" xmlns:r="http://schemas.openxmlformats.org/officeDocument/2006/relationships" xmlns:mc="http://schemas.openxmlformats.org/markup-compatibility/2006" xmlns:mv="urn:schemas-microsoft-com:mac:vml" xmlns:p="http://schemas.openxmlformats.org/presentationml/2006/main" xmlns:c="http://schemas.openxmlformats.org/drawingml/2006/chart" xmlns:dgm="http://schemas.openxmlformats.org/drawingml/2006/diagram" xmlns:o="urn:schemas-microsoft-com:office:office" xmlns:v="urn:schemas-microsoft-com:vml" xmlns:pvml="urn:schemas-microsoft-com:office:powerpoint" xmlns:com="http://schemas.openxmlformats.org/drawingml/2006/compatibility" xmlns:p14="http://schemas.microsoft.com/office/powerpoint/2010/main" xmlns:p15="http://schemas.microsoft.com/office/powerpoint/2012/main" xmlns:ahyp="http://schemas.microsoft.com/office/drawing/2018/hyperlinkcolor">
   <p:cSld>
     <p:spTree>
       <p:nvGrpSpPr>
-        <p:cNvPr id="177" name="Shape 177"/>
+        <p:cNvPr id="208" name="Shape 208"/>
         <p:cNvGrpSpPr/>
         <p:nvPr/>
       </p:nvGrpSpPr>
@@ -13914,7 +14368,7 @@
       </p:grpSpPr>
       <p:sp>
         <p:nvSpPr>
-          <p:cNvPr id="178" name="Google Shape;178;p22"/>
+          <p:cNvPr id="209" name="Google Shape;209;p22"/>
           <p:cNvSpPr txBox="1"/>
           <p:nvPr>
             <p:ph type="title"/>
@@ -13966,7 +14420,7 @@
       </p:sp>
       <p:sp>
         <p:nvSpPr>
-          <p:cNvPr id="179" name="Google Shape;179;p22"/>
+          <p:cNvPr id="210" name="Google Shape;210;p22"/>
           <p:cNvSpPr txBox="1"/>
           <p:nvPr>
             <p:ph idx="2" type="body"/>
@@ -14109,7 +14563,7 @@
       </p:sp>
       <p:pic>
         <p:nvPicPr>
-          <p:cNvPr descr="Print statements &amp;gt;&amp;gt;&amp;gt; · ProgrammerHumor.io" id="180" name="Google Shape;180;p22"/>
+          <p:cNvPr descr="Print statements &amp;gt;&amp;gt;&amp;gt; · ProgrammerHumor.io" id="211" name="Google Shape;211;p22"/>
           <p:cNvPicPr preferRelativeResize="0"/>
           <p:nvPr/>
         </p:nvPicPr>
@@ -14142,12 +14596,12 @@
 </p:sld>
 </file>
 
-<file path=ppt/slides/slide14.xml><?xml version="1.0" encoding="utf-8"?>
+<file path=ppt/slides/slide15.xml><?xml version="1.0" encoding="utf-8"?>
 <p:sld xmlns:a="http://schemas.openxmlformats.org/drawingml/2006/main" xmlns:r="http://schemas.openxmlformats.org/officeDocument/2006/relationships" xmlns:mc="http://schemas.openxmlformats.org/markup-compatibility/2006" xmlns:mv="urn:schemas-microsoft-com:mac:vml" xmlns:p="http://schemas.openxmlformats.org/presentationml/2006/main" xmlns:c="http://schemas.openxmlformats.org/drawingml/2006/chart" xmlns:dgm="http://schemas.openxmlformats.org/drawingml/2006/diagram" xmlns:o="urn:schemas-microsoft-com:office:office" xmlns:v="urn:schemas-microsoft-com:vml" xmlns:pvml="urn:schemas-microsoft-com:office:powerpoint" xmlns:com="http://schemas.openxmlformats.org/drawingml/2006/compatibility" xmlns:p14="http://schemas.microsoft.com/office/powerpoint/2010/main" xmlns:p15="http://schemas.microsoft.com/office/powerpoint/2012/main" xmlns:ahyp="http://schemas.microsoft.com/office/drawing/2018/hyperlinkcolor">
   <p:cSld>
     <p:spTree>
       <p:nvGrpSpPr>
-        <p:cNvPr id="184" name="Shape 184"/>
+        <p:cNvPr id="215" name="Shape 215"/>
         <p:cNvGrpSpPr/>
         <p:nvPr/>
       </p:nvGrpSpPr>
@@ -14161,7 +14615,7 @@
       </p:grpSpPr>
       <p:sp>
         <p:nvSpPr>
-          <p:cNvPr id="185" name="Google Shape;185;p23"/>
+          <p:cNvPr id="216" name="Google Shape;216;p23"/>
           <p:cNvSpPr txBox="1"/>
           <p:nvPr>
             <p:ph type="title"/>
@@ -14213,7 +14667,7 @@
       </p:sp>
       <p:sp>
         <p:nvSpPr>
-          <p:cNvPr id="186" name="Google Shape;186;p23"/>
+          <p:cNvPr id="217" name="Google Shape;217;p23"/>
           <p:cNvSpPr txBox="1"/>
           <p:nvPr>
             <p:ph idx="2" type="body"/>
@@ -14356,7 +14810,7 @@
       </p:sp>
       <p:pic>
         <p:nvPicPr>
-          <p:cNvPr descr="Изображение выглядит как текст, снимок экрана&#10;&#10;Содержимое, созданное искусственным интеллектом, может быть неверным." id="187" name="Google Shape;187;p23"/>
+          <p:cNvPr descr="Изображение выглядит как текст, снимок экрана&#10;&#10;Содержимое, созданное искусственным интеллектом, может быть неверным." id="218" name="Google Shape;218;p23"/>
           <p:cNvPicPr preferRelativeResize="0"/>
           <p:nvPr/>
         </p:nvPicPr>
@@ -14383,7 +14837,7 @@
       </p:pic>
       <p:pic>
         <p:nvPicPr>
-          <p:cNvPr descr="Изображение выглядит как текст, снимок экрана, Шрифт, дизайн&#10;&#10;Содержимое, созданное искусственным интеллектом, может быть неверным." id="188" name="Google Shape;188;p23"/>
+          <p:cNvPr descr="Изображение выглядит как текст, снимок экрана, Шрифт, дизайн&#10;&#10;Содержимое, созданное искусственным интеллектом, может быть неверным." id="219" name="Google Shape;219;p23"/>
           <p:cNvPicPr preferRelativeResize="0"/>
           <p:nvPr/>
         </p:nvPicPr>
@@ -14416,12 +14870,12 @@
 </p:sld>
 </file>
 
-<file path=ppt/slides/slide15.xml><?xml version="1.0" encoding="utf-8"?>
+<file path=ppt/slides/slide16.xml><?xml version="1.0" encoding="utf-8"?>
 <p:sld xmlns:a="http://schemas.openxmlformats.org/drawingml/2006/main" xmlns:r="http://schemas.openxmlformats.org/officeDocument/2006/relationships" xmlns:mc="http://schemas.openxmlformats.org/markup-compatibility/2006" xmlns:mv="urn:schemas-microsoft-com:mac:vml" xmlns:p="http://schemas.openxmlformats.org/presentationml/2006/main" xmlns:c="http://schemas.openxmlformats.org/drawingml/2006/chart" xmlns:dgm="http://schemas.openxmlformats.org/drawingml/2006/diagram" xmlns:o="urn:schemas-microsoft-com:office:office" xmlns:v="urn:schemas-microsoft-com:vml" xmlns:pvml="urn:schemas-microsoft-com:office:powerpoint" xmlns:com="http://schemas.openxmlformats.org/drawingml/2006/compatibility" xmlns:p14="http://schemas.microsoft.com/office/powerpoint/2010/main" xmlns:p15="http://schemas.microsoft.com/office/powerpoint/2012/main" xmlns:ahyp="http://schemas.microsoft.com/office/drawing/2018/hyperlinkcolor">
   <p:cSld>
     <p:spTree>
       <p:nvGrpSpPr>
-        <p:cNvPr id="192" name="Shape 192"/>
+        <p:cNvPr id="223" name="Shape 223"/>
         <p:cNvGrpSpPr/>
         <p:nvPr/>
       </p:nvGrpSpPr>
@@ -14435,7 +14889,7 @@
       </p:grpSpPr>
       <p:sp>
         <p:nvSpPr>
-          <p:cNvPr id="193" name="Google Shape;193;p24"/>
+          <p:cNvPr id="224" name="Google Shape;224;p24"/>
           <p:cNvSpPr txBox="1"/>
           <p:nvPr>
             <p:ph type="title"/>
@@ -14487,7 +14941,7 @@
       </p:sp>
       <p:sp>
         <p:nvSpPr>
-          <p:cNvPr id="194" name="Google Shape;194;p24"/>
+          <p:cNvPr id="225" name="Google Shape;225;p24"/>
           <p:cNvSpPr txBox="1"/>
           <p:nvPr>
             <p:ph idx="2" type="body"/>
@@ -14675,7 +15129,7 @@
       </p:sp>
       <p:pic>
         <p:nvPicPr>
-          <p:cNvPr descr="Мем: &quot;продолжаю наблюдение&quot; - Все шаблоны - Meme-arsenal.com" id="195" name="Google Shape;195;p24"/>
+          <p:cNvPr descr="Мем: &quot;продолжаю наблюдение&quot; - Все шаблоны - Meme-arsenal.com" id="226" name="Google Shape;226;p24"/>
           <p:cNvPicPr preferRelativeResize="0"/>
           <p:nvPr/>
         </p:nvPicPr>
@@ -14708,12 +15162,12 @@
 </p:sld>
 </file>
 
-<file path=ppt/slides/slide16.xml><?xml version="1.0" encoding="utf-8"?>
+<file path=ppt/slides/slide17.xml><?xml version="1.0" encoding="utf-8"?>
 <p:sld xmlns:a="http://schemas.openxmlformats.org/drawingml/2006/main" xmlns:r="http://schemas.openxmlformats.org/officeDocument/2006/relationships" xmlns:mc="http://schemas.openxmlformats.org/markup-compatibility/2006" xmlns:mv="urn:schemas-microsoft-com:mac:vml" xmlns:p="http://schemas.openxmlformats.org/presentationml/2006/main" xmlns:c="http://schemas.openxmlformats.org/drawingml/2006/chart" xmlns:dgm="http://schemas.openxmlformats.org/drawingml/2006/diagram" xmlns:o="urn:schemas-microsoft-com:office:office" xmlns:v="urn:schemas-microsoft-com:vml" xmlns:pvml="urn:schemas-microsoft-com:office:powerpoint" xmlns:com="http://schemas.openxmlformats.org/drawingml/2006/compatibility" xmlns:p14="http://schemas.microsoft.com/office/powerpoint/2010/main" xmlns:p15="http://schemas.microsoft.com/office/powerpoint/2012/main" xmlns:ahyp="http://schemas.microsoft.com/office/drawing/2018/hyperlinkcolor">
   <p:cSld>
     <p:spTree>
       <p:nvGrpSpPr>
-        <p:cNvPr id="199" name="Shape 199"/>
+        <p:cNvPr id="230" name="Shape 230"/>
         <p:cNvGrpSpPr/>
         <p:nvPr/>
       </p:nvGrpSpPr>
@@ -14727,7 +15181,7 @@
       </p:grpSpPr>
       <p:sp>
         <p:nvSpPr>
-          <p:cNvPr id="200" name="Google Shape;200;g3d0496d8fde_0_7"/>
+          <p:cNvPr id="231" name="Google Shape;231;g3d0496d8fde_0_7"/>
           <p:cNvSpPr txBox="1"/>
           <p:nvPr>
             <p:ph idx="1" type="body"/>
@@ -14781,12 +15235,12 @@
 </p:sld>
 </file>
 
-<file path=ppt/slides/slide17.xml><?xml version="1.0" encoding="utf-8"?>
+<file path=ppt/slides/slide18.xml><?xml version="1.0" encoding="utf-8"?>
 <p:sld xmlns:a="http://schemas.openxmlformats.org/drawingml/2006/main" xmlns:r="http://schemas.openxmlformats.org/officeDocument/2006/relationships" xmlns:mc="http://schemas.openxmlformats.org/markup-compatibility/2006" xmlns:mv="urn:schemas-microsoft-com:mac:vml" xmlns:p="http://schemas.openxmlformats.org/presentationml/2006/main" xmlns:c="http://schemas.openxmlformats.org/drawingml/2006/chart" xmlns:dgm="http://schemas.openxmlformats.org/drawingml/2006/diagram" xmlns:o="urn:schemas-microsoft-com:office:office" xmlns:v="urn:schemas-microsoft-com:vml" xmlns:pvml="urn:schemas-microsoft-com:office:powerpoint" xmlns:com="http://schemas.openxmlformats.org/drawingml/2006/compatibility" xmlns:p14="http://schemas.microsoft.com/office/powerpoint/2010/main" xmlns:p15="http://schemas.microsoft.com/office/powerpoint/2012/main" xmlns:ahyp="http://schemas.microsoft.com/office/drawing/2018/hyperlinkcolor">
   <p:cSld>
     <p:spTree>
       <p:nvGrpSpPr>
-        <p:cNvPr id="204" name="Shape 204"/>
+        <p:cNvPr id="235" name="Shape 235"/>
         <p:cNvGrpSpPr/>
         <p:nvPr/>
       </p:nvGrpSpPr>
@@ -14800,7 +15254,7 @@
       </p:grpSpPr>
       <p:sp>
         <p:nvSpPr>
-          <p:cNvPr id="205" name="Google Shape;205;g3d0496d8fde_0_69"/>
+          <p:cNvPr id="236" name="Google Shape;236;g3d0496d8fde_0_69"/>
           <p:cNvSpPr txBox="1"/>
           <p:nvPr>
             <p:ph type="title"/>
@@ -14852,7 +15306,7 @@
       </p:sp>
       <p:sp>
         <p:nvSpPr>
-          <p:cNvPr id="206" name="Google Shape;206;g3d0496d8fde_0_69"/>
+          <p:cNvPr id="237" name="Google Shape;237;g3d0496d8fde_0_69"/>
           <p:cNvSpPr txBox="1"/>
           <p:nvPr>
             <p:ph idx="2" type="body"/>
@@ -14977,12 +15431,12 @@
 </p:sld>
 </file>
 
-<file path=ppt/slides/slide18.xml><?xml version="1.0" encoding="utf-8"?>
+<file path=ppt/slides/slide19.xml><?xml version="1.0" encoding="utf-8"?>
 <p:sld xmlns:a="http://schemas.openxmlformats.org/drawingml/2006/main" xmlns:r="http://schemas.openxmlformats.org/officeDocument/2006/relationships" xmlns:mc="http://schemas.openxmlformats.org/markup-compatibility/2006" xmlns:mv="urn:schemas-microsoft-com:mac:vml" xmlns:p="http://schemas.openxmlformats.org/presentationml/2006/main" xmlns:c="http://schemas.openxmlformats.org/drawingml/2006/chart" xmlns:dgm="http://schemas.openxmlformats.org/drawingml/2006/diagram" xmlns:o="urn:schemas-microsoft-com:office:office" xmlns:v="urn:schemas-microsoft-com:vml" xmlns:pvml="urn:schemas-microsoft-com:office:powerpoint" xmlns:com="http://schemas.openxmlformats.org/drawingml/2006/compatibility" xmlns:p14="http://schemas.microsoft.com/office/powerpoint/2010/main" xmlns:p15="http://schemas.microsoft.com/office/powerpoint/2012/main" xmlns:ahyp="http://schemas.microsoft.com/office/drawing/2018/hyperlinkcolor">
   <p:cSld>
     <p:spTree>
       <p:nvGrpSpPr>
-        <p:cNvPr id="210" name="Shape 210"/>
+        <p:cNvPr id="241" name="Shape 241"/>
         <p:cNvGrpSpPr/>
         <p:nvPr/>
       </p:nvGrpSpPr>
@@ -14996,7 +15450,7 @@
       </p:grpSpPr>
       <p:sp>
         <p:nvSpPr>
-          <p:cNvPr id="211" name="Google Shape;211;g3d0496d8fde_0_85"/>
+          <p:cNvPr id="242" name="Google Shape;242;g3d0496d8fde_0_85"/>
           <p:cNvSpPr txBox="1"/>
           <p:nvPr>
             <p:ph type="title"/>
@@ -15048,7 +15502,7 @@
       </p:sp>
       <p:sp>
         <p:nvSpPr>
-          <p:cNvPr id="212" name="Google Shape;212;g3d0496d8fde_0_85"/>
+          <p:cNvPr id="243" name="Google Shape;243;g3d0496d8fde_0_85"/>
           <p:cNvSpPr txBox="1"/>
           <p:nvPr>
             <p:ph idx="2" type="body"/>
@@ -15136,266 +15590,6 @@
             <a:r>
               <a:rPr i="1" lang="ru-RU" sz="2000"/>
               <a:t>p = remote('ctf.example.com', 5000)</a:t>
-            </a:r>
-            <a:endParaRPr b="1" sz="2000"/>
-          </a:p>
-        </p:txBody>
-      </p:sp>
-    </p:spTree>
-  </p:cSld>
-  <p:clrMapOvr>
-    <a:masterClrMapping/>
-  </p:clrMapOvr>
-</p:sld>
-</file>
-
-<file path=ppt/slides/slide19.xml><?xml version="1.0" encoding="utf-8"?>
-<p:sld xmlns:a="http://schemas.openxmlformats.org/drawingml/2006/main" xmlns:r="http://schemas.openxmlformats.org/officeDocument/2006/relationships" xmlns:mc="http://schemas.openxmlformats.org/markup-compatibility/2006" xmlns:mv="urn:schemas-microsoft-com:mac:vml" xmlns:p="http://schemas.openxmlformats.org/presentationml/2006/main" xmlns:c="http://schemas.openxmlformats.org/drawingml/2006/chart" xmlns:dgm="http://schemas.openxmlformats.org/drawingml/2006/diagram" xmlns:o="urn:schemas-microsoft-com:office:office" xmlns:v="urn:schemas-microsoft-com:vml" xmlns:pvml="urn:schemas-microsoft-com:office:powerpoint" xmlns:com="http://schemas.openxmlformats.org/drawingml/2006/compatibility" xmlns:p14="http://schemas.microsoft.com/office/powerpoint/2010/main" xmlns:p15="http://schemas.microsoft.com/office/powerpoint/2012/main" xmlns:ahyp="http://schemas.microsoft.com/office/drawing/2018/hyperlinkcolor">
-  <p:cSld>
-    <p:spTree>
-      <p:nvGrpSpPr>
-        <p:cNvPr id="216" name="Shape 216"/>
-        <p:cNvGrpSpPr/>
-        <p:nvPr/>
-      </p:nvGrpSpPr>
-      <p:grpSpPr>
-        <a:xfrm>
-          <a:off x="0" y="0"/>
-          <a:ext cx="0" cy="0"/>
-          <a:chOff x="0" y="0"/>
-          <a:chExt cx="0" cy="0"/>
-        </a:xfrm>
-      </p:grpSpPr>
-      <p:sp>
-        <p:nvSpPr>
-          <p:cNvPr id="217" name="Google Shape;217;g3d0496d8fde_0_77"/>
-          <p:cNvSpPr txBox="1"/>
-          <p:nvPr>
-            <p:ph type="title"/>
-          </p:nvPr>
-        </p:nvSpPr>
-        <p:spPr>
-          <a:xfrm>
-            <a:off x="559572" y="359101"/>
-            <a:ext cx="11081700" cy="523200"/>
-          </a:xfrm>
-          <a:prstGeom prst="rect">
-            <a:avLst/>
-          </a:prstGeom>
-          <a:noFill/>
-          <a:ln>
-            <a:noFill/>
-          </a:ln>
-        </p:spPr>
-        <p:txBody>
-          <a:bodyPr anchorCtr="0" anchor="ctr" bIns="45700" lIns="91425" spcFirstLastPara="1" rIns="91425" wrap="square" tIns="45700">
-            <a:spAutoFit/>
-          </a:bodyPr>
-          <a:lstStyle/>
-          <a:p>
-            <a:pPr indent="0" lvl="0" marL="0" rtl="0" algn="l">
-              <a:lnSpc>
-                <a:spcPct val="100000"/>
-              </a:lnSpc>
-              <a:spcBef>
-                <a:spcPts val="0"/>
-              </a:spcBef>
-              <a:spcAft>
-                <a:spcPts val="0"/>
-              </a:spcAft>
-              <a:buClr>
-                <a:schemeClr val="lt1"/>
-              </a:buClr>
-              <a:buSzPts val="2800"/>
-              <a:buFont typeface="Montserrat"/>
-              <a:buNone/>
-            </a:pPr>
-            <a:r>
-              <a:rPr lang="ru-RU"/>
-              <a:t>Отправка данных</a:t>
-            </a:r>
-            <a:endParaRPr/>
-          </a:p>
-        </p:txBody>
-      </p:sp>
-      <p:sp>
-        <p:nvSpPr>
-          <p:cNvPr id="218" name="Google Shape;218;g3d0496d8fde_0_77"/>
-          <p:cNvSpPr txBox="1"/>
-          <p:nvPr>
-            <p:ph idx="2" type="body"/>
-          </p:nvPr>
-        </p:nvSpPr>
-        <p:spPr>
-          <a:xfrm>
-            <a:off x="559575" y="1771050"/>
-            <a:ext cx="8727300" cy="2862900"/>
-          </a:xfrm>
-          <a:prstGeom prst="rect">
-            <a:avLst/>
-          </a:prstGeom>
-          <a:noFill/>
-          <a:ln>
-            <a:noFill/>
-          </a:ln>
-        </p:spPr>
-        <p:txBody>
-          <a:bodyPr anchorCtr="0" anchor="t" bIns="45700" lIns="91425" spcFirstLastPara="1" rIns="91425" wrap="square" tIns="45700">
-            <a:spAutoFit/>
-          </a:bodyPr>
-          <a:lstStyle/>
-          <a:p>
-            <a:pPr indent="0" lvl="0" marL="0" rtl="0" algn="l">
-              <a:spcBef>
-                <a:spcPts val="0"/>
-              </a:spcBef>
-              <a:spcAft>
-                <a:spcPts val="0"/>
-              </a:spcAft>
-              <a:buNone/>
-            </a:pPr>
-            <a:r>
-              <a:rPr i="1" lang="ru-RU" sz="2000"/>
-              <a:t>p.send(data) </a:t>
-            </a:r>
-            <a:r>
-              <a:rPr lang="ru-RU" sz="2000"/>
-              <a:t>- отправить байты</a:t>
-            </a:r>
-            <a:endParaRPr sz="2000"/>
-          </a:p>
-          <a:p>
-            <a:pPr indent="0" lvl="0" marL="0" rtl="0" algn="l">
-              <a:spcBef>
-                <a:spcPts val="0"/>
-              </a:spcBef>
-              <a:spcAft>
-                <a:spcPts val="0"/>
-              </a:spcAft>
-              <a:buNone/>
-            </a:pPr>
-            <a:r>
-              <a:rPr i="1" lang="ru-RU" sz="2000"/>
-              <a:t>p.sendline(data) </a:t>
-            </a:r>
-            <a:r>
-              <a:rPr lang="ru-RU" sz="2000"/>
-              <a:t>- отправить + \n</a:t>
-            </a:r>
-            <a:endParaRPr sz="2000"/>
-          </a:p>
-          <a:p>
-            <a:pPr indent="0" lvl="0" marL="0" rtl="0" algn="l">
-              <a:spcBef>
-                <a:spcPts val="0"/>
-              </a:spcBef>
-              <a:spcAft>
-                <a:spcPts val="0"/>
-              </a:spcAft>
-              <a:buNone/>
-            </a:pPr>
-            <a:r>
-              <a:rPr i="1" lang="ru-RU" sz="2000"/>
-              <a:t>p.sendafter(s, data) </a:t>
-            </a:r>
-            <a:r>
-              <a:rPr lang="ru-RU" sz="2000"/>
-              <a:t>- подождать строку s, затем отправить</a:t>
-            </a:r>
-            <a:endParaRPr sz="2000"/>
-          </a:p>
-          <a:p>
-            <a:pPr indent="0" lvl="0" marL="0" rtl="0" algn="l">
-              <a:spcBef>
-                <a:spcPts val="0"/>
-              </a:spcBef>
-              <a:spcAft>
-                <a:spcPts val="0"/>
-              </a:spcAft>
-              <a:buNone/>
-            </a:pPr>
-            <a:r>
-              <a:rPr i="1" lang="ru-RU" sz="2000"/>
-              <a:t>p.sendlineafter(s, data)</a:t>
-            </a:r>
-            <a:endParaRPr i="1" sz="2000"/>
-          </a:p>
-          <a:p>
-            <a:pPr indent="0" lvl="0" marL="0" rtl="0" algn="l">
-              <a:spcBef>
-                <a:spcPts val="0"/>
-              </a:spcBef>
-              <a:spcAft>
-                <a:spcPts val="0"/>
-              </a:spcAft>
-              <a:buNone/>
-            </a:pPr>
-            <a:r>
-              <a:t/>
-            </a:r>
-            <a:endParaRPr i="1" sz="2000"/>
-          </a:p>
-          <a:p>
-            <a:pPr indent="0" lvl="0" marL="0" rtl="0" algn="l">
-              <a:spcBef>
-                <a:spcPts val="0"/>
-              </a:spcBef>
-              <a:spcAft>
-                <a:spcPts val="0"/>
-              </a:spcAft>
-              <a:buNone/>
-            </a:pPr>
-            <a:r>
-              <a:rPr b="1" lang="ru-RU" sz="2000"/>
-              <a:t>Примеры:</a:t>
-            </a:r>
-            <a:endParaRPr b="1" sz="2000"/>
-          </a:p>
-          <a:p>
-            <a:pPr indent="0" lvl="0" marL="0" rtl="0" algn="l">
-              <a:spcBef>
-                <a:spcPts val="0"/>
-              </a:spcBef>
-              <a:spcAft>
-                <a:spcPts val="0"/>
-              </a:spcAft>
-              <a:buNone/>
-            </a:pPr>
-            <a:r>
-              <a:rPr i="1" lang="ru-RU" sz="2000"/>
-              <a:t>p.sendline(b"test")</a:t>
-            </a:r>
-            <a:endParaRPr i="1" sz="2000"/>
-          </a:p>
-          <a:p>
-            <a:pPr indent="0" lvl="0" marL="0" rtl="0" algn="l">
-              <a:spcBef>
-                <a:spcPts val="0"/>
-              </a:spcBef>
-              <a:spcAft>
-                <a:spcPts val="0"/>
-              </a:spcAft>
-              <a:buNone/>
-            </a:pPr>
-            <a:r>
-              <a:rPr i="1" lang="ru-RU" sz="2000"/>
-              <a:t>p.sendlineafter(b"Input:", payload)</a:t>
-            </a:r>
-            <a:endParaRPr i="1" sz="2000"/>
-          </a:p>
-          <a:p>
-            <a:pPr indent="0" lvl="0" marL="0" rtl="0" algn="l">
-              <a:spcBef>
-                <a:spcPts val="0"/>
-              </a:spcBef>
-              <a:spcAft>
-                <a:spcPts val="0"/>
-              </a:spcAft>
-              <a:buNone/>
-            </a:pPr>
-            <a:r>
-              <a:rPr i="1" lang="ru-RU" sz="2000"/>
-              <a:t>p.send(b"A" * 16)</a:t>
             </a:r>
             <a:endParaRPr b="1" sz="2000"/>
           </a:p>
@@ -15734,7 +15928,7 @@
   <p:cSld>
     <p:spTree>
       <p:nvGrpSpPr>
-        <p:cNvPr id="222" name="Shape 222"/>
+        <p:cNvPr id="247" name="Shape 247"/>
         <p:cNvGrpSpPr/>
         <p:nvPr/>
       </p:nvGrpSpPr>
@@ -15748,7 +15942,7 @@
       </p:grpSpPr>
       <p:sp>
         <p:nvSpPr>
-          <p:cNvPr id="223" name="Google Shape;223;g3d0496d8fde_0_93"/>
+          <p:cNvPr id="248" name="Google Shape;248;g3d0496d8fde_0_77"/>
           <p:cNvSpPr txBox="1"/>
           <p:nvPr>
             <p:ph type="title"/>
@@ -15792,7 +15986,7 @@
             </a:pPr>
             <a:r>
               <a:rPr lang="ru-RU"/>
-              <a:t>Чтение данных</a:t>
+              <a:t>Отправка данных</a:t>
             </a:r>
             <a:endParaRPr/>
           </a:p>
@@ -15800,7 +15994,7 @@
       </p:sp>
       <p:sp>
         <p:nvSpPr>
-          <p:cNvPr id="224" name="Google Shape;224;g3d0496d8fde_0_93"/>
+          <p:cNvPr id="249" name="Google Shape;249;g3d0496d8fde_0_77"/>
           <p:cNvSpPr txBox="1"/>
           <p:nvPr>
             <p:ph idx="2" type="body"/>
@@ -15836,11 +16030,11 @@
             </a:pPr>
             <a:r>
               <a:rPr i="1" lang="ru-RU" sz="2000"/>
-              <a:t>p.recv(n) </a:t>
+              <a:t>p.send(data) </a:t>
             </a:r>
             <a:r>
               <a:rPr lang="ru-RU" sz="2000"/>
-              <a:t>- прочитать n байт</a:t>
+              <a:t>- отправить байты</a:t>
             </a:r>
             <a:endParaRPr sz="2000"/>
           </a:p>
@@ -15856,11 +16050,11 @@
             </a:pPr>
             <a:r>
               <a:rPr i="1" lang="ru-RU" sz="2000"/>
-              <a:t>p.recvline() </a:t>
+              <a:t>p.sendline(data) </a:t>
             </a:r>
             <a:r>
               <a:rPr lang="ru-RU" sz="2000"/>
-              <a:t>- прочитать строку до \n</a:t>
+              <a:t>- отправить + \n</a:t>
             </a:r>
             <a:endParaRPr sz="2000"/>
           </a:p>
@@ -15876,11 +16070,11 @@
             </a:pPr>
             <a:r>
               <a:rPr i="1" lang="ru-RU" sz="2000"/>
-              <a:t>p.recvuntil(s) </a:t>
+              <a:t>p.sendafter(s, data) </a:t>
             </a:r>
             <a:r>
               <a:rPr lang="ru-RU" sz="2000"/>
-              <a:t>- читать до строки s</a:t>
+              <a:t>- подождать строку s, затем отправить</a:t>
             </a:r>
             <a:endParaRPr sz="2000"/>
           </a:p>
@@ -15896,33 +16090,9 @@
             </a:pPr>
             <a:r>
               <a:rPr i="1" lang="ru-RU" sz="2000"/>
-              <a:t>p.recvall() </a:t>
-            </a:r>
-            <a:r>
-              <a:rPr lang="ru-RU" sz="2000"/>
-              <a:t>- прочитать всё до EOF</a:t>
-            </a:r>
-            <a:endParaRPr sz="2000"/>
-          </a:p>
-          <a:p>
-            <a:pPr indent="0" lvl="0" marL="0" rtl="0" algn="l">
-              <a:spcBef>
-                <a:spcPts val="0"/>
-              </a:spcBef>
-              <a:spcAft>
-                <a:spcPts val="0"/>
-              </a:spcAft>
-              <a:buNone/>
-            </a:pPr>
-            <a:r>
-              <a:rPr i="1" lang="ru-RU" sz="2000"/>
-              <a:t>p.interactive() </a:t>
-            </a:r>
-            <a:r>
-              <a:rPr lang="ru-RU" sz="2000"/>
-              <a:t>- передать управление пользователю</a:t>
-            </a:r>
-            <a:endParaRPr sz="2000"/>
+              <a:t>p.sendlineafter(s, data)</a:t>
+            </a:r>
+            <a:endParaRPr i="1" sz="2000"/>
           </a:p>
           <a:p>
             <a:pPr indent="0" lvl="0" marL="0" rtl="0" algn="l">
@@ -15967,7 +16137,7 @@
             </a:pPr>
             <a:r>
               <a:rPr i="1" lang="ru-RU" sz="2000"/>
-              <a:t>data = p.recvline()</a:t>
+              <a:t>p.sendline(b"test")</a:t>
             </a:r>
             <a:endParaRPr i="1" sz="2000"/>
           </a:p>
@@ -15983,9 +16153,25 @@
             </a:pPr>
             <a:r>
               <a:rPr i="1" lang="ru-RU" sz="2000"/>
-              <a:t>p.interactive()</a:t>
+              <a:t>p.sendlineafter(b"Input:", payload)</a:t>
             </a:r>
             <a:endParaRPr i="1" sz="2000"/>
+          </a:p>
+          <a:p>
+            <a:pPr indent="0" lvl="0" marL="0" rtl="0" algn="l">
+              <a:spcBef>
+                <a:spcPts val="0"/>
+              </a:spcBef>
+              <a:spcAft>
+                <a:spcPts val="0"/>
+              </a:spcAft>
+              <a:buNone/>
+            </a:pPr>
+            <a:r>
+              <a:rPr i="1" lang="ru-RU" sz="2000"/>
+              <a:t>p.send(b"A" * 16)</a:t>
+            </a:r>
+            <a:endParaRPr b="1" sz="2000"/>
           </a:p>
         </p:txBody>
       </p:sp>
@@ -16002,7 +16188,7 @@
   <p:cSld>
     <p:spTree>
       <p:nvGrpSpPr>
-        <p:cNvPr id="228" name="Shape 228"/>
+        <p:cNvPr id="253" name="Shape 253"/>
         <p:cNvGrpSpPr/>
         <p:nvPr/>
       </p:nvGrpSpPr>
@@ -16016,7 +16202,7 @@
       </p:grpSpPr>
       <p:sp>
         <p:nvSpPr>
-          <p:cNvPr id="229" name="Google Shape;229;g3d0496d8fde_0_100"/>
+          <p:cNvPr id="254" name="Google Shape;254;g3d0496d8fde_0_93"/>
           <p:cNvSpPr txBox="1"/>
           <p:nvPr>
             <p:ph type="title"/>
@@ -16060,7 +16246,7 @@
             </a:pPr>
             <a:r>
               <a:rPr lang="ru-RU"/>
-              <a:t>Упаковка данных</a:t>
+              <a:t>Чтение данных</a:t>
             </a:r>
             <a:endParaRPr/>
           </a:p>
@@ -16068,7 +16254,275 @@
       </p:sp>
       <p:sp>
         <p:nvSpPr>
-          <p:cNvPr id="230" name="Google Shape;230;g3d0496d8fde_0_100"/>
+          <p:cNvPr id="255" name="Google Shape;255;g3d0496d8fde_0_93"/>
+          <p:cNvSpPr txBox="1"/>
+          <p:nvPr>
+            <p:ph idx="2" type="body"/>
+          </p:nvPr>
+        </p:nvSpPr>
+        <p:spPr>
+          <a:xfrm>
+            <a:off x="559575" y="1771050"/>
+            <a:ext cx="8727300" cy="2862900"/>
+          </a:xfrm>
+          <a:prstGeom prst="rect">
+            <a:avLst/>
+          </a:prstGeom>
+          <a:noFill/>
+          <a:ln>
+            <a:noFill/>
+          </a:ln>
+        </p:spPr>
+        <p:txBody>
+          <a:bodyPr anchorCtr="0" anchor="t" bIns="45700" lIns="91425" spcFirstLastPara="1" rIns="91425" wrap="square" tIns="45700">
+            <a:spAutoFit/>
+          </a:bodyPr>
+          <a:lstStyle/>
+          <a:p>
+            <a:pPr indent="0" lvl="0" marL="0" rtl="0" algn="l">
+              <a:spcBef>
+                <a:spcPts val="0"/>
+              </a:spcBef>
+              <a:spcAft>
+                <a:spcPts val="0"/>
+              </a:spcAft>
+              <a:buNone/>
+            </a:pPr>
+            <a:r>
+              <a:rPr i="1" lang="ru-RU" sz="2000"/>
+              <a:t>p.recv(n) </a:t>
+            </a:r>
+            <a:r>
+              <a:rPr lang="ru-RU" sz="2000"/>
+              <a:t>- прочитать n байт</a:t>
+            </a:r>
+            <a:endParaRPr sz="2000"/>
+          </a:p>
+          <a:p>
+            <a:pPr indent="0" lvl="0" marL="0" rtl="0" algn="l">
+              <a:spcBef>
+                <a:spcPts val="0"/>
+              </a:spcBef>
+              <a:spcAft>
+                <a:spcPts val="0"/>
+              </a:spcAft>
+              <a:buNone/>
+            </a:pPr>
+            <a:r>
+              <a:rPr i="1" lang="ru-RU" sz="2000"/>
+              <a:t>p.recvline() </a:t>
+            </a:r>
+            <a:r>
+              <a:rPr lang="ru-RU" sz="2000"/>
+              <a:t>- прочитать строку до \n</a:t>
+            </a:r>
+            <a:endParaRPr sz="2000"/>
+          </a:p>
+          <a:p>
+            <a:pPr indent="0" lvl="0" marL="0" rtl="0" algn="l">
+              <a:spcBef>
+                <a:spcPts val="0"/>
+              </a:spcBef>
+              <a:spcAft>
+                <a:spcPts val="0"/>
+              </a:spcAft>
+              <a:buNone/>
+            </a:pPr>
+            <a:r>
+              <a:rPr i="1" lang="ru-RU" sz="2000"/>
+              <a:t>p.recvuntil(s) </a:t>
+            </a:r>
+            <a:r>
+              <a:rPr lang="ru-RU" sz="2000"/>
+              <a:t>- читать до строки s</a:t>
+            </a:r>
+            <a:endParaRPr sz="2000"/>
+          </a:p>
+          <a:p>
+            <a:pPr indent="0" lvl="0" marL="0" rtl="0" algn="l">
+              <a:spcBef>
+                <a:spcPts val="0"/>
+              </a:spcBef>
+              <a:spcAft>
+                <a:spcPts val="0"/>
+              </a:spcAft>
+              <a:buNone/>
+            </a:pPr>
+            <a:r>
+              <a:rPr i="1" lang="ru-RU" sz="2000"/>
+              <a:t>p.recvall() </a:t>
+            </a:r>
+            <a:r>
+              <a:rPr lang="ru-RU" sz="2000"/>
+              <a:t>- прочитать всё до EOF</a:t>
+            </a:r>
+            <a:endParaRPr sz="2000"/>
+          </a:p>
+          <a:p>
+            <a:pPr indent="0" lvl="0" marL="0" rtl="0" algn="l">
+              <a:spcBef>
+                <a:spcPts val="0"/>
+              </a:spcBef>
+              <a:spcAft>
+                <a:spcPts val="0"/>
+              </a:spcAft>
+              <a:buNone/>
+            </a:pPr>
+            <a:r>
+              <a:rPr i="1" lang="ru-RU" sz="2000"/>
+              <a:t>p.interactive() </a:t>
+            </a:r>
+            <a:r>
+              <a:rPr lang="ru-RU" sz="2000"/>
+              <a:t>- передать управление пользователю</a:t>
+            </a:r>
+            <a:endParaRPr sz="2000"/>
+          </a:p>
+          <a:p>
+            <a:pPr indent="0" lvl="0" marL="0" rtl="0" algn="l">
+              <a:spcBef>
+                <a:spcPts val="0"/>
+              </a:spcBef>
+              <a:spcAft>
+                <a:spcPts val="0"/>
+              </a:spcAft>
+              <a:buNone/>
+            </a:pPr>
+            <a:r>
+              <a:t/>
+            </a:r>
+            <a:endParaRPr i="1" sz="2000"/>
+          </a:p>
+          <a:p>
+            <a:pPr indent="0" lvl="0" marL="0" rtl="0" algn="l">
+              <a:spcBef>
+                <a:spcPts val="0"/>
+              </a:spcBef>
+              <a:spcAft>
+                <a:spcPts val="0"/>
+              </a:spcAft>
+              <a:buNone/>
+            </a:pPr>
+            <a:r>
+              <a:rPr b="1" lang="ru-RU" sz="2000"/>
+              <a:t>Примеры:</a:t>
+            </a:r>
+            <a:endParaRPr b="1" sz="2000"/>
+          </a:p>
+          <a:p>
+            <a:pPr indent="0" lvl="0" marL="0" rtl="0" algn="l">
+              <a:spcBef>
+                <a:spcPts val="0"/>
+              </a:spcBef>
+              <a:spcAft>
+                <a:spcPts val="0"/>
+              </a:spcAft>
+              <a:buNone/>
+            </a:pPr>
+            <a:r>
+              <a:rPr i="1" lang="ru-RU" sz="2000"/>
+              <a:t>data = p.recvline()</a:t>
+            </a:r>
+            <a:endParaRPr i="1" sz="2000"/>
+          </a:p>
+          <a:p>
+            <a:pPr indent="0" lvl="0" marL="0" rtl="0" algn="l">
+              <a:spcBef>
+                <a:spcPts val="0"/>
+              </a:spcBef>
+              <a:spcAft>
+                <a:spcPts val="0"/>
+              </a:spcAft>
+              <a:buNone/>
+            </a:pPr>
+            <a:r>
+              <a:rPr i="1" lang="ru-RU" sz="2000"/>
+              <a:t>p.interactive()</a:t>
+            </a:r>
+            <a:endParaRPr i="1" sz="2000"/>
+          </a:p>
+        </p:txBody>
+      </p:sp>
+    </p:spTree>
+  </p:cSld>
+  <p:clrMapOvr>
+    <a:masterClrMapping/>
+  </p:clrMapOvr>
+</p:sld>
+</file>
+
+<file path=ppt/slides/slide22.xml><?xml version="1.0" encoding="utf-8"?>
+<p:sld xmlns:a="http://schemas.openxmlformats.org/drawingml/2006/main" xmlns:r="http://schemas.openxmlformats.org/officeDocument/2006/relationships" xmlns:mc="http://schemas.openxmlformats.org/markup-compatibility/2006" xmlns:mv="urn:schemas-microsoft-com:mac:vml" xmlns:p="http://schemas.openxmlformats.org/presentationml/2006/main" xmlns:c="http://schemas.openxmlformats.org/drawingml/2006/chart" xmlns:dgm="http://schemas.openxmlformats.org/drawingml/2006/diagram" xmlns:o="urn:schemas-microsoft-com:office:office" xmlns:v="urn:schemas-microsoft-com:vml" xmlns:pvml="urn:schemas-microsoft-com:office:powerpoint" xmlns:com="http://schemas.openxmlformats.org/drawingml/2006/compatibility" xmlns:p14="http://schemas.microsoft.com/office/powerpoint/2010/main" xmlns:p15="http://schemas.microsoft.com/office/powerpoint/2012/main" xmlns:ahyp="http://schemas.microsoft.com/office/drawing/2018/hyperlinkcolor">
+  <p:cSld>
+    <p:spTree>
+      <p:nvGrpSpPr>
+        <p:cNvPr id="259" name="Shape 259"/>
+        <p:cNvGrpSpPr/>
+        <p:nvPr/>
+      </p:nvGrpSpPr>
+      <p:grpSpPr>
+        <a:xfrm>
+          <a:off x="0" y="0"/>
+          <a:ext cx="0" cy="0"/>
+          <a:chOff x="0" y="0"/>
+          <a:chExt cx="0" cy="0"/>
+        </a:xfrm>
+      </p:grpSpPr>
+      <p:sp>
+        <p:nvSpPr>
+          <p:cNvPr id="260" name="Google Shape;260;g3d0496d8fde_0_100"/>
+          <p:cNvSpPr txBox="1"/>
+          <p:nvPr>
+            <p:ph type="title"/>
+          </p:nvPr>
+        </p:nvSpPr>
+        <p:spPr>
+          <a:xfrm>
+            <a:off x="559572" y="359101"/>
+            <a:ext cx="11081700" cy="523200"/>
+          </a:xfrm>
+          <a:prstGeom prst="rect">
+            <a:avLst/>
+          </a:prstGeom>
+          <a:noFill/>
+          <a:ln>
+            <a:noFill/>
+          </a:ln>
+        </p:spPr>
+        <p:txBody>
+          <a:bodyPr anchorCtr="0" anchor="ctr" bIns="45700" lIns="91425" spcFirstLastPara="1" rIns="91425" wrap="square" tIns="45700">
+            <a:spAutoFit/>
+          </a:bodyPr>
+          <a:lstStyle/>
+          <a:p>
+            <a:pPr indent="0" lvl="0" marL="0" rtl="0" algn="l">
+              <a:lnSpc>
+                <a:spcPct val="100000"/>
+              </a:lnSpc>
+              <a:spcBef>
+                <a:spcPts val="0"/>
+              </a:spcBef>
+              <a:spcAft>
+                <a:spcPts val="0"/>
+              </a:spcAft>
+              <a:buClr>
+                <a:schemeClr val="lt1"/>
+              </a:buClr>
+              <a:buSzPts val="2800"/>
+              <a:buFont typeface="Montserrat"/>
+              <a:buNone/>
+            </a:pPr>
+            <a:r>
+              <a:rPr lang="ru-RU"/>
+              <a:t>Упаковка данных</a:t>
+            </a:r>
+            <a:endParaRPr/>
+          </a:p>
+        </p:txBody>
+      </p:sp>
+      <p:sp>
+        <p:nvSpPr>
+          <p:cNvPr id="261" name="Google Shape;261;g3d0496d8fde_0_100"/>
           <p:cNvSpPr txBox="1"/>
           <p:nvPr>
             <p:ph idx="2" type="body"/>
@@ -16287,12 +16741,12 @@
 </p:sld>
 </file>
 
-<file path=ppt/slides/slide22.xml><?xml version="1.0" encoding="utf-8"?>
+<file path=ppt/slides/slide23.xml><?xml version="1.0" encoding="utf-8"?>
 <p:sld xmlns:a="http://schemas.openxmlformats.org/drawingml/2006/main" xmlns:r="http://schemas.openxmlformats.org/officeDocument/2006/relationships" xmlns:mc="http://schemas.openxmlformats.org/markup-compatibility/2006" xmlns:mv="urn:schemas-microsoft-com:mac:vml" xmlns:p="http://schemas.openxmlformats.org/presentationml/2006/main" xmlns:c="http://schemas.openxmlformats.org/drawingml/2006/chart" xmlns:dgm="http://schemas.openxmlformats.org/drawingml/2006/diagram" xmlns:o="urn:schemas-microsoft-com:office:office" xmlns:v="urn:schemas-microsoft-com:vml" xmlns:pvml="urn:schemas-microsoft-com:office:powerpoint" xmlns:com="http://schemas.openxmlformats.org/drawingml/2006/compatibility" xmlns:p14="http://schemas.microsoft.com/office/powerpoint/2010/main" xmlns:p15="http://schemas.microsoft.com/office/powerpoint/2012/main" xmlns:ahyp="http://schemas.microsoft.com/office/drawing/2018/hyperlinkcolor">
   <p:cSld>
     <p:spTree>
       <p:nvGrpSpPr>
-        <p:cNvPr id="234" name="Shape 234"/>
+        <p:cNvPr id="265" name="Shape 265"/>
         <p:cNvGrpSpPr/>
         <p:nvPr/>
       </p:nvGrpSpPr>
@@ -16306,7 +16760,7 @@
       </p:grpSpPr>
       <p:sp>
         <p:nvSpPr>
-          <p:cNvPr id="235" name="Google Shape;235;g3d0689a4217_0_3"/>
+          <p:cNvPr id="266" name="Google Shape;266;g3d0689a4217_0_3"/>
           <p:cNvSpPr txBox="1"/>
           <p:nvPr>
             <p:ph type="title"/>
@@ -16358,7 +16812,7 @@
       </p:sp>
       <p:sp>
         <p:nvSpPr>
-          <p:cNvPr id="236" name="Google Shape;236;g3d0689a4217_0_3"/>
+          <p:cNvPr id="267" name="Google Shape;267;g3d0689a4217_0_3"/>
           <p:cNvSpPr txBox="1"/>
           <p:nvPr>
             <p:ph idx="2" type="body"/>
@@ -16537,12 +16991,12 @@
 </p:sld>
 </file>
 
-<file path=ppt/slides/slide23.xml><?xml version="1.0" encoding="utf-8"?>
+<file path=ppt/slides/slide24.xml><?xml version="1.0" encoding="utf-8"?>
 <p:sld xmlns:a="http://schemas.openxmlformats.org/drawingml/2006/main" xmlns:r="http://schemas.openxmlformats.org/officeDocument/2006/relationships" xmlns:mc="http://schemas.openxmlformats.org/markup-compatibility/2006" xmlns:mv="urn:schemas-microsoft-com:mac:vml" xmlns:p="http://schemas.openxmlformats.org/presentationml/2006/main" xmlns:c="http://schemas.openxmlformats.org/drawingml/2006/chart" xmlns:dgm="http://schemas.openxmlformats.org/drawingml/2006/diagram" xmlns:o="urn:schemas-microsoft-com:office:office" xmlns:v="urn:schemas-microsoft-com:vml" xmlns:pvml="urn:schemas-microsoft-com:office:powerpoint" xmlns:com="http://schemas.openxmlformats.org/drawingml/2006/compatibility" xmlns:p14="http://schemas.microsoft.com/office/powerpoint/2010/main" xmlns:p15="http://schemas.microsoft.com/office/powerpoint/2012/main" xmlns:ahyp="http://schemas.microsoft.com/office/drawing/2018/hyperlinkcolor">
   <p:cSld>
     <p:spTree>
       <p:nvGrpSpPr>
-        <p:cNvPr id="240" name="Shape 240"/>
+        <p:cNvPr id="271" name="Shape 271"/>
         <p:cNvGrpSpPr/>
         <p:nvPr/>
       </p:nvGrpSpPr>
@@ -16556,7 +17010,7 @@
       </p:grpSpPr>
       <p:sp>
         <p:nvSpPr>
-          <p:cNvPr id="241" name="Google Shape;241;g3d0496d8fde_0_65"/>
+          <p:cNvPr id="272" name="Google Shape;272;g3d0496d8fde_0_65"/>
           <p:cNvSpPr txBox="1"/>
           <p:nvPr>
             <p:ph idx="1" type="body"/>
@@ -16610,12 +17064,12 @@
 </p:sld>
 </file>
 
-<file path=ppt/slides/slide24.xml><?xml version="1.0" encoding="utf-8"?>
+<file path=ppt/slides/slide25.xml><?xml version="1.0" encoding="utf-8"?>
 <p:sld xmlns:a="http://schemas.openxmlformats.org/drawingml/2006/main" xmlns:r="http://schemas.openxmlformats.org/officeDocument/2006/relationships" xmlns:mc="http://schemas.openxmlformats.org/markup-compatibility/2006" xmlns:mv="urn:schemas-microsoft-com:mac:vml" xmlns:p="http://schemas.openxmlformats.org/presentationml/2006/main" xmlns:c="http://schemas.openxmlformats.org/drawingml/2006/chart" xmlns:dgm="http://schemas.openxmlformats.org/drawingml/2006/diagram" xmlns:o="urn:schemas-microsoft-com:office:office" xmlns:v="urn:schemas-microsoft-com:vml" xmlns:pvml="urn:schemas-microsoft-com:office:powerpoint" xmlns:com="http://schemas.openxmlformats.org/drawingml/2006/compatibility" xmlns:p14="http://schemas.microsoft.com/office/powerpoint/2010/main" xmlns:p15="http://schemas.microsoft.com/office/powerpoint/2012/main" xmlns:ahyp="http://schemas.microsoft.com/office/drawing/2018/hyperlinkcolor">
   <p:cSld>
     <p:spTree>
       <p:nvGrpSpPr>
-        <p:cNvPr id="245" name="Shape 245"/>
+        <p:cNvPr id="276" name="Shape 276"/>
         <p:cNvGrpSpPr/>
         <p:nvPr/>
       </p:nvGrpSpPr>
@@ -16629,7 +17083,7 @@
       </p:grpSpPr>
       <p:sp>
         <p:nvSpPr>
-          <p:cNvPr id="246" name="Google Shape;246;g3d0496d8fde_0_0"/>
+          <p:cNvPr id="277" name="Google Shape;277;g3d0496d8fde_0_0"/>
           <p:cNvSpPr txBox="1"/>
           <p:nvPr>
             <p:ph type="title"/>
@@ -16681,7 +17135,7 @@
       </p:sp>
       <p:sp>
         <p:nvSpPr>
-          <p:cNvPr id="247" name="Google Shape;247;g3d0496d8fde_0_0"/>
+          <p:cNvPr id="278" name="Google Shape;278;g3d0496d8fde_0_0"/>
           <p:cNvSpPr txBox="1"/>
           <p:nvPr>
             <p:ph idx="2" type="body"/>
@@ -16780,7 +17234,7 @@
       </p:sp>
       <p:pic>
         <p:nvPicPr>
-          <p:cNvPr id="248" name="Google Shape;248;g3d0496d8fde_0_0"/>
+          <p:cNvPr id="279" name="Google Shape;279;g3d0496d8fde_0_0"/>
           <p:cNvPicPr preferRelativeResize="0"/>
           <p:nvPr/>
         </p:nvPicPr>
@@ -16814,12 +17268,12 @@
 </p:sld>
 </file>
 
-<file path=ppt/slides/slide25.xml><?xml version="1.0" encoding="utf-8"?>
+<file path=ppt/slides/slide26.xml><?xml version="1.0" encoding="utf-8"?>
 <p:sld xmlns:a="http://schemas.openxmlformats.org/drawingml/2006/main" xmlns:r="http://schemas.openxmlformats.org/officeDocument/2006/relationships" xmlns:mc="http://schemas.openxmlformats.org/markup-compatibility/2006" xmlns:mv="urn:schemas-microsoft-com:mac:vml" xmlns:p="http://schemas.openxmlformats.org/presentationml/2006/main" xmlns:c="http://schemas.openxmlformats.org/drawingml/2006/chart" xmlns:dgm="http://schemas.openxmlformats.org/drawingml/2006/diagram" xmlns:o="urn:schemas-microsoft-com:office:office" xmlns:v="urn:schemas-microsoft-com:vml" xmlns:pvml="urn:schemas-microsoft-com:office:powerpoint" xmlns:com="http://schemas.openxmlformats.org/drawingml/2006/compatibility" xmlns:p14="http://schemas.microsoft.com/office/powerpoint/2010/main" xmlns:p15="http://schemas.microsoft.com/office/powerpoint/2012/main" xmlns:ahyp="http://schemas.microsoft.com/office/drawing/2018/hyperlinkcolor">
   <p:cSld>
     <p:spTree>
       <p:nvGrpSpPr>
-        <p:cNvPr id="252" name="Shape 252"/>
+        <p:cNvPr id="283" name="Shape 283"/>
         <p:cNvGrpSpPr/>
         <p:nvPr/>
       </p:nvGrpSpPr>
@@ -16833,7 +17287,7 @@
       </p:grpSpPr>
       <p:sp>
         <p:nvSpPr>
-          <p:cNvPr id="253" name="Google Shape;253;g3d0496d8fde_0_17"/>
+          <p:cNvPr id="284" name="Google Shape;284;g3d0496d8fde_0_17"/>
           <p:cNvSpPr txBox="1"/>
           <p:nvPr>
             <p:ph type="title"/>
@@ -16885,7 +17339,7 @@
       </p:sp>
       <p:sp>
         <p:nvSpPr>
-          <p:cNvPr id="254" name="Google Shape;254;g3d0496d8fde_0_17"/>
+          <p:cNvPr id="285" name="Google Shape;285;g3d0496d8fde_0_17"/>
           <p:cNvSpPr txBox="1"/>
           <p:nvPr>
             <p:ph idx="2" type="body"/>
@@ -17013,7 +17467,7 @@
       </p:sp>
       <p:pic>
         <p:nvPicPr>
-          <p:cNvPr id="255" name="Google Shape;255;g3d0496d8fde_0_17"/>
+          <p:cNvPr id="286" name="Google Shape;286;g3d0496d8fde_0_17"/>
           <p:cNvPicPr preferRelativeResize="0"/>
           <p:nvPr/>
         </p:nvPicPr>
@@ -17047,12 +17501,12 @@
 </p:sld>
 </file>
 
-<file path=ppt/slides/slide26.xml><?xml version="1.0" encoding="utf-8"?>
+<file path=ppt/slides/slide27.xml><?xml version="1.0" encoding="utf-8"?>
 <p:sld xmlns:a="http://schemas.openxmlformats.org/drawingml/2006/main" xmlns:r="http://schemas.openxmlformats.org/officeDocument/2006/relationships" xmlns:mc="http://schemas.openxmlformats.org/markup-compatibility/2006" xmlns:mv="urn:schemas-microsoft-com:mac:vml" xmlns:p="http://schemas.openxmlformats.org/presentationml/2006/main" xmlns:c="http://schemas.openxmlformats.org/drawingml/2006/chart" xmlns:dgm="http://schemas.openxmlformats.org/drawingml/2006/diagram" xmlns:o="urn:schemas-microsoft-com:office:office" xmlns:v="urn:schemas-microsoft-com:vml" xmlns:pvml="urn:schemas-microsoft-com:office:powerpoint" xmlns:com="http://schemas.openxmlformats.org/drawingml/2006/compatibility" xmlns:p14="http://schemas.microsoft.com/office/powerpoint/2010/main" xmlns:p15="http://schemas.microsoft.com/office/powerpoint/2012/main" xmlns:ahyp="http://schemas.microsoft.com/office/drawing/2018/hyperlinkcolor">
   <p:cSld>
     <p:spTree>
       <p:nvGrpSpPr>
-        <p:cNvPr id="259" name="Shape 259"/>
+        <p:cNvPr id="290" name="Shape 290"/>
         <p:cNvGrpSpPr/>
         <p:nvPr/>
       </p:nvGrpSpPr>
@@ -17066,7 +17520,7 @@
       </p:grpSpPr>
       <p:sp>
         <p:nvSpPr>
-          <p:cNvPr id="260" name="Google Shape;260;g3d0496d8fde_0_31"/>
+          <p:cNvPr id="291" name="Google Shape;291;g3d0496d8fde_0_31"/>
           <p:cNvSpPr txBox="1"/>
           <p:nvPr>
             <p:ph type="title"/>
@@ -17118,7 +17572,7 @@
       </p:sp>
       <p:sp>
         <p:nvSpPr>
-          <p:cNvPr id="261" name="Google Shape;261;g3d0496d8fde_0_31"/>
+          <p:cNvPr id="292" name="Google Shape;292;g3d0496d8fde_0_31"/>
           <p:cNvSpPr txBox="1"/>
           <p:nvPr>
             <p:ph idx="2" type="body"/>
@@ -17285,7 +17739,7 @@
       </p:sp>
       <p:pic>
         <p:nvPicPr>
-          <p:cNvPr id="262" name="Google Shape;262;g3d0496d8fde_0_31"/>
+          <p:cNvPr id="293" name="Google Shape;293;g3d0496d8fde_0_31"/>
           <p:cNvPicPr preferRelativeResize="0"/>
           <p:nvPr/>
         </p:nvPicPr>
@@ -17318,12 +17772,12 @@
 </p:sld>
 </file>
 
-<file path=ppt/slides/slide27.xml><?xml version="1.0" encoding="utf-8"?>
+<file path=ppt/slides/slide28.xml><?xml version="1.0" encoding="utf-8"?>
 <p:sld xmlns:a="http://schemas.openxmlformats.org/drawingml/2006/main" xmlns:r="http://schemas.openxmlformats.org/officeDocument/2006/relationships" xmlns:mc="http://schemas.openxmlformats.org/markup-compatibility/2006" xmlns:mv="urn:schemas-microsoft-com:mac:vml" xmlns:p="http://schemas.openxmlformats.org/presentationml/2006/main" xmlns:c="http://schemas.openxmlformats.org/drawingml/2006/chart" xmlns:dgm="http://schemas.openxmlformats.org/drawingml/2006/diagram" xmlns:o="urn:schemas-microsoft-com:office:office" xmlns:v="urn:schemas-microsoft-com:vml" xmlns:pvml="urn:schemas-microsoft-com:office:powerpoint" xmlns:com="http://schemas.openxmlformats.org/drawingml/2006/compatibility" xmlns:p14="http://schemas.microsoft.com/office/powerpoint/2010/main" xmlns:p15="http://schemas.microsoft.com/office/powerpoint/2012/main" xmlns:ahyp="http://schemas.microsoft.com/office/drawing/2018/hyperlinkcolor">
   <p:cSld>
     <p:spTree>
       <p:nvGrpSpPr>
-        <p:cNvPr id="266" name="Shape 266"/>
+        <p:cNvPr id="297" name="Shape 297"/>
         <p:cNvGrpSpPr/>
         <p:nvPr/>
       </p:nvGrpSpPr>
@@ -17337,7 +17791,7 @@
       </p:grpSpPr>
       <p:sp>
         <p:nvSpPr>
-          <p:cNvPr id="267" name="Google Shape;267;g3d0496d8fde_0_37"/>
+          <p:cNvPr id="298" name="Google Shape;298;g3d0496d8fde_0_37"/>
           <p:cNvSpPr txBox="1"/>
           <p:nvPr>
             <p:ph type="title"/>
@@ -17389,7 +17843,7 @@
       </p:sp>
       <p:sp>
         <p:nvSpPr>
-          <p:cNvPr id="268" name="Google Shape;268;g3d0496d8fde_0_37"/>
+          <p:cNvPr id="299" name="Google Shape;299;g3d0496d8fde_0_37"/>
           <p:cNvSpPr txBox="1"/>
           <p:nvPr>
             <p:ph idx="2" type="body"/>
@@ -17668,12 +18122,12 @@
 </p:sld>
 </file>
 
-<file path=ppt/slides/slide28.xml><?xml version="1.0" encoding="utf-8"?>
+<file path=ppt/slides/slide29.xml><?xml version="1.0" encoding="utf-8"?>
 <p:sld xmlns:a="http://schemas.openxmlformats.org/drawingml/2006/main" xmlns:r="http://schemas.openxmlformats.org/officeDocument/2006/relationships" xmlns:mc="http://schemas.openxmlformats.org/markup-compatibility/2006" xmlns:mv="urn:schemas-microsoft-com:mac:vml" xmlns:p="http://schemas.openxmlformats.org/presentationml/2006/main" xmlns:c="http://schemas.openxmlformats.org/drawingml/2006/chart" xmlns:dgm="http://schemas.openxmlformats.org/drawingml/2006/diagram" xmlns:o="urn:schemas-microsoft-com:office:office" xmlns:v="urn:schemas-microsoft-com:vml" xmlns:pvml="urn:schemas-microsoft-com:office:powerpoint" xmlns:com="http://schemas.openxmlformats.org/drawingml/2006/compatibility" xmlns:p14="http://schemas.microsoft.com/office/powerpoint/2010/main" xmlns:p15="http://schemas.microsoft.com/office/powerpoint/2012/main" xmlns:ahyp="http://schemas.microsoft.com/office/drawing/2018/hyperlinkcolor">
   <p:cSld>
     <p:spTree>
       <p:nvGrpSpPr>
-        <p:cNvPr id="272" name="Shape 272"/>
+        <p:cNvPr id="303" name="Shape 303"/>
         <p:cNvGrpSpPr/>
         <p:nvPr/>
       </p:nvGrpSpPr>
@@ -17687,7 +18141,7 @@
       </p:grpSpPr>
       <p:sp>
         <p:nvSpPr>
-          <p:cNvPr id="273" name="Google Shape;273;g3d0496d8fde_0_43"/>
+          <p:cNvPr id="304" name="Google Shape;304;g3d0496d8fde_0_43"/>
           <p:cNvSpPr txBox="1"/>
           <p:nvPr>
             <p:ph type="title"/>
@@ -17739,7 +18193,7 @@
       </p:sp>
       <p:pic>
         <p:nvPicPr>
-          <p:cNvPr id="274" name="Google Shape;274;g3d0496d8fde_0_43"/>
+          <p:cNvPr id="305" name="Google Shape;305;g3d0496d8fde_0_43"/>
           <p:cNvPicPr preferRelativeResize="0"/>
           <p:nvPr/>
         </p:nvPicPr>
@@ -17755,111 +18209,6 @@
           <a:xfrm>
             <a:off x="2946488" y="1232875"/>
             <a:ext cx="6307876" cy="5625126"/>
-          </a:xfrm>
-          <a:prstGeom prst="rect">
-            <a:avLst/>
-          </a:prstGeom>
-          <a:noFill/>
-          <a:ln>
-            <a:noFill/>
-          </a:ln>
-        </p:spPr>
-      </p:pic>
-    </p:spTree>
-  </p:cSld>
-  <p:clrMapOvr>
-    <a:masterClrMapping/>
-  </p:clrMapOvr>
-</p:sld>
-</file>
-
-<file path=ppt/slides/slide29.xml><?xml version="1.0" encoding="utf-8"?>
-<p:sld xmlns:a="http://schemas.openxmlformats.org/drawingml/2006/main" xmlns:r="http://schemas.openxmlformats.org/officeDocument/2006/relationships" xmlns:mc="http://schemas.openxmlformats.org/markup-compatibility/2006" xmlns:mv="urn:schemas-microsoft-com:mac:vml" xmlns:p="http://schemas.openxmlformats.org/presentationml/2006/main" xmlns:c="http://schemas.openxmlformats.org/drawingml/2006/chart" xmlns:dgm="http://schemas.openxmlformats.org/drawingml/2006/diagram" xmlns:o="urn:schemas-microsoft-com:office:office" xmlns:v="urn:schemas-microsoft-com:vml" xmlns:pvml="urn:schemas-microsoft-com:office:powerpoint" xmlns:com="http://schemas.openxmlformats.org/drawingml/2006/compatibility" xmlns:p14="http://schemas.microsoft.com/office/powerpoint/2010/main" xmlns:p15="http://schemas.microsoft.com/office/powerpoint/2012/main" xmlns:ahyp="http://schemas.microsoft.com/office/drawing/2018/hyperlinkcolor">
-  <p:cSld>
-    <p:spTree>
-      <p:nvGrpSpPr>
-        <p:cNvPr id="278" name="Shape 278"/>
-        <p:cNvGrpSpPr/>
-        <p:nvPr/>
-      </p:nvGrpSpPr>
-      <p:grpSpPr>
-        <a:xfrm>
-          <a:off x="0" y="0"/>
-          <a:ext cx="0" cy="0"/>
-          <a:chOff x="0" y="0"/>
-          <a:chExt cx="0" cy="0"/>
-        </a:xfrm>
-      </p:grpSpPr>
-      <p:sp>
-        <p:nvSpPr>
-          <p:cNvPr id="279" name="Google Shape;279;g3d0496d8fde_0_53"/>
-          <p:cNvSpPr txBox="1"/>
-          <p:nvPr>
-            <p:ph type="title"/>
-          </p:nvPr>
-        </p:nvSpPr>
-        <p:spPr>
-          <a:xfrm>
-            <a:off x="559572" y="359101"/>
-            <a:ext cx="11081700" cy="523200"/>
-          </a:xfrm>
-          <a:prstGeom prst="rect">
-            <a:avLst/>
-          </a:prstGeom>
-          <a:noFill/>
-          <a:ln>
-            <a:noFill/>
-          </a:ln>
-        </p:spPr>
-        <p:txBody>
-          <a:bodyPr anchorCtr="0" anchor="ctr" bIns="45700" lIns="91425" spcFirstLastPara="1" rIns="91425" wrap="square" tIns="45700">
-            <a:spAutoFit/>
-          </a:bodyPr>
-          <a:lstStyle/>
-          <a:p>
-            <a:pPr indent="0" lvl="0" marL="0" rtl="0" algn="l">
-              <a:lnSpc>
-                <a:spcPct val="100000"/>
-              </a:lnSpc>
-              <a:spcBef>
-                <a:spcPts val="0"/>
-              </a:spcBef>
-              <a:spcAft>
-                <a:spcPts val="0"/>
-              </a:spcAft>
-              <a:buClr>
-                <a:schemeClr val="lt1"/>
-              </a:buClr>
-              <a:buSzPts val="2800"/>
-              <a:buFont typeface="Montserrat"/>
-              <a:buNone/>
-            </a:pPr>
-            <a:r>
-              <a:rPr lang="ru-RU"/>
-              <a:t>Переписывание указателя</a:t>
-            </a:r>
-            <a:endParaRPr/>
-          </a:p>
-        </p:txBody>
-      </p:sp>
-      <p:pic>
-        <p:nvPicPr>
-          <p:cNvPr id="280" name="Google Shape;280;g3d0496d8fde_0_53"/>
-          <p:cNvPicPr preferRelativeResize="0"/>
-          <p:nvPr/>
-        </p:nvPicPr>
-        <p:blipFill>
-          <a:blip r:embed="rId3">
-            <a:alphaModFix/>
-          </a:blip>
-          <a:stretch>
-            <a:fillRect/>
-          </a:stretch>
-        </p:blipFill>
-        <p:spPr>
-          <a:xfrm>
-            <a:off x="3784513" y="1231475"/>
-            <a:ext cx="4631825" cy="5626524"/>
           </a:xfrm>
           <a:prstGeom prst="rect">
             <a:avLst/>
@@ -17897,16 +18246,590 @@
       </p:grpSpPr>
       <p:sp>
         <p:nvSpPr>
-          <p:cNvPr id="85" name="Google Shape;85;g3cc93861824_0_7"/>
-          <p:cNvSpPr txBox="1"/>
-          <p:nvPr>
-            <p:ph idx="1" type="body"/>
-          </p:nvPr>
+          <p:cNvPr id="85" name="Google Shape;85;g3d0689a4217_2_0"/>
+          <p:cNvSpPr/>
+          <p:nvPr/>
         </p:nvSpPr>
         <p:spPr>
           <a:xfrm>
-            <a:off x="560200" y="3105825"/>
-            <a:ext cx="6389700" cy="1200288"/>
+            <a:off x="2034675" y="5098800"/>
+            <a:ext cx="4248300" cy="1131000"/>
+          </a:xfrm>
+          <a:prstGeom prst="roundRect">
+            <a:avLst>
+              <a:gd fmla="val 16667" name="adj"/>
+            </a:avLst>
+          </a:prstGeom>
+          <a:solidFill>
+            <a:schemeClr val="dk2"/>
+          </a:solidFill>
+          <a:ln cap="flat" cmpd="sng" w="9525">
+            <a:solidFill>
+              <a:schemeClr val="dk2"/>
+            </a:solidFill>
+            <a:prstDash val="solid"/>
+            <a:round/>
+            <a:headEnd len="sm" w="sm" type="none"/>
+            <a:tailEnd len="sm" w="sm" type="none"/>
+          </a:ln>
+        </p:spPr>
+        <p:txBody>
+          <a:bodyPr anchorCtr="0" anchor="ctr" bIns="91425" lIns="91425" spcFirstLastPara="1" rIns="91425" wrap="square" tIns="91425">
+            <a:noAutofit/>
+          </a:bodyPr>
+          <a:lstStyle/>
+          <a:p>
+            <a:pPr indent="0" lvl="0" marL="0" rtl="0" algn="ctr">
+              <a:spcBef>
+                <a:spcPts val="0"/>
+              </a:spcBef>
+              <a:spcAft>
+                <a:spcPts val="0"/>
+              </a:spcAft>
+              <a:buNone/>
+            </a:pPr>
+            <a:r>
+              <a:rPr b="1" lang="ru-RU" sz="3000">
+                <a:solidFill>
+                  <a:schemeClr val="lt1"/>
+                </a:solidFill>
+                <a:latin typeface="Montserrat"/>
+                <a:ea typeface="Montserrat"/>
+                <a:cs typeface="Montserrat"/>
+                <a:sym typeface="Montserrat"/>
+              </a:rPr>
+              <a:t>МАШИННЫЙ КОД</a:t>
+            </a:r>
+            <a:endParaRPr b="1" sz="3000">
+              <a:solidFill>
+                <a:schemeClr val="lt1"/>
+              </a:solidFill>
+              <a:latin typeface="Montserrat"/>
+              <a:ea typeface="Montserrat"/>
+              <a:cs typeface="Montserrat"/>
+              <a:sym typeface="Montserrat"/>
+            </a:endParaRPr>
+          </a:p>
+        </p:txBody>
+      </p:sp>
+      <p:sp>
+        <p:nvSpPr>
+          <p:cNvPr id="86" name="Google Shape;86;g3d0689a4217_2_0"/>
+          <p:cNvSpPr/>
+          <p:nvPr/>
+        </p:nvSpPr>
+        <p:spPr>
+          <a:xfrm>
+            <a:off x="6529375" y="5454000"/>
+            <a:ext cx="1087500" cy="420600"/>
+          </a:xfrm>
+          <a:prstGeom prst="rightArrow">
+            <a:avLst>
+              <a:gd fmla="val 50000" name="adj1"/>
+              <a:gd fmla="val 50000" name="adj2"/>
+            </a:avLst>
+          </a:prstGeom>
+          <a:solidFill>
+            <a:schemeClr val="dk2"/>
+          </a:solidFill>
+          <a:ln cap="flat" cmpd="sng" w="9525">
+            <a:solidFill>
+              <a:schemeClr val="dk2"/>
+            </a:solidFill>
+            <a:prstDash val="solid"/>
+            <a:round/>
+            <a:headEnd len="sm" w="sm" type="none"/>
+            <a:tailEnd len="sm" w="sm" type="none"/>
+          </a:ln>
+        </p:spPr>
+        <p:txBody>
+          <a:bodyPr anchorCtr="0" anchor="ctr" bIns="91425" lIns="91425" spcFirstLastPara="1" rIns="91425" wrap="square" tIns="91425">
+            <a:noAutofit/>
+          </a:bodyPr>
+          <a:lstStyle/>
+          <a:p>
+            <a:pPr indent="0" lvl="0" marL="0" rtl="0" algn="ctr">
+              <a:spcBef>
+                <a:spcPts val="0"/>
+              </a:spcBef>
+              <a:spcAft>
+                <a:spcPts val="0"/>
+              </a:spcAft>
+              <a:buNone/>
+            </a:pPr>
+            <a:r>
+              <a:t/>
+            </a:r>
+            <a:endParaRPr/>
+          </a:p>
+        </p:txBody>
+      </p:sp>
+      <p:sp>
+        <p:nvSpPr>
+          <p:cNvPr id="87" name="Google Shape;87;g3d0689a4217_2_0"/>
+          <p:cNvSpPr/>
+          <p:nvPr/>
+        </p:nvSpPr>
+        <p:spPr>
+          <a:xfrm>
+            <a:off x="7950250" y="5098700"/>
+            <a:ext cx="3479700" cy="1131000"/>
+          </a:xfrm>
+          <a:prstGeom prst="rect">
+            <a:avLst/>
+          </a:prstGeom>
+          <a:solidFill>
+            <a:schemeClr val="lt1"/>
+          </a:solidFill>
+          <a:ln cap="flat" cmpd="sng" w="9525">
+            <a:solidFill>
+              <a:schemeClr val="dk2"/>
+            </a:solidFill>
+            <a:prstDash val="solid"/>
+            <a:round/>
+            <a:headEnd len="sm" w="sm" type="none"/>
+            <a:tailEnd len="sm" w="sm" type="none"/>
+          </a:ln>
+        </p:spPr>
+        <p:txBody>
+          <a:bodyPr anchorCtr="0" anchor="ctr" bIns="91425" lIns="91425" spcFirstLastPara="1" rIns="91425" wrap="square" tIns="91425">
+            <a:noAutofit/>
+          </a:bodyPr>
+          <a:lstStyle/>
+          <a:p>
+            <a:pPr indent="0" lvl="0" marL="0" rtl="0" algn="ctr">
+              <a:spcBef>
+                <a:spcPts val="0"/>
+              </a:spcBef>
+              <a:spcAft>
+                <a:spcPts val="0"/>
+              </a:spcAft>
+              <a:buNone/>
+            </a:pPr>
+            <a:r>
+              <a:rPr b="1" lang="ru-RU" sz="2000">
+                <a:latin typeface="Montserrat"/>
+                <a:ea typeface="Montserrat"/>
+                <a:cs typeface="Montserrat"/>
+                <a:sym typeface="Montserrat"/>
+              </a:rPr>
+              <a:t>Опкоды</a:t>
+            </a:r>
+            <a:endParaRPr b="1" sz="2000">
+              <a:latin typeface="Montserrat"/>
+              <a:ea typeface="Montserrat"/>
+              <a:cs typeface="Montserrat"/>
+              <a:sym typeface="Montserrat"/>
+            </a:endParaRPr>
+          </a:p>
+          <a:p>
+            <a:pPr indent="0" lvl="0" marL="0" rtl="0" algn="ctr">
+              <a:spcBef>
+                <a:spcPts val="0"/>
+              </a:spcBef>
+              <a:spcAft>
+                <a:spcPts val="0"/>
+              </a:spcAft>
+              <a:buNone/>
+            </a:pPr>
+            <a:r>
+              <a:rPr b="1" lang="ru-RU" sz="2000">
+                <a:latin typeface="Montserrat"/>
+                <a:ea typeface="Montserrat"/>
+                <a:cs typeface="Montserrat"/>
+                <a:sym typeface="Montserrat"/>
+              </a:rPr>
+              <a:t>(номера команд)</a:t>
+            </a:r>
+            <a:endParaRPr b="1" sz="2000">
+              <a:latin typeface="Montserrat"/>
+              <a:ea typeface="Montserrat"/>
+              <a:cs typeface="Montserrat"/>
+              <a:sym typeface="Montserrat"/>
+            </a:endParaRPr>
+          </a:p>
+        </p:txBody>
+      </p:sp>
+      <p:grpSp>
+        <p:nvGrpSpPr>
+          <p:cNvPr id="88" name="Google Shape;88;g3d0689a4217_2_0"/>
+          <p:cNvGrpSpPr/>
+          <p:nvPr/>
+        </p:nvGrpSpPr>
+        <p:grpSpPr>
+          <a:xfrm>
+            <a:off x="197329" y="5329041"/>
+            <a:ext cx="1590947" cy="670526"/>
+            <a:chOff x="90654" y="5204078"/>
+            <a:chExt cx="1590947" cy="670526"/>
+          </a:xfrm>
+        </p:grpSpPr>
+        <p:pic>
+          <p:nvPicPr>
+            <p:cNvPr id="89" name="Google Shape;89;g3d0689a4217_2_0"/>
+            <p:cNvPicPr preferRelativeResize="0"/>
+            <p:nvPr/>
+          </p:nvPicPr>
+          <p:blipFill>
+            <a:blip r:embed="rId3">
+              <a:alphaModFix/>
+            </a:blip>
+            <a:stretch>
+              <a:fillRect/>
+            </a:stretch>
+          </p:blipFill>
+          <p:spPr>
+            <a:xfrm>
+              <a:off x="90654" y="5204079"/>
+              <a:ext cx="670525" cy="670525"/>
+            </a:xfrm>
+            <a:prstGeom prst="rect">
+              <a:avLst/>
+            </a:prstGeom>
+            <a:noFill/>
+            <a:ln>
+              <a:noFill/>
+            </a:ln>
+          </p:spPr>
+        </p:pic>
+        <p:pic>
+          <p:nvPicPr>
+            <p:cNvPr id="90" name="Google Shape;90;g3d0689a4217_2_0"/>
+            <p:cNvPicPr preferRelativeResize="0"/>
+            <p:nvPr/>
+          </p:nvPicPr>
+          <p:blipFill>
+            <a:blip r:embed="rId4">
+              <a:alphaModFix/>
+            </a:blip>
+            <a:stretch>
+              <a:fillRect/>
+            </a:stretch>
+          </p:blipFill>
+          <p:spPr>
+            <a:xfrm>
+              <a:off x="1011075" y="5204078"/>
+              <a:ext cx="670525" cy="670525"/>
+            </a:xfrm>
+            <a:prstGeom prst="rect">
+              <a:avLst/>
+            </a:prstGeom>
+            <a:noFill/>
+            <a:ln>
+              <a:noFill/>
+            </a:ln>
+          </p:spPr>
+        </p:pic>
+      </p:grpSp>
+      <p:sp>
+        <p:nvSpPr>
+          <p:cNvPr id="91" name="Google Shape;91;g3d0689a4217_2_0"/>
+          <p:cNvSpPr/>
+          <p:nvPr/>
+        </p:nvSpPr>
+        <p:spPr>
+          <a:xfrm>
+            <a:off x="2034675" y="3235848"/>
+            <a:ext cx="4248300" cy="1131000"/>
+          </a:xfrm>
+          <a:prstGeom prst="roundRect">
+            <a:avLst>
+              <a:gd fmla="val 16667" name="adj"/>
+            </a:avLst>
+          </a:prstGeom>
+          <a:solidFill>
+            <a:schemeClr val="dk2"/>
+          </a:solidFill>
+          <a:ln cap="flat" cmpd="sng" w="9525">
+            <a:solidFill>
+              <a:schemeClr val="dk2"/>
+            </a:solidFill>
+            <a:prstDash val="solid"/>
+            <a:round/>
+            <a:headEnd len="sm" w="sm" type="none"/>
+            <a:tailEnd len="sm" w="sm" type="none"/>
+          </a:ln>
+        </p:spPr>
+        <p:txBody>
+          <a:bodyPr anchorCtr="0" anchor="ctr" bIns="91425" lIns="91425" spcFirstLastPara="1" rIns="91425" wrap="square" tIns="91425">
+            <a:noAutofit/>
+          </a:bodyPr>
+          <a:lstStyle/>
+          <a:p>
+            <a:pPr indent="0" lvl="0" marL="0" rtl="0" algn="ctr">
+              <a:spcBef>
+                <a:spcPts val="0"/>
+              </a:spcBef>
+              <a:spcAft>
+                <a:spcPts val="0"/>
+              </a:spcAft>
+              <a:buNone/>
+            </a:pPr>
+            <a:r>
+              <a:rPr b="1" lang="ru-RU" sz="3000">
+                <a:solidFill>
+                  <a:schemeClr val="lt1"/>
+                </a:solidFill>
+                <a:latin typeface="Montserrat"/>
+                <a:ea typeface="Montserrat"/>
+                <a:cs typeface="Montserrat"/>
+                <a:sym typeface="Montserrat"/>
+              </a:rPr>
+              <a:t>ЯЗЫК АССЕМБЛЕРА</a:t>
+            </a:r>
+            <a:endParaRPr b="1" sz="3000">
+              <a:solidFill>
+                <a:schemeClr val="lt1"/>
+              </a:solidFill>
+              <a:latin typeface="Montserrat"/>
+              <a:ea typeface="Montserrat"/>
+              <a:cs typeface="Montserrat"/>
+              <a:sym typeface="Montserrat"/>
+            </a:endParaRPr>
+          </a:p>
+        </p:txBody>
+      </p:sp>
+      <p:sp>
+        <p:nvSpPr>
+          <p:cNvPr id="92" name="Google Shape;92;g3d0689a4217_2_0"/>
+          <p:cNvSpPr/>
+          <p:nvPr/>
+        </p:nvSpPr>
+        <p:spPr>
+          <a:xfrm>
+            <a:off x="6529375" y="3591048"/>
+            <a:ext cx="1087500" cy="420600"/>
+          </a:xfrm>
+          <a:prstGeom prst="rightArrow">
+            <a:avLst>
+              <a:gd fmla="val 50000" name="adj1"/>
+              <a:gd fmla="val 50000" name="adj2"/>
+            </a:avLst>
+          </a:prstGeom>
+          <a:solidFill>
+            <a:schemeClr val="dk2"/>
+          </a:solidFill>
+          <a:ln cap="flat" cmpd="sng" w="9525">
+            <a:solidFill>
+              <a:schemeClr val="dk2"/>
+            </a:solidFill>
+            <a:prstDash val="solid"/>
+            <a:round/>
+            <a:headEnd len="sm" w="sm" type="none"/>
+            <a:tailEnd len="sm" w="sm" type="none"/>
+          </a:ln>
+        </p:spPr>
+        <p:txBody>
+          <a:bodyPr anchorCtr="0" anchor="ctr" bIns="91425" lIns="91425" spcFirstLastPara="1" rIns="91425" wrap="square" tIns="91425">
+            <a:noAutofit/>
+          </a:bodyPr>
+          <a:lstStyle/>
+          <a:p>
+            <a:pPr indent="0" lvl="0" marL="0" rtl="0" algn="ctr">
+              <a:spcBef>
+                <a:spcPts val="0"/>
+              </a:spcBef>
+              <a:spcAft>
+                <a:spcPts val="0"/>
+              </a:spcAft>
+              <a:buNone/>
+            </a:pPr>
+            <a:r>
+              <a:t/>
+            </a:r>
+            <a:endParaRPr/>
+          </a:p>
+        </p:txBody>
+      </p:sp>
+      <p:sp>
+        <p:nvSpPr>
+          <p:cNvPr id="93" name="Google Shape;93;g3d0689a4217_2_0"/>
+          <p:cNvSpPr/>
+          <p:nvPr/>
+        </p:nvSpPr>
+        <p:spPr>
+          <a:xfrm>
+            <a:off x="7950250" y="3235748"/>
+            <a:ext cx="3479700" cy="1131000"/>
+          </a:xfrm>
+          <a:prstGeom prst="rect">
+            <a:avLst/>
+          </a:prstGeom>
+          <a:solidFill>
+            <a:schemeClr val="lt1"/>
+          </a:solidFill>
+          <a:ln cap="flat" cmpd="sng" w="9525">
+            <a:solidFill>
+              <a:schemeClr val="dk2"/>
+            </a:solidFill>
+            <a:prstDash val="solid"/>
+            <a:round/>
+            <a:headEnd len="sm" w="sm" type="none"/>
+            <a:tailEnd len="sm" w="sm" type="none"/>
+          </a:ln>
+        </p:spPr>
+        <p:txBody>
+          <a:bodyPr anchorCtr="0" anchor="ctr" bIns="91425" lIns="91425" spcFirstLastPara="1" rIns="91425" wrap="square" tIns="91425">
+            <a:noAutofit/>
+          </a:bodyPr>
+          <a:lstStyle/>
+          <a:p>
+            <a:pPr indent="0" lvl="0" marL="0" rtl="0" algn="ctr">
+              <a:spcBef>
+                <a:spcPts val="0"/>
+              </a:spcBef>
+              <a:spcAft>
+                <a:spcPts val="0"/>
+              </a:spcAft>
+              <a:buNone/>
+            </a:pPr>
+            <a:r>
+              <a:rPr b="1" lang="ru-RU" sz="2000">
+                <a:latin typeface="Montserrat"/>
+                <a:ea typeface="Montserrat"/>
+                <a:cs typeface="Montserrat"/>
+                <a:sym typeface="Montserrat"/>
+              </a:rPr>
+              <a:t>Мнемоники команд</a:t>
+            </a:r>
+            <a:endParaRPr b="1" sz="2000">
+              <a:latin typeface="Montserrat"/>
+              <a:ea typeface="Montserrat"/>
+              <a:cs typeface="Montserrat"/>
+              <a:sym typeface="Montserrat"/>
+            </a:endParaRPr>
+          </a:p>
+        </p:txBody>
+      </p:sp>
+      <p:grpSp>
+        <p:nvGrpSpPr>
+          <p:cNvPr id="94" name="Google Shape;94;g3d0689a4217_2_0"/>
+          <p:cNvGrpSpPr/>
+          <p:nvPr/>
+        </p:nvGrpSpPr>
+        <p:grpSpPr>
+          <a:xfrm>
+            <a:off x="3887601" y="4453677"/>
+            <a:ext cx="542450" cy="558300"/>
+            <a:chOff x="4033576" y="4453677"/>
+            <a:chExt cx="542450" cy="558300"/>
+          </a:xfrm>
+        </p:grpSpPr>
+        <p:sp>
+          <p:nvSpPr>
+            <p:cNvPr id="95" name="Google Shape;95;g3d0689a4217_2_0"/>
+            <p:cNvSpPr/>
+            <p:nvPr/>
+          </p:nvSpPr>
+          <p:spPr>
+            <a:xfrm rot="-5400000">
+              <a:off x="4171626" y="4607577"/>
+              <a:ext cx="558300" cy="250500"/>
+            </a:xfrm>
+            <a:prstGeom prst="rightArrow">
+              <a:avLst>
+                <a:gd fmla="val 50000" name="adj1"/>
+                <a:gd fmla="val 50000" name="adj2"/>
+              </a:avLst>
+            </a:prstGeom>
+            <a:solidFill>
+              <a:schemeClr val="dk2"/>
+            </a:solidFill>
+            <a:ln cap="flat" cmpd="sng" w="9525">
+              <a:solidFill>
+                <a:schemeClr val="dk2"/>
+              </a:solidFill>
+              <a:prstDash val="solid"/>
+              <a:round/>
+              <a:headEnd len="sm" w="sm" type="none"/>
+              <a:tailEnd len="sm" w="sm" type="none"/>
+            </a:ln>
+          </p:spPr>
+          <p:txBody>
+            <a:bodyPr anchorCtr="0" anchor="ctr" bIns="91425" lIns="91425" spcFirstLastPara="1" rIns="91425" wrap="square" tIns="91425">
+              <a:noAutofit/>
+            </a:bodyPr>
+            <a:lstStyle/>
+            <a:p>
+              <a:pPr indent="0" lvl="0" marL="0" rtl="0" algn="ctr">
+                <a:spcBef>
+                  <a:spcPts val="0"/>
+                </a:spcBef>
+                <a:spcAft>
+                  <a:spcPts val="0"/>
+                </a:spcAft>
+                <a:buNone/>
+              </a:pPr>
+              <a:r>
+                <a:t/>
+              </a:r>
+              <a:endParaRPr/>
+            </a:p>
+          </p:txBody>
+        </p:sp>
+        <p:sp>
+          <p:nvSpPr>
+            <p:cNvPr id="96" name="Google Shape;96;g3d0689a4217_2_0"/>
+            <p:cNvSpPr/>
+            <p:nvPr/>
+          </p:nvSpPr>
+          <p:spPr>
+            <a:xfrm rot="5400000">
+              <a:off x="3879676" y="4607577"/>
+              <a:ext cx="558300" cy="250500"/>
+            </a:xfrm>
+            <a:prstGeom prst="rightArrow">
+              <a:avLst>
+                <a:gd fmla="val 50000" name="adj1"/>
+                <a:gd fmla="val 50000" name="adj2"/>
+              </a:avLst>
+            </a:prstGeom>
+            <a:solidFill>
+              <a:schemeClr val="dk2"/>
+            </a:solidFill>
+            <a:ln cap="flat" cmpd="sng" w="9525">
+              <a:solidFill>
+                <a:schemeClr val="dk2"/>
+              </a:solidFill>
+              <a:prstDash val="solid"/>
+              <a:round/>
+              <a:headEnd len="sm" w="sm" type="none"/>
+              <a:tailEnd len="sm" w="sm" type="none"/>
+            </a:ln>
+          </p:spPr>
+          <p:txBody>
+            <a:bodyPr anchorCtr="0" anchor="ctr" bIns="91425" lIns="91425" spcFirstLastPara="1" rIns="91425" wrap="square" tIns="91425">
+              <a:noAutofit/>
+            </a:bodyPr>
+            <a:lstStyle/>
+            <a:p>
+              <a:pPr indent="0" lvl="0" marL="0" rtl="0" algn="ctr">
+                <a:spcBef>
+                  <a:spcPts val="0"/>
+                </a:spcBef>
+                <a:spcAft>
+                  <a:spcPts val="0"/>
+                </a:spcAft>
+                <a:buNone/>
+              </a:pPr>
+              <a:r>
+                <a:t/>
+              </a:r>
+              <a:endParaRPr/>
+            </a:p>
+          </p:txBody>
+        </p:sp>
+      </p:grpSp>
+      <p:sp>
+        <p:nvSpPr>
+          <p:cNvPr id="97" name="Google Shape;97;g3d0689a4217_2_0"/>
+          <p:cNvSpPr txBox="1"/>
+          <p:nvPr/>
+        </p:nvSpPr>
+        <p:spPr>
+          <a:xfrm>
+            <a:off x="4499504" y="4433721"/>
+            <a:ext cx="2537400" cy="243000"/>
           </a:xfrm>
           <a:prstGeom prst="rect">
             <a:avLst/>
@@ -17917,29 +18840,617 @@
           </a:ln>
         </p:spPr>
         <p:txBody>
-          <a:bodyPr anchorCtr="0" anchor="t" bIns="45700" lIns="91425" spcFirstLastPara="1" rIns="91425" wrap="square" tIns="45700">
-            <a:spAutoFit/>
+          <a:bodyPr anchorCtr="0" anchor="t" bIns="91425" lIns="91425" spcFirstLastPara="1" rIns="91425" wrap="square" tIns="91425">
+            <a:noAutofit/>
           </a:bodyPr>
           <a:lstStyle/>
           <a:p>
-            <a:pPr indent="0" lvl="0" marL="0" rtl="0" algn="l">
-              <a:lnSpc>
-                <a:spcPct val="100000"/>
-              </a:lnSpc>
-              <a:spcBef>
-                <a:spcPts val="0"/>
-              </a:spcBef>
-              <a:spcAft>
-                <a:spcPts val="0"/>
-              </a:spcAft>
-              <a:buSzPts val="3600"/>
+            <a:pPr indent="0" lvl="0" marL="0" rtl="0" algn="ctr">
+              <a:spcBef>
+                <a:spcPts val="0"/>
+              </a:spcBef>
+              <a:spcAft>
+                <a:spcPts val="0"/>
+              </a:spcAft>
               <a:buNone/>
             </a:pPr>
             <a:r>
-              <a:rPr lang="ru-RU"/>
-              <a:t>Динамический анализ. Основные способы</a:t>
+              <a:rPr b="1" lang="ru-RU" sz="2000">
+                <a:latin typeface="Montserrat"/>
+                <a:ea typeface="Montserrat"/>
+                <a:cs typeface="Montserrat"/>
+                <a:sym typeface="Montserrat"/>
+              </a:rPr>
+              <a:t>Дизассемблер</a:t>
+            </a:r>
+            <a:endParaRPr b="1" sz="2000">
+              <a:latin typeface="Montserrat"/>
+              <a:ea typeface="Montserrat"/>
+              <a:cs typeface="Montserrat"/>
+              <a:sym typeface="Montserrat"/>
+            </a:endParaRPr>
+          </a:p>
+        </p:txBody>
+      </p:sp>
+      <p:sp>
+        <p:nvSpPr>
+          <p:cNvPr id="98" name="Google Shape;98;g3d0689a4217_2_0"/>
+          <p:cNvSpPr txBox="1"/>
+          <p:nvPr/>
+        </p:nvSpPr>
+        <p:spPr>
+          <a:xfrm>
+            <a:off x="1715699" y="4438217"/>
+            <a:ext cx="2186400" cy="243000"/>
+          </a:xfrm>
+          <a:prstGeom prst="rect">
+            <a:avLst/>
+          </a:prstGeom>
+          <a:noFill/>
+          <a:ln>
+            <a:noFill/>
+          </a:ln>
+        </p:spPr>
+        <p:txBody>
+          <a:bodyPr anchorCtr="0" anchor="t" bIns="91425" lIns="91425" spcFirstLastPara="1" rIns="91425" wrap="square" tIns="91425">
+            <a:noAutofit/>
+          </a:bodyPr>
+          <a:lstStyle/>
+          <a:p>
+            <a:pPr indent="0" lvl="0" marL="0" rtl="0" algn="ctr">
+              <a:spcBef>
+                <a:spcPts val="0"/>
+              </a:spcBef>
+              <a:spcAft>
+                <a:spcPts val="0"/>
+              </a:spcAft>
+              <a:buNone/>
+            </a:pPr>
+            <a:r>
+              <a:rPr b="1" lang="ru-RU" sz="2000">
+                <a:latin typeface="Montserrat"/>
+                <a:ea typeface="Montserrat"/>
+                <a:cs typeface="Montserrat"/>
+                <a:sym typeface="Montserrat"/>
+              </a:rPr>
+              <a:t>Ассемблер</a:t>
+            </a:r>
+            <a:endParaRPr b="1" sz="2000">
+              <a:latin typeface="Montserrat"/>
+              <a:ea typeface="Montserrat"/>
+              <a:cs typeface="Montserrat"/>
+              <a:sym typeface="Montserrat"/>
+            </a:endParaRPr>
+          </a:p>
+        </p:txBody>
+      </p:sp>
+      <p:grpSp>
+        <p:nvGrpSpPr>
+          <p:cNvPr id="99" name="Google Shape;99;g3d0689a4217_2_0"/>
+          <p:cNvGrpSpPr/>
+          <p:nvPr/>
+        </p:nvGrpSpPr>
+        <p:grpSpPr>
+          <a:xfrm>
+            <a:off x="215586" y="3465975"/>
+            <a:ext cx="1580075" cy="670649"/>
+            <a:chOff x="215586" y="3465975"/>
+            <a:chExt cx="1580075" cy="670649"/>
+          </a:xfrm>
+        </p:grpSpPr>
+        <p:pic>
+          <p:nvPicPr>
+            <p:cNvPr id="100" name="Google Shape;100;g3d0689a4217_2_0"/>
+            <p:cNvPicPr preferRelativeResize="0"/>
+            <p:nvPr/>
+          </p:nvPicPr>
+          <p:blipFill>
+            <a:blip r:embed="rId5">
+              <a:alphaModFix/>
+            </a:blip>
+            <a:stretch>
+              <a:fillRect/>
+            </a:stretch>
+          </p:blipFill>
+          <p:spPr>
+            <a:xfrm>
+              <a:off x="215586" y="3465975"/>
+              <a:ext cx="670525" cy="670525"/>
+            </a:xfrm>
+            <a:prstGeom prst="rect">
+              <a:avLst/>
+            </a:prstGeom>
+            <a:noFill/>
+            <a:ln>
+              <a:noFill/>
+            </a:ln>
+          </p:spPr>
+        </p:pic>
+        <p:pic>
+          <p:nvPicPr>
+            <p:cNvPr id="101" name="Google Shape;101;g3d0689a4217_2_0"/>
+            <p:cNvPicPr preferRelativeResize="0"/>
+            <p:nvPr/>
+          </p:nvPicPr>
+          <p:blipFill>
+            <a:blip r:embed="rId6">
+              <a:alphaModFix/>
+            </a:blip>
+            <a:stretch>
+              <a:fillRect/>
+            </a:stretch>
+          </p:blipFill>
+          <p:spPr>
+            <a:xfrm>
+              <a:off x="1125136" y="3466098"/>
+              <a:ext cx="670525" cy="670525"/>
+            </a:xfrm>
+            <a:prstGeom prst="rect">
+              <a:avLst/>
+            </a:prstGeom>
+            <a:noFill/>
+            <a:ln>
+              <a:noFill/>
+            </a:ln>
+          </p:spPr>
+        </p:pic>
+      </p:grpSp>
+      <p:sp>
+        <p:nvSpPr>
+          <p:cNvPr id="102" name="Google Shape;102;g3d0689a4217_2_0"/>
+          <p:cNvSpPr/>
+          <p:nvPr/>
+        </p:nvSpPr>
+        <p:spPr>
+          <a:xfrm>
+            <a:off x="2034675" y="1372798"/>
+            <a:ext cx="4248300" cy="1131000"/>
+          </a:xfrm>
+          <a:prstGeom prst="roundRect">
+            <a:avLst>
+              <a:gd fmla="val 16667" name="adj"/>
+            </a:avLst>
+          </a:prstGeom>
+          <a:solidFill>
+            <a:schemeClr val="dk2"/>
+          </a:solidFill>
+          <a:ln cap="flat" cmpd="sng" w="9525">
+            <a:solidFill>
+              <a:schemeClr val="dk2"/>
+            </a:solidFill>
+            <a:prstDash val="solid"/>
+            <a:round/>
+            <a:headEnd len="sm" w="sm" type="none"/>
+            <a:tailEnd len="sm" w="sm" type="none"/>
+          </a:ln>
+        </p:spPr>
+        <p:txBody>
+          <a:bodyPr anchorCtr="0" anchor="ctr" bIns="91425" lIns="91425" spcFirstLastPara="1" rIns="91425" wrap="square" tIns="91425">
+            <a:noAutofit/>
+          </a:bodyPr>
+          <a:lstStyle/>
+          <a:p>
+            <a:pPr indent="0" lvl="0" marL="0" rtl="0" algn="ctr">
+              <a:spcBef>
+                <a:spcPts val="0"/>
+              </a:spcBef>
+              <a:spcAft>
+                <a:spcPts val="0"/>
+              </a:spcAft>
+              <a:buNone/>
+            </a:pPr>
+            <a:r>
+              <a:rPr b="1" lang="ru-RU" sz="3000">
+                <a:solidFill>
+                  <a:schemeClr val="lt1"/>
+                </a:solidFill>
+                <a:latin typeface="Montserrat"/>
+                <a:ea typeface="Montserrat"/>
+                <a:cs typeface="Montserrat"/>
+                <a:sym typeface="Montserrat"/>
+              </a:rPr>
+              <a:t>ЯП ВЫСОКОГО УРОВНЯ</a:t>
+            </a:r>
+            <a:endParaRPr b="1" sz="3000">
+              <a:solidFill>
+                <a:schemeClr val="lt1"/>
+              </a:solidFill>
+              <a:latin typeface="Montserrat"/>
+              <a:ea typeface="Montserrat"/>
+              <a:cs typeface="Montserrat"/>
+              <a:sym typeface="Montserrat"/>
+            </a:endParaRPr>
+          </a:p>
+        </p:txBody>
+      </p:sp>
+      <p:sp>
+        <p:nvSpPr>
+          <p:cNvPr id="103" name="Google Shape;103;g3d0689a4217_2_0"/>
+          <p:cNvSpPr/>
+          <p:nvPr/>
+        </p:nvSpPr>
+        <p:spPr>
+          <a:xfrm>
+            <a:off x="6529375" y="1727998"/>
+            <a:ext cx="1087500" cy="420600"/>
+          </a:xfrm>
+          <a:prstGeom prst="rightArrow">
+            <a:avLst>
+              <a:gd fmla="val 50000" name="adj1"/>
+              <a:gd fmla="val 50000" name="adj2"/>
+            </a:avLst>
+          </a:prstGeom>
+          <a:solidFill>
+            <a:schemeClr val="dk2"/>
+          </a:solidFill>
+          <a:ln cap="flat" cmpd="sng" w="9525">
+            <a:solidFill>
+              <a:schemeClr val="dk2"/>
+            </a:solidFill>
+            <a:prstDash val="solid"/>
+            <a:round/>
+            <a:headEnd len="sm" w="sm" type="none"/>
+            <a:tailEnd len="sm" w="sm" type="none"/>
+          </a:ln>
+        </p:spPr>
+        <p:txBody>
+          <a:bodyPr anchorCtr="0" anchor="ctr" bIns="91425" lIns="91425" spcFirstLastPara="1" rIns="91425" wrap="square" tIns="91425">
+            <a:noAutofit/>
+          </a:bodyPr>
+          <a:lstStyle/>
+          <a:p>
+            <a:pPr indent="0" lvl="0" marL="0" rtl="0" algn="ctr">
+              <a:spcBef>
+                <a:spcPts val="0"/>
+              </a:spcBef>
+              <a:spcAft>
+                <a:spcPts val="0"/>
+              </a:spcAft>
+              <a:buNone/>
+            </a:pPr>
+            <a:r>
+              <a:t/>
             </a:r>
             <a:endParaRPr/>
+          </a:p>
+        </p:txBody>
+      </p:sp>
+      <p:sp>
+        <p:nvSpPr>
+          <p:cNvPr id="104" name="Google Shape;104;g3d0689a4217_2_0"/>
+          <p:cNvSpPr/>
+          <p:nvPr/>
+        </p:nvSpPr>
+        <p:spPr>
+          <a:xfrm>
+            <a:off x="7950250" y="1372698"/>
+            <a:ext cx="3479700" cy="1131000"/>
+          </a:xfrm>
+          <a:prstGeom prst="rect">
+            <a:avLst/>
+          </a:prstGeom>
+          <a:solidFill>
+            <a:schemeClr val="lt1"/>
+          </a:solidFill>
+          <a:ln cap="flat" cmpd="sng" w="9525">
+            <a:solidFill>
+              <a:schemeClr val="dk2"/>
+            </a:solidFill>
+            <a:prstDash val="solid"/>
+            <a:round/>
+            <a:headEnd len="sm" w="sm" type="none"/>
+            <a:tailEnd len="sm" w="sm" type="none"/>
+          </a:ln>
+        </p:spPr>
+        <p:txBody>
+          <a:bodyPr anchorCtr="0" anchor="ctr" bIns="91425" lIns="91425" spcFirstLastPara="1" rIns="91425" wrap="square" tIns="91425">
+            <a:noAutofit/>
+          </a:bodyPr>
+          <a:lstStyle/>
+          <a:p>
+            <a:pPr indent="0" lvl="0" marL="0" rtl="0" algn="ctr">
+              <a:spcBef>
+                <a:spcPts val="0"/>
+              </a:spcBef>
+              <a:spcAft>
+                <a:spcPts val="0"/>
+              </a:spcAft>
+              <a:buNone/>
+            </a:pPr>
+            <a:r>
+              <a:rPr b="1" lang="ru-RU" sz="2000">
+                <a:latin typeface="Montserrat"/>
+                <a:ea typeface="Montserrat"/>
+                <a:cs typeface="Montserrat"/>
+                <a:sym typeface="Montserrat"/>
+              </a:rPr>
+              <a:t>Понятный высокоуровневый код (циклы, классы…)</a:t>
+            </a:r>
+            <a:endParaRPr b="1" sz="2000">
+              <a:latin typeface="Montserrat"/>
+              <a:ea typeface="Montserrat"/>
+              <a:cs typeface="Montserrat"/>
+              <a:sym typeface="Montserrat"/>
+            </a:endParaRPr>
+          </a:p>
+        </p:txBody>
+      </p:sp>
+      <p:grpSp>
+        <p:nvGrpSpPr>
+          <p:cNvPr id="105" name="Google Shape;105;g3d0689a4217_2_0"/>
+          <p:cNvGrpSpPr/>
+          <p:nvPr/>
+        </p:nvGrpSpPr>
+        <p:grpSpPr>
+          <a:xfrm>
+            <a:off x="3887601" y="2590677"/>
+            <a:ext cx="542450" cy="558300"/>
+            <a:chOff x="4033576" y="4453677"/>
+            <a:chExt cx="542450" cy="558300"/>
+          </a:xfrm>
+        </p:grpSpPr>
+        <p:sp>
+          <p:nvSpPr>
+            <p:cNvPr id="106" name="Google Shape;106;g3d0689a4217_2_0"/>
+            <p:cNvSpPr/>
+            <p:nvPr/>
+          </p:nvSpPr>
+          <p:spPr>
+            <a:xfrm rot="-5400000">
+              <a:off x="4171626" y="4607577"/>
+              <a:ext cx="558300" cy="250500"/>
+            </a:xfrm>
+            <a:prstGeom prst="rightArrow">
+              <a:avLst>
+                <a:gd fmla="val 50000" name="adj1"/>
+                <a:gd fmla="val 50000" name="adj2"/>
+              </a:avLst>
+            </a:prstGeom>
+            <a:solidFill>
+              <a:schemeClr val="dk2"/>
+            </a:solidFill>
+            <a:ln cap="flat" cmpd="sng" w="9525">
+              <a:solidFill>
+                <a:schemeClr val="dk2"/>
+              </a:solidFill>
+              <a:prstDash val="solid"/>
+              <a:round/>
+              <a:headEnd len="sm" w="sm" type="none"/>
+              <a:tailEnd len="sm" w="sm" type="none"/>
+            </a:ln>
+          </p:spPr>
+          <p:txBody>
+            <a:bodyPr anchorCtr="0" anchor="ctr" bIns="91425" lIns="91425" spcFirstLastPara="1" rIns="91425" wrap="square" tIns="91425">
+              <a:noAutofit/>
+            </a:bodyPr>
+            <a:lstStyle/>
+            <a:p>
+              <a:pPr indent="0" lvl="0" marL="0" rtl="0" algn="ctr">
+                <a:spcBef>
+                  <a:spcPts val="0"/>
+                </a:spcBef>
+                <a:spcAft>
+                  <a:spcPts val="0"/>
+                </a:spcAft>
+                <a:buNone/>
+              </a:pPr>
+              <a:r>
+                <a:t/>
+              </a:r>
+              <a:endParaRPr/>
+            </a:p>
+          </p:txBody>
+        </p:sp>
+        <p:sp>
+          <p:nvSpPr>
+            <p:cNvPr id="107" name="Google Shape;107;g3d0689a4217_2_0"/>
+            <p:cNvSpPr/>
+            <p:nvPr/>
+          </p:nvSpPr>
+          <p:spPr>
+            <a:xfrm rot="5400000">
+              <a:off x="3879676" y="4607577"/>
+              <a:ext cx="558300" cy="250500"/>
+            </a:xfrm>
+            <a:prstGeom prst="rightArrow">
+              <a:avLst>
+                <a:gd fmla="val 50000" name="adj1"/>
+                <a:gd fmla="val 50000" name="adj2"/>
+              </a:avLst>
+            </a:prstGeom>
+            <a:solidFill>
+              <a:schemeClr val="dk2"/>
+            </a:solidFill>
+            <a:ln cap="flat" cmpd="sng" w="9525">
+              <a:solidFill>
+                <a:schemeClr val="dk2"/>
+              </a:solidFill>
+              <a:prstDash val="solid"/>
+              <a:round/>
+              <a:headEnd len="sm" w="sm" type="none"/>
+              <a:tailEnd len="sm" w="sm" type="none"/>
+            </a:ln>
+          </p:spPr>
+          <p:txBody>
+            <a:bodyPr anchorCtr="0" anchor="ctr" bIns="91425" lIns="91425" spcFirstLastPara="1" rIns="91425" wrap="square" tIns="91425">
+              <a:noAutofit/>
+            </a:bodyPr>
+            <a:lstStyle/>
+            <a:p>
+              <a:pPr indent="0" lvl="0" marL="0" rtl="0" algn="ctr">
+                <a:spcBef>
+                  <a:spcPts val="0"/>
+                </a:spcBef>
+                <a:spcAft>
+                  <a:spcPts val="0"/>
+                </a:spcAft>
+                <a:buNone/>
+              </a:pPr>
+              <a:r>
+                <a:t/>
+              </a:r>
+              <a:endParaRPr/>
+            </a:p>
+          </p:txBody>
+        </p:sp>
+      </p:grpSp>
+      <p:pic>
+        <p:nvPicPr>
+          <p:cNvPr id="108" name="Google Shape;108;g3d0689a4217_2_0"/>
+          <p:cNvPicPr preferRelativeResize="0"/>
+          <p:nvPr/>
+        </p:nvPicPr>
+        <p:blipFill>
+          <a:blip r:embed="rId7">
+            <a:alphaModFix/>
+          </a:blip>
+          <a:stretch>
+            <a:fillRect/>
+          </a:stretch>
+        </p:blipFill>
+        <p:spPr>
+          <a:xfrm>
+            <a:off x="1245825" y="1606150"/>
+            <a:ext cx="542450" cy="542450"/>
+          </a:xfrm>
+          <a:prstGeom prst="rect">
+            <a:avLst/>
+          </a:prstGeom>
+          <a:noFill/>
+          <a:ln>
+            <a:noFill/>
+          </a:ln>
+        </p:spPr>
+      </p:pic>
+      <p:pic>
+        <p:nvPicPr>
+          <p:cNvPr id="109" name="Google Shape;109;g3d0689a4217_2_0"/>
+          <p:cNvPicPr preferRelativeResize="0"/>
+          <p:nvPr/>
+        </p:nvPicPr>
+        <p:blipFill>
+          <a:blip r:embed="rId8">
+            <a:alphaModFix/>
+          </a:blip>
+          <a:stretch>
+            <a:fillRect/>
+          </a:stretch>
+        </p:blipFill>
+        <p:spPr>
+          <a:xfrm>
+            <a:off x="456975" y="1606150"/>
+            <a:ext cx="542450" cy="542450"/>
+          </a:xfrm>
+          <a:prstGeom prst="rect">
+            <a:avLst/>
+          </a:prstGeom>
+          <a:noFill/>
+          <a:ln>
+            <a:noFill/>
+          </a:ln>
+        </p:spPr>
+      </p:pic>
+      <p:sp>
+        <p:nvSpPr>
+          <p:cNvPr id="110" name="Google Shape;110;g3d0689a4217_2_0"/>
+          <p:cNvSpPr txBox="1"/>
+          <p:nvPr/>
+        </p:nvSpPr>
+        <p:spPr>
+          <a:xfrm>
+            <a:off x="405886" y="2618772"/>
+            <a:ext cx="3344100" cy="542400"/>
+          </a:xfrm>
+          <a:prstGeom prst="rect">
+            <a:avLst/>
+          </a:prstGeom>
+          <a:noFill/>
+          <a:ln>
+            <a:noFill/>
+          </a:ln>
+        </p:spPr>
+        <p:txBody>
+          <a:bodyPr anchorCtr="0" anchor="t" bIns="91425" lIns="91425" spcFirstLastPara="1" rIns="91425" wrap="square" tIns="91425">
+            <a:noAutofit/>
+          </a:bodyPr>
+          <a:lstStyle/>
+          <a:p>
+            <a:pPr indent="0" lvl="0" marL="0" rtl="0" algn="ctr">
+              <a:spcBef>
+                <a:spcPts val="0"/>
+              </a:spcBef>
+              <a:spcAft>
+                <a:spcPts val="0"/>
+              </a:spcAft>
+              <a:buNone/>
+            </a:pPr>
+            <a:r>
+              <a:rPr b="1" lang="ru-RU" sz="1600">
+                <a:latin typeface="Montserrat"/>
+                <a:ea typeface="Montserrat"/>
+                <a:cs typeface="Montserrat"/>
+                <a:sym typeface="Montserrat"/>
+              </a:rPr>
+              <a:t>Компилятор/интерпретатор</a:t>
+            </a:r>
+            <a:endParaRPr b="1" sz="1600">
+              <a:latin typeface="Montserrat"/>
+              <a:ea typeface="Montserrat"/>
+              <a:cs typeface="Montserrat"/>
+              <a:sym typeface="Montserrat"/>
+            </a:endParaRPr>
+          </a:p>
+        </p:txBody>
+      </p:sp>
+      <p:sp>
+        <p:nvSpPr>
+          <p:cNvPr id="111" name="Google Shape;111;g3d0689a4217_2_0"/>
+          <p:cNvSpPr txBox="1"/>
+          <p:nvPr/>
+        </p:nvSpPr>
+        <p:spPr>
+          <a:xfrm>
+            <a:off x="4492416" y="2585267"/>
+            <a:ext cx="2537400" cy="243000"/>
+          </a:xfrm>
+          <a:prstGeom prst="rect">
+            <a:avLst/>
+          </a:prstGeom>
+          <a:noFill/>
+          <a:ln>
+            <a:noFill/>
+          </a:ln>
+        </p:spPr>
+        <p:txBody>
+          <a:bodyPr anchorCtr="0" anchor="t" bIns="91425" lIns="91425" spcFirstLastPara="1" rIns="91425" wrap="square" tIns="91425">
+            <a:noAutofit/>
+          </a:bodyPr>
+          <a:lstStyle/>
+          <a:p>
+            <a:pPr indent="0" lvl="0" marL="0" rtl="0" algn="ctr">
+              <a:spcBef>
+                <a:spcPts val="0"/>
+              </a:spcBef>
+              <a:spcAft>
+                <a:spcPts val="0"/>
+              </a:spcAft>
+              <a:buNone/>
+            </a:pPr>
+            <a:r>
+              <a:rPr b="1" lang="ru-RU" sz="2000">
+                <a:latin typeface="Montserrat"/>
+                <a:ea typeface="Montserrat"/>
+                <a:cs typeface="Montserrat"/>
+                <a:sym typeface="Montserrat"/>
+              </a:rPr>
+              <a:t>Декомпилятор</a:t>
+            </a:r>
+            <a:endParaRPr b="1" sz="2000">
+              <a:latin typeface="Montserrat"/>
+              <a:ea typeface="Montserrat"/>
+              <a:cs typeface="Montserrat"/>
+              <a:sym typeface="Montserrat"/>
+            </a:endParaRPr>
           </a:p>
         </p:txBody>
       </p:sp>
@@ -17956,7 +19467,7 @@
   <p:cSld>
     <p:spTree>
       <p:nvGrpSpPr>
-        <p:cNvPr id="284" name="Shape 284"/>
+        <p:cNvPr id="309" name="Shape 309"/>
         <p:cNvGrpSpPr/>
         <p:nvPr/>
       </p:nvGrpSpPr>
@@ -17970,7 +19481,7 @@
       </p:grpSpPr>
       <p:sp>
         <p:nvSpPr>
-          <p:cNvPr id="285" name="Google Shape;285;g3d0496d8fde_0_59"/>
+          <p:cNvPr id="310" name="Google Shape;310;g3d0496d8fde_0_53"/>
           <p:cNvSpPr txBox="1"/>
           <p:nvPr>
             <p:ph type="title"/>
@@ -18014,7 +19525,7 @@
             </a:pPr>
             <a:r>
               <a:rPr lang="ru-RU"/>
-              <a:t>Переполнение int</a:t>
+              <a:t>Переписывание указателя</a:t>
             </a:r>
             <a:endParaRPr/>
           </a:p>
@@ -18022,7 +19533,112 @@
       </p:sp>
       <p:pic>
         <p:nvPicPr>
-          <p:cNvPr id="286" name="Google Shape;286;g3d0496d8fde_0_59"/>
+          <p:cNvPr id="311" name="Google Shape;311;g3d0496d8fde_0_53"/>
+          <p:cNvPicPr preferRelativeResize="0"/>
+          <p:nvPr/>
+        </p:nvPicPr>
+        <p:blipFill>
+          <a:blip r:embed="rId3">
+            <a:alphaModFix/>
+          </a:blip>
+          <a:stretch>
+            <a:fillRect/>
+          </a:stretch>
+        </p:blipFill>
+        <p:spPr>
+          <a:xfrm>
+            <a:off x="3784513" y="1231475"/>
+            <a:ext cx="4631825" cy="5626524"/>
+          </a:xfrm>
+          <a:prstGeom prst="rect">
+            <a:avLst/>
+          </a:prstGeom>
+          <a:noFill/>
+          <a:ln>
+            <a:noFill/>
+          </a:ln>
+        </p:spPr>
+      </p:pic>
+    </p:spTree>
+  </p:cSld>
+  <p:clrMapOvr>
+    <a:masterClrMapping/>
+  </p:clrMapOvr>
+</p:sld>
+</file>
+
+<file path=ppt/slides/slide31.xml><?xml version="1.0" encoding="utf-8"?>
+<p:sld xmlns:a="http://schemas.openxmlformats.org/drawingml/2006/main" xmlns:r="http://schemas.openxmlformats.org/officeDocument/2006/relationships" xmlns:mc="http://schemas.openxmlformats.org/markup-compatibility/2006" xmlns:mv="urn:schemas-microsoft-com:mac:vml" xmlns:p="http://schemas.openxmlformats.org/presentationml/2006/main" xmlns:c="http://schemas.openxmlformats.org/drawingml/2006/chart" xmlns:dgm="http://schemas.openxmlformats.org/drawingml/2006/diagram" xmlns:o="urn:schemas-microsoft-com:office:office" xmlns:v="urn:schemas-microsoft-com:vml" xmlns:pvml="urn:schemas-microsoft-com:office:powerpoint" xmlns:com="http://schemas.openxmlformats.org/drawingml/2006/compatibility" xmlns:p14="http://schemas.microsoft.com/office/powerpoint/2010/main" xmlns:p15="http://schemas.microsoft.com/office/powerpoint/2012/main" xmlns:ahyp="http://schemas.microsoft.com/office/drawing/2018/hyperlinkcolor">
+  <p:cSld>
+    <p:spTree>
+      <p:nvGrpSpPr>
+        <p:cNvPr id="315" name="Shape 315"/>
+        <p:cNvGrpSpPr/>
+        <p:nvPr/>
+      </p:nvGrpSpPr>
+      <p:grpSpPr>
+        <a:xfrm>
+          <a:off x="0" y="0"/>
+          <a:ext cx="0" cy="0"/>
+          <a:chOff x="0" y="0"/>
+          <a:chExt cx="0" cy="0"/>
+        </a:xfrm>
+      </p:grpSpPr>
+      <p:sp>
+        <p:nvSpPr>
+          <p:cNvPr id="316" name="Google Shape;316;g3d0496d8fde_0_59"/>
+          <p:cNvSpPr txBox="1"/>
+          <p:nvPr>
+            <p:ph type="title"/>
+          </p:nvPr>
+        </p:nvSpPr>
+        <p:spPr>
+          <a:xfrm>
+            <a:off x="559572" y="359101"/>
+            <a:ext cx="11081700" cy="523200"/>
+          </a:xfrm>
+          <a:prstGeom prst="rect">
+            <a:avLst/>
+          </a:prstGeom>
+          <a:noFill/>
+          <a:ln>
+            <a:noFill/>
+          </a:ln>
+        </p:spPr>
+        <p:txBody>
+          <a:bodyPr anchorCtr="0" anchor="ctr" bIns="45700" lIns="91425" spcFirstLastPara="1" rIns="91425" wrap="square" tIns="45700">
+            <a:spAutoFit/>
+          </a:bodyPr>
+          <a:lstStyle/>
+          <a:p>
+            <a:pPr indent="0" lvl="0" marL="0" rtl="0" algn="l">
+              <a:lnSpc>
+                <a:spcPct val="100000"/>
+              </a:lnSpc>
+              <a:spcBef>
+                <a:spcPts val="0"/>
+              </a:spcBef>
+              <a:spcAft>
+                <a:spcPts val="0"/>
+              </a:spcAft>
+              <a:buClr>
+                <a:schemeClr val="lt1"/>
+              </a:buClr>
+              <a:buSzPts val="2800"/>
+              <a:buFont typeface="Montserrat"/>
+              <a:buNone/>
+            </a:pPr>
+            <a:r>
+              <a:rPr lang="ru-RU"/>
+              <a:t>Переполнение int</a:t>
+            </a:r>
+            <a:endParaRPr/>
+          </a:p>
+        </p:txBody>
+      </p:sp>
+      <p:pic>
+        <p:nvPicPr>
+          <p:cNvPr id="317" name="Google Shape;317;g3d0496d8fde_0_59"/>
           <p:cNvPicPr preferRelativeResize="0"/>
           <p:nvPr/>
         </p:nvPicPr>
@@ -18056,12 +19672,12 @@
 </p:sld>
 </file>
 
-<file path=ppt/slides/slide31.xml><?xml version="1.0" encoding="utf-8"?>
+<file path=ppt/slides/slide32.xml><?xml version="1.0" encoding="utf-8"?>
 <p:sld xmlns:a="http://schemas.openxmlformats.org/drawingml/2006/main" xmlns:r="http://schemas.openxmlformats.org/officeDocument/2006/relationships" xmlns:mc="http://schemas.openxmlformats.org/markup-compatibility/2006" xmlns:mv="urn:schemas-microsoft-com:mac:vml" xmlns:p="http://schemas.openxmlformats.org/presentationml/2006/main" xmlns:c="http://schemas.openxmlformats.org/drawingml/2006/chart" xmlns:dgm="http://schemas.openxmlformats.org/drawingml/2006/diagram" xmlns:o="urn:schemas-microsoft-com:office:office" xmlns:v="urn:schemas-microsoft-com:vml" xmlns:pvml="urn:schemas-microsoft-com:office:powerpoint" xmlns:com="http://schemas.openxmlformats.org/drawingml/2006/compatibility" xmlns:p14="http://schemas.microsoft.com/office/powerpoint/2010/main" xmlns:p15="http://schemas.microsoft.com/office/powerpoint/2012/main" xmlns:ahyp="http://schemas.microsoft.com/office/drawing/2018/hyperlinkcolor">
   <p:cSld>
     <p:spTree>
       <p:nvGrpSpPr>
-        <p:cNvPr id="290" name="Shape 290"/>
+        <p:cNvPr id="321" name="Shape 321"/>
         <p:cNvGrpSpPr/>
         <p:nvPr/>
       </p:nvGrpSpPr>
@@ -18075,7 +19691,7 @@
       </p:grpSpPr>
       <p:sp>
         <p:nvSpPr>
-          <p:cNvPr id="291" name="Google Shape;291;g3d0496d8fde_0_49"/>
+          <p:cNvPr id="322" name="Google Shape;322;g3d0496d8fde_0_49"/>
           <p:cNvSpPr txBox="1"/>
           <p:nvPr>
             <p:ph idx="1" type="body"/>
@@ -18132,12 +19748,12 @@
 </p:sld>
 </file>
 
-<file path=ppt/slides/slide32.xml><?xml version="1.0" encoding="utf-8"?>
+<file path=ppt/slides/slide33.xml><?xml version="1.0" encoding="utf-8"?>
 <p:sld xmlns:a="http://schemas.openxmlformats.org/drawingml/2006/main" xmlns:r="http://schemas.openxmlformats.org/officeDocument/2006/relationships" xmlns:mc="http://schemas.openxmlformats.org/markup-compatibility/2006" xmlns:mv="urn:schemas-microsoft-com:mac:vml" xmlns:p="http://schemas.openxmlformats.org/presentationml/2006/main" xmlns:c="http://schemas.openxmlformats.org/drawingml/2006/chart" xmlns:dgm="http://schemas.openxmlformats.org/drawingml/2006/diagram" xmlns:o="urn:schemas-microsoft-com:office:office" xmlns:v="urn:schemas-microsoft-com:vml" xmlns:pvml="urn:schemas-microsoft-com:office:powerpoint" xmlns:com="http://schemas.openxmlformats.org/drawingml/2006/compatibility" xmlns:p14="http://schemas.microsoft.com/office/powerpoint/2010/main" xmlns:p15="http://schemas.microsoft.com/office/powerpoint/2012/main" xmlns:ahyp="http://schemas.microsoft.com/office/drawing/2018/hyperlinkcolor">
   <p:cSld>
     <p:spTree>
       <p:nvGrpSpPr>
-        <p:cNvPr id="295" name="Shape 295"/>
+        <p:cNvPr id="326" name="Shape 326"/>
         <p:cNvGrpSpPr/>
         <p:nvPr/>
       </p:nvGrpSpPr>
@@ -18151,7 +19767,7 @@
       </p:grpSpPr>
       <p:sp>
         <p:nvSpPr>
-          <p:cNvPr id="296" name="Google Shape;296;g3d0689a4217_0_10"/>
+          <p:cNvPr id="327" name="Google Shape;327;g3d0689a4217_0_10"/>
           <p:cNvSpPr txBox="1"/>
           <p:nvPr>
             <p:ph type="title"/>
@@ -18198,7 +19814,7 @@
       </p:sp>
       <p:sp>
         <p:nvSpPr>
-          <p:cNvPr id="297" name="Google Shape;297;g3d0689a4217_0_10"/>
+          <p:cNvPr id="328" name="Google Shape;328;g3d0689a4217_0_10"/>
           <p:cNvSpPr txBox="1"/>
           <p:nvPr>
             <p:ph idx="2" type="body"/>
@@ -18440,12 +20056,12 @@
 </p:sld>
 </file>
 
-<file path=ppt/slides/slide33.xml><?xml version="1.0" encoding="utf-8"?>
+<file path=ppt/slides/slide34.xml><?xml version="1.0" encoding="utf-8"?>
 <p:sld xmlns:a="http://schemas.openxmlformats.org/drawingml/2006/main" xmlns:r="http://schemas.openxmlformats.org/officeDocument/2006/relationships" xmlns:mc="http://schemas.openxmlformats.org/markup-compatibility/2006" xmlns:mv="urn:schemas-microsoft-com:mac:vml" xmlns:p="http://schemas.openxmlformats.org/presentationml/2006/main" xmlns:c="http://schemas.openxmlformats.org/drawingml/2006/chart" xmlns:dgm="http://schemas.openxmlformats.org/drawingml/2006/diagram" xmlns:o="urn:schemas-microsoft-com:office:office" xmlns:v="urn:schemas-microsoft-com:vml" xmlns:pvml="urn:schemas-microsoft-com:office:powerpoint" xmlns:com="http://schemas.openxmlformats.org/drawingml/2006/compatibility" xmlns:p14="http://schemas.microsoft.com/office/powerpoint/2010/main" xmlns:p15="http://schemas.microsoft.com/office/powerpoint/2012/main" xmlns:ahyp="http://schemas.microsoft.com/office/drawing/2018/hyperlinkcolor">
   <p:cSld>
     <p:spTree>
       <p:nvGrpSpPr>
-        <p:cNvPr id="301" name="Shape 301"/>
+        <p:cNvPr id="332" name="Shape 332"/>
         <p:cNvGrpSpPr/>
         <p:nvPr/>
       </p:nvGrpSpPr>
@@ -18459,7 +20075,7 @@
       </p:grpSpPr>
       <p:sp>
         <p:nvSpPr>
-          <p:cNvPr id="302" name="Google Shape;302;g3625a4a1d6b_0_0"/>
+          <p:cNvPr id="333" name="Google Shape;333;g3625a4a1d6b_0_0"/>
           <p:cNvSpPr txBox="1"/>
           <p:nvPr>
             <p:ph idx="1" type="body"/>
@@ -18544,7 +20160,7 @@
   <p:cSld>
     <p:spTree>
       <p:nvGrpSpPr>
-        <p:cNvPr id="89" name="Shape 89"/>
+        <p:cNvPr id="115" name="Shape 115"/>
         <p:cNvGrpSpPr/>
         <p:nvPr/>
       </p:nvGrpSpPr>
@@ -18558,7 +20174,80 @@
       </p:grpSpPr>
       <p:sp>
         <p:nvSpPr>
-          <p:cNvPr id="90" name="Google Shape;90;p2"/>
+          <p:cNvPr id="116" name="Google Shape;116;g3cc93861824_0_7"/>
+          <p:cNvSpPr txBox="1"/>
+          <p:nvPr>
+            <p:ph idx="1" type="body"/>
+          </p:nvPr>
+        </p:nvSpPr>
+        <p:spPr>
+          <a:xfrm>
+            <a:off x="560200" y="3105825"/>
+            <a:ext cx="6389700" cy="1200288"/>
+          </a:xfrm>
+          <a:prstGeom prst="rect">
+            <a:avLst/>
+          </a:prstGeom>
+          <a:noFill/>
+          <a:ln>
+            <a:noFill/>
+          </a:ln>
+        </p:spPr>
+        <p:txBody>
+          <a:bodyPr anchorCtr="0" anchor="t" bIns="45700" lIns="91425" spcFirstLastPara="1" rIns="91425" wrap="square" tIns="45700">
+            <a:spAutoFit/>
+          </a:bodyPr>
+          <a:lstStyle/>
+          <a:p>
+            <a:pPr indent="0" lvl="0" marL="0" rtl="0" algn="l">
+              <a:lnSpc>
+                <a:spcPct val="100000"/>
+              </a:lnSpc>
+              <a:spcBef>
+                <a:spcPts val="0"/>
+              </a:spcBef>
+              <a:spcAft>
+                <a:spcPts val="0"/>
+              </a:spcAft>
+              <a:buSzPts val="3600"/>
+              <a:buNone/>
+            </a:pPr>
+            <a:r>
+              <a:rPr lang="ru-RU"/>
+              <a:t>Динамический анализ. Основные способы</a:t>
+            </a:r>
+            <a:endParaRPr/>
+          </a:p>
+        </p:txBody>
+      </p:sp>
+    </p:spTree>
+  </p:cSld>
+  <p:clrMapOvr>
+    <a:masterClrMapping/>
+  </p:clrMapOvr>
+</p:sld>
+</file>
+
+<file path=ppt/slides/slide5.xml><?xml version="1.0" encoding="utf-8"?>
+<p:sld xmlns:a="http://schemas.openxmlformats.org/drawingml/2006/main" xmlns:r="http://schemas.openxmlformats.org/officeDocument/2006/relationships" xmlns:mc="http://schemas.openxmlformats.org/markup-compatibility/2006" xmlns:mv="urn:schemas-microsoft-com:mac:vml" xmlns:p="http://schemas.openxmlformats.org/presentationml/2006/main" xmlns:c="http://schemas.openxmlformats.org/drawingml/2006/chart" xmlns:dgm="http://schemas.openxmlformats.org/drawingml/2006/diagram" xmlns:o="urn:schemas-microsoft-com:office:office" xmlns:v="urn:schemas-microsoft-com:vml" xmlns:pvml="urn:schemas-microsoft-com:office:powerpoint" xmlns:com="http://schemas.openxmlformats.org/drawingml/2006/compatibility" xmlns:p14="http://schemas.microsoft.com/office/powerpoint/2010/main" xmlns:p15="http://schemas.microsoft.com/office/powerpoint/2012/main" xmlns:ahyp="http://schemas.microsoft.com/office/drawing/2018/hyperlinkcolor">
+  <p:cSld>
+    <p:spTree>
+      <p:nvGrpSpPr>
+        <p:cNvPr id="120" name="Shape 120"/>
+        <p:cNvGrpSpPr/>
+        <p:nvPr/>
+      </p:nvGrpSpPr>
+      <p:grpSpPr>
+        <a:xfrm>
+          <a:off x="0" y="0"/>
+          <a:ext cx="0" cy="0"/>
+          <a:chOff x="0" y="0"/>
+          <a:chExt cx="0" cy="0"/>
+        </a:xfrm>
+      </p:grpSpPr>
+      <p:sp>
+        <p:nvSpPr>
+          <p:cNvPr id="121" name="Google Shape;121;p2"/>
           <p:cNvSpPr txBox="1"/>
           <p:nvPr>
             <p:ph type="title"/>
@@ -18610,7 +20299,7 @@
       </p:sp>
       <p:sp>
         <p:nvSpPr>
-          <p:cNvPr id="91" name="Google Shape;91;p2"/>
+          <p:cNvPr id="122" name="Google Shape;122;p2"/>
           <p:cNvSpPr txBox="1"/>
           <p:nvPr>
             <p:ph idx="1" type="body"/>
@@ -18665,7 +20354,7 @@
       </p:sp>
       <p:sp>
         <p:nvSpPr>
-          <p:cNvPr id="92" name="Google Shape;92;p2"/>
+          <p:cNvPr id="123" name="Google Shape;123;p2"/>
           <p:cNvSpPr txBox="1"/>
           <p:nvPr>
             <p:ph idx="2" type="body"/>
@@ -18739,7 +20428,7 @@
       </p:sp>
       <p:sp>
         <p:nvSpPr>
-          <p:cNvPr id="93" name="Google Shape;93;p2"/>
+          <p:cNvPr id="124" name="Google Shape;124;p2"/>
           <p:cNvSpPr txBox="1"/>
           <p:nvPr>
             <p:ph idx="1" type="body"/>
@@ -18794,7 +20483,7 @@
       </p:sp>
       <p:sp>
         <p:nvSpPr>
-          <p:cNvPr id="94" name="Google Shape;94;p2"/>
+          <p:cNvPr id="125" name="Google Shape;125;p2"/>
           <p:cNvSpPr txBox="1"/>
           <p:nvPr>
             <p:ph idx="2" type="body"/>
@@ -18868,7 +20557,7 @@
       </p:sp>
       <p:grpSp>
         <p:nvGrpSpPr>
-          <p:cNvPr id="95" name="Google Shape;95;p2"/>
+          <p:cNvPr id="126" name="Google Shape;126;p2"/>
           <p:cNvGrpSpPr/>
           <p:nvPr/>
         </p:nvGrpSpPr>
@@ -18882,7 +20571,7 @@
         </p:grpSpPr>
         <p:pic>
           <p:nvPicPr>
-            <p:cNvPr id="96" name="Google Shape;96;p2"/>
+            <p:cNvPr id="127" name="Google Shape;127;p2"/>
             <p:cNvPicPr preferRelativeResize="0"/>
             <p:nvPr/>
           </p:nvPicPr>
@@ -18909,7 +20598,7 @@
         </p:pic>
         <p:pic>
           <p:nvPicPr>
-            <p:cNvPr id="97" name="Google Shape;97;p2"/>
+            <p:cNvPr id="128" name="Google Shape;128;p2"/>
             <p:cNvPicPr preferRelativeResize="0"/>
             <p:nvPr/>
           </p:nvPicPr>
@@ -18937,7 +20626,7 @@
       </p:grpSp>
       <p:grpSp>
         <p:nvGrpSpPr>
-          <p:cNvPr id="98" name="Google Shape;98;p2"/>
+          <p:cNvPr id="129" name="Google Shape;129;p2"/>
           <p:cNvGrpSpPr/>
           <p:nvPr/>
         </p:nvGrpSpPr>
@@ -18951,7 +20640,7 @@
         </p:grpSpPr>
         <p:pic>
           <p:nvPicPr>
-            <p:cNvPr id="99" name="Google Shape;99;p2"/>
+            <p:cNvPr id="130" name="Google Shape;130;p2"/>
             <p:cNvPicPr preferRelativeResize="0"/>
             <p:nvPr/>
           </p:nvPicPr>
@@ -18978,7 +20667,7 @@
         </p:pic>
         <p:pic>
           <p:nvPicPr>
-            <p:cNvPr id="100" name="Google Shape;100;p2"/>
+            <p:cNvPr id="131" name="Google Shape;131;p2"/>
             <p:cNvPicPr preferRelativeResize="0"/>
             <p:nvPr/>
           </p:nvPicPr>
@@ -19005,7 +20694,7 @@
         </p:pic>
         <p:pic>
           <p:nvPicPr>
-            <p:cNvPr id="101" name="Google Shape;101;p2"/>
+            <p:cNvPr id="132" name="Google Shape;132;p2"/>
             <p:cNvPicPr preferRelativeResize="0"/>
             <p:nvPr/>
           </p:nvPicPr>
@@ -19039,12 +20728,12 @@
 </p:sld>
 </file>
 
-<file path=ppt/slides/slide5.xml><?xml version="1.0" encoding="utf-8"?>
+<file path=ppt/slides/slide6.xml><?xml version="1.0" encoding="utf-8"?>
 <p:sld xmlns:a="http://schemas.openxmlformats.org/drawingml/2006/main" xmlns:r="http://schemas.openxmlformats.org/officeDocument/2006/relationships" xmlns:mc="http://schemas.openxmlformats.org/markup-compatibility/2006" xmlns:mv="urn:schemas-microsoft-com:mac:vml" xmlns:p="http://schemas.openxmlformats.org/presentationml/2006/main" xmlns:c="http://schemas.openxmlformats.org/drawingml/2006/chart" xmlns:dgm="http://schemas.openxmlformats.org/drawingml/2006/diagram" xmlns:o="urn:schemas-microsoft-com:office:office" xmlns:v="urn:schemas-microsoft-com:vml" xmlns:pvml="urn:schemas-microsoft-com:office:powerpoint" xmlns:com="http://schemas.openxmlformats.org/drawingml/2006/compatibility" xmlns:p14="http://schemas.microsoft.com/office/powerpoint/2010/main" xmlns:p15="http://schemas.microsoft.com/office/powerpoint/2012/main" xmlns:ahyp="http://schemas.microsoft.com/office/drawing/2018/hyperlinkcolor">
   <p:cSld>
     <p:spTree>
       <p:nvGrpSpPr>
-        <p:cNvPr id="105" name="Shape 105"/>
+        <p:cNvPr id="136" name="Shape 136"/>
         <p:cNvGrpSpPr/>
         <p:nvPr/>
       </p:nvGrpSpPr>
@@ -19058,7 +20747,7 @@
       </p:grpSpPr>
       <p:sp>
         <p:nvSpPr>
-          <p:cNvPr id="106" name="Google Shape;106;p3"/>
+          <p:cNvPr id="137" name="Google Shape;137;p3"/>
           <p:cNvSpPr txBox="1"/>
           <p:nvPr>
             <p:ph type="title"/>
@@ -19110,7 +20799,7 @@
       </p:sp>
       <p:sp>
         <p:nvSpPr>
-          <p:cNvPr id="107" name="Google Shape;107;p3"/>
+          <p:cNvPr id="138" name="Google Shape;138;p3"/>
           <p:cNvSpPr txBox="1"/>
           <p:nvPr>
             <p:ph idx="2" type="body"/>
@@ -19219,7 +20908,7 @@
       </p:sp>
       <p:pic>
         <p:nvPicPr>
-          <p:cNvPr descr="Плагин для ранжирования кода по важности или как я пыталась облегчить жизнь  программистам / Хабр" id="108" name="Google Shape;108;p3"/>
+          <p:cNvPr descr="Плагин для ранжирования кода по важности или как я пыталась облегчить жизнь  программистам / Хабр" id="139" name="Google Shape;139;p3"/>
           <p:cNvPicPr preferRelativeResize="0"/>
           <p:nvPr/>
         </p:nvPicPr>
@@ -19252,12 +20941,12 @@
 </p:sld>
 </file>
 
-<file path=ppt/slides/slide6.xml><?xml version="1.0" encoding="utf-8"?>
+<file path=ppt/slides/slide7.xml><?xml version="1.0" encoding="utf-8"?>
 <p:sld xmlns:a="http://schemas.openxmlformats.org/drawingml/2006/main" xmlns:r="http://schemas.openxmlformats.org/officeDocument/2006/relationships" xmlns:mc="http://schemas.openxmlformats.org/markup-compatibility/2006" xmlns:mv="urn:schemas-microsoft-com:mac:vml" xmlns:p="http://schemas.openxmlformats.org/presentationml/2006/main" xmlns:c="http://schemas.openxmlformats.org/drawingml/2006/chart" xmlns:dgm="http://schemas.openxmlformats.org/drawingml/2006/diagram" xmlns:o="urn:schemas-microsoft-com:office:office" xmlns:v="urn:schemas-microsoft-com:vml" xmlns:pvml="urn:schemas-microsoft-com:office:powerpoint" xmlns:com="http://schemas.openxmlformats.org/drawingml/2006/compatibility" xmlns:p14="http://schemas.microsoft.com/office/powerpoint/2010/main" xmlns:p15="http://schemas.microsoft.com/office/powerpoint/2012/main" xmlns:ahyp="http://schemas.microsoft.com/office/drawing/2018/hyperlinkcolor">
   <p:cSld>
     <p:spTree>
       <p:nvGrpSpPr>
-        <p:cNvPr id="112" name="Shape 112"/>
+        <p:cNvPr id="143" name="Shape 143"/>
         <p:cNvGrpSpPr/>
         <p:nvPr/>
       </p:nvGrpSpPr>
@@ -19271,7 +20960,7 @@
       </p:grpSpPr>
       <p:sp>
         <p:nvSpPr>
-          <p:cNvPr id="113" name="Google Shape;113;p5"/>
+          <p:cNvPr id="144" name="Google Shape;144;p5"/>
           <p:cNvSpPr txBox="1"/>
           <p:nvPr>
             <p:ph type="title"/>
@@ -19323,7 +21012,7 @@
       </p:sp>
       <p:sp>
         <p:nvSpPr>
-          <p:cNvPr id="114" name="Google Shape;114;p5"/>
+          <p:cNvPr id="145" name="Google Shape;145;p5"/>
           <p:cNvSpPr txBox="1"/>
           <p:nvPr>
             <p:ph idx="2" type="body"/>
@@ -19558,7 +21247,7 @@
       </p:sp>
       <p:grpSp>
         <p:nvGrpSpPr>
-          <p:cNvPr id="115" name="Google Shape;115;p5"/>
+          <p:cNvPr id="146" name="Google Shape;146;p5"/>
           <p:cNvGrpSpPr/>
           <p:nvPr/>
         </p:nvGrpSpPr>
@@ -19572,7 +21261,7 @@
         </p:grpSpPr>
         <p:sp>
           <p:nvSpPr>
-            <p:cNvPr id="116" name="Google Shape;116;p5"/>
+            <p:cNvPr id="147" name="Google Shape;147;p5"/>
             <p:cNvSpPr/>
             <p:nvPr/>
           </p:nvSpPr>
@@ -19648,7 +21337,7 @@
         </p:sp>
         <p:sp>
           <p:nvSpPr>
-            <p:cNvPr id="117" name="Google Shape;117;p5"/>
+            <p:cNvPr id="148" name="Google Shape;148;p5"/>
             <p:cNvSpPr/>
             <p:nvPr/>
           </p:nvSpPr>
@@ -19724,7 +21413,7 @@
         </p:sp>
         <p:sp>
           <p:nvSpPr>
-            <p:cNvPr id="118" name="Google Shape;118;p5"/>
+            <p:cNvPr id="149" name="Google Shape;149;p5"/>
             <p:cNvSpPr/>
             <p:nvPr/>
           </p:nvSpPr>
@@ -19800,7 +21489,7 @@
         </p:sp>
         <p:sp>
           <p:nvSpPr>
-            <p:cNvPr id="119" name="Google Shape;119;p5"/>
+            <p:cNvPr id="150" name="Google Shape;150;p5"/>
             <p:cNvSpPr/>
             <p:nvPr/>
           </p:nvSpPr>
@@ -19863,7 +21552,7 @@
         </p:sp>
         <p:sp>
           <p:nvSpPr>
-            <p:cNvPr id="120" name="Google Shape;120;p5"/>
+            <p:cNvPr id="151" name="Google Shape;151;p5"/>
             <p:cNvSpPr/>
             <p:nvPr/>
           </p:nvSpPr>
@@ -19926,7 +21615,7 @@
         </p:sp>
         <p:sp>
           <p:nvSpPr>
-            <p:cNvPr id="121" name="Google Shape;121;p5"/>
+            <p:cNvPr id="152" name="Google Shape;152;p5"/>
             <p:cNvSpPr txBox="1"/>
             <p:nvPr/>
           </p:nvSpPr>
@@ -19988,7 +21677,7 @@
       </p:grpSp>
       <p:sp>
         <p:nvSpPr>
-          <p:cNvPr id="122" name="Google Shape;122;p5"/>
+          <p:cNvPr id="153" name="Google Shape;153;p5"/>
           <p:cNvSpPr txBox="1"/>
           <p:nvPr/>
         </p:nvSpPr>
@@ -20052,12 +21741,12 @@
 </p:sld>
 </file>
 
-<file path=ppt/slides/slide7.xml><?xml version="1.0" encoding="utf-8"?>
+<file path=ppt/slides/slide8.xml><?xml version="1.0" encoding="utf-8"?>
 <p:sld xmlns:a="http://schemas.openxmlformats.org/drawingml/2006/main" xmlns:r="http://schemas.openxmlformats.org/officeDocument/2006/relationships" xmlns:mc="http://schemas.openxmlformats.org/markup-compatibility/2006" xmlns:mv="urn:schemas-microsoft-com:mac:vml" xmlns:p="http://schemas.openxmlformats.org/presentationml/2006/main" xmlns:c="http://schemas.openxmlformats.org/drawingml/2006/chart" xmlns:dgm="http://schemas.openxmlformats.org/drawingml/2006/diagram" xmlns:o="urn:schemas-microsoft-com:office:office" xmlns:v="urn:schemas-microsoft-com:vml" xmlns:pvml="urn:schemas-microsoft-com:office:powerpoint" xmlns:com="http://schemas.openxmlformats.org/drawingml/2006/compatibility" xmlns:p14="http://schemas.microsoft.com/office/powerpoint/2010/main" xmlns:p15="http://schemas.microsoft.com/office/powerpoint/2012/main" xmlns:ahyp="http://schemas.microsoft.com/office/drawing/2018/hyperlinkcolor">
   <p:cSld>
     <p:spTree>
       <p:nvGrpSpPr>
-        <p:cNvPr id="126" name="Shape 126"/>
+        <p:cNvPr id="157" name="Shape 157"/>
         <p:cNvGrpSpPr/>
         <p:nvPr/>
       </p:nvGrpSpPr>
@@ -20071,7 +21760,7 @@
       </p:grpSpPr>
       <p:sp>
         <p:nvSpPr>
-          <p:cNvPr id="127" name="Google Shape;127;p6"/>
+          <p:cNvPr id="158" name="Google Shape;158;p6"/>
           <p:cNvSpPr txBox="1"/>
           <p:nvPr>
             <p:ph type="title"/>
@@ -20123,7 +21812,7 @@
       </p:sp>
       <p:sp>
         <p:nvSpPr>
-          <p:cNvPr id="128" name="Google Shape;128;p6"/>
+          <p:cNvPr id="159" name="Google Shape;159;p6"/>
           <p:cNvSpPr txBox="1"/>
           <p:nvPr>
             <p:ph idx="2" type="body"/>
@@ -20353,7 +22042,7 @@
       </p:sp>
       <p:grpSp>
         <p:nvGrpSpPr>
-          <p:cNvPr id="129" name="Google Shape;129;p6"/>
+          <p:cNvPr id="160" name="Google Shape;160;p6"/>
           <p:cNvGrpSpPr/>
           <p:nvPr/>
         </p:nvGrpSpPr>
@@ -20367,7 +22056,7 @@
         </p:grpSpPr>
         <p:sp>
           <p:nvSpPr>
-            <p:cNvPr id="130" name="Google Shape;130;p6"/>
+            <p:cNvPr id="161" name="Google Shape;161;p6"/>
             <p:cNvSpPr/>
             <p:nvPr/>
           </p:nvSpPr>
@@ -20443,7 +22132,7 @@
         </p:sp>
         <p:sp>
           <p:nvSpPr>
-            <p:cNvPr id="131" name="Google Shape;131;p6"/>
+            <p:cNvPr id="162" name="Google Shape;162;p6"/>
             <p:cNvSpPr/>
             <p:nvPr/>
           </p:nvSpPr>
@@ -20519,7 +22208,7 @@
         </p:sp>
         <p:sp>
           <p:nvSpPr>
-            <p:cNvPr id="132" name="Google Shape;132;p6"/>
+            <p:cNvPr id="163" name="Google Shape;163;p6"/>
             <p:cNvSpPr/>
             <p:nvPr/>
           </p:nvSpPr>
@@ -20595,7 +22284,7 @@
         </p:sp>
         <p:sp>
           <p:nvSpPr>
-            <p:cNvPr id="133" name="Google Shape;133;p6"/>
+            <p:cNvPr id="164" name="Google Shape;164;p6"/>
             <p:cNvSpPr/>
             <p:nvPr/>
           </p:nvSpPr>
@@ -20658,7 +22347,7 @@
         </p:sp>
         <p:sp>
           <p:nvSpPr>
-            <p:cNvPr id="134" name="Google Shape;134;p6"/>
+            <p:cNvPr id="165" name="Google Shape;165;p6"/>
             <p:cNvSpPr/>
             <p:nvPr/>
           </p:nvSpPr>
@@ -20721,7 +22410,7 @@
         </p:sp>
         <p:sp>
           <p:nvSpPr>
-            <p:cNvPr id="135" name="Google Shape;135;p6"/>
+            <p:cNvPr id="166" name="Google Shape;166;p6"/>
             <p:cNvSpPr txBox="1"/>
             <p:nvPr/>
           </p:nvSpPr>
@@ -20783,7 +22472,7 @@
       </p:grpSp>
       <p:sp>
         <p:nvSpPr>
-          <p:cNvPr id="136" name="Google Shape;136;p6"/>
+          <p:cNvPr id="167" name="Google Shape;167;p6"/>
           <p:cNvSpPr txBox="1"/>
           <p:nvPr/>
         </p:nvSpPr>
@@ -20847,12 +22536,12 @@
 </p:sld>
 </file>
 
-<file path=ppt/slides/slide8.xml><?xml version="1.0" encoding="utf-8"?>
+<file path=ppt/slides/slide9.xml><?xml version="1.0" encoding="utf-8"?>
 <p:sld xmlns:a="http://schemas.openxmlformats.org/drawingml/2006/main" xmlns:r="http://schemas.openxmlformats.org/officeDocument/2006/relationships" xmlns:mc="http://schemas.openxmlformats.org/markup-compatibility/2006" xmlns:mv="urn:schemas-microsoft-com:mac:vml" xmlns:p="http://schemas.openxmlformats.org/presentationml/2006/main" xmlns:c="http://schemas.openxmlformats.org/drawingml/2006/chart" xmlns:dgm="http://schemas.openxmlformats.org/drawingml/2006/diagram" xmlns:o="urn:schemas-microsoft-com:office:office" xmlns:v="urn:schemas-microsoft-com:vml" xmlns:pvml="urn:schemas-microsoft-com:office:powerpoint" xmlns:com="http://schemas.openxmlformats.org/drawingml/2006/compatibility" xmlns:p14="http://schemas.microsoft.com/office/powerpoint/2010/main" xmlns:p15="http://schemas.microsoft.com/office/powerpoint/2012/main" xmlns:ahyp="http://schemas.microsoft.com/office/drawing/2018/hyperlinkcolor">
   <p:cSld>
     <p:spTree>
       <p:nvGrpSpPr>
-        <p:cNvPr id="140" name="Shape 140"/>
+        <p:cNvPr id="171" name="Shape 171"/>
         <p:cNvGrpSpPr/>
         <p:nvPr/>
       </p:nvGrpSpPr>
@@ -20866,7 +22555,7 @@
       </p:grpSpPr>
       <p:sp>
         <p:nvSpPr>
-          <p:cNvPr id="141" name="Google Shape;141;p7"/>
+          <p:cNvPr id="172" name="Google Shape;172;p7"/>
           <p:cNvSpPr txBox="1"/>
           <p:nvPr>
             <p:ph type="title"/>
@@ -20918,7 +22607,7 @@
       </p:sp>
       <p:sp>
         <p:nvSpPr>
-          <p:cNvPr id="142" name="Google Shape;142;p7"/>
+          <p:cNvPr id="173" name="Google Shape;173;p7"/>
           <p:cNvSpPr txBox="1"/>
           <p:nvPr>
             <p:ph idx="1" type="body"/>
@@ -20978,7 +22667,7 @@
       </p:sp>
       <p:sp>
         <p:nvSpPr>
-          <p:cNvPr id="143" name="Google Shape;143;p7"/>
+          <p:cNvPr id="174" name="Google Shape;174;p7"/>
           <p:cNvSpPr txBox="1"/>
           <p:nvPr>
             <p:ph idx="2" type="body"/>
@@ -21078,7 +22767,7 @@
       </p:sp>
       <p:sp>
         <p:nvSpPr>
-          <p:cNvPr id="144" name="Google Shape;144;p7"/>
+          <p:cNvPr id="175" name="Google Shape;175;p7"/>
           <p:cNvSpPr txBox="1"/>
           <p:nvPr>
             <p:ph idx="1" type="body"/>
@@ -21138,7 +22827,7 @@
       </p:sp>
       <p:sp>
         <p:nvSpPr>
-          <p:cNvPr id="145" name="Google Shape;145;p7"/>
+          <p:cNvPr id="176" name="Google Shape;176;p7"/>
           <p:cNvSpPr txBox="1"/>
           <p:nvPr>
             <p:ph idx="2" type="body"/>
@@ -21244,343 +22933,286 @@
 </p:sld>
 </file>
 
-<file path=ppt/slides/slide9.xml><?xml version="1.0" encoding="utf-8"?>
-<p:sld xmlns:a="http://schemas.openxmlformats.org/drawingml/2006/main" xmlns:r="http://schemas.openxmlformats.org/officeDocument/2006/relationships" xmlns:mc="http://schemas.openxmlformats.org/markup-compatibility/2006" xmlns:mv="urn:schemas-microsoft-com:mac:vml" xmlns:p="http://schemas.openxmlformats.org/presentationml/2006/main" xmlns:c="http://schemas.openxmlformats.org/drawingml/2006/chart" xmlns:dgm="http://schemas.openxmlformats.org/drawingml/2006/diagram" xmlns:o="urn:schemas-microsoft-com:office:office" xmlns:v="urn:schemas-microsoft-com:vml" xmlns:pvml="urn:schemas-microsoft-com:office:powerpoint" xmlns:com="http://schemas.openxmlformats.org/drawingml/2006/compatibility" xmlns:p14="http://schemas.microsoft.com/office/powerpoint/2010/main" xmlns:p15="http://schemas.microsoft.com/office/powerpoint/2012/main" xmlns:ahyp="http://schemas.microsoft.com/office/drawing/2018/hyperlinkcolor">
-  <p:cSld>
-    <p:spTree>
-      <p:nvGrpSpPr>
-        <p:cNvPr id="149" name="Shape 149"/>
-        <p:cNvGrpSpPr/>
-        <p:nvPr/>
-      </p:nvGrpSpPr>
-      <p:grpSpPr>
-        <a:xfrm>
-          <a:off x="0" y="0"/>
-          <a:ext cx="0" cy="0"/>
-          <a:chOff x="0" y="0"/>
-          <a:chExt cx="0" cy="0"/>
-        </a:xfrm>
-      </p:grpSpPr>
-      <p:sp>
-        <p:nvSpPr>
-          <p:cNvPr id="150" name="Google Shape;150;p8"/>
-          <p:cNvSpPr txBox="1"/>
-          <p:nvPr>
-            <p:ph type="title"/>
-          </p:nvPr>
-        </p:nvSpPr>
-        <p:spPr>
-          <a:xfrm>
-            <a:off x="559572" y="359101"/>
-            <a:ext cx="11081700" cy="523200"/>
-          </a:xfrm>
-          <a:prstGeom prst="rect">
-            <a:avLst/>
-          </a:prstGeom>
-          <a:noFill/>
-          <a:ln>
-            <a:noFill/>
-          </a:ln>
-        </p:spPr>
-        <p:txBody>
-          <a:bodyPr anchorCtr="0" anchor="ctr" bIns="45700" lIns="91425" spcFirstLastPara="1" rIns="91425" wrap="square" tIns="45700">
-            <a:spAutoFit/>
-          </a:bodyPr>
-          <a:lstStyle/>
-          <a:p>
-            <a:pPr indent="0" lvl="0" marL="0" rtl="0" algn="l">
-              <a:lnSpc>
-                <a:spcPct val="100000"/>
-              </a:lnSpc>
-              <a:spcBef>
-                <a:spcPts val="0"/>
-              </a:spcBef>
-              <a:spcAft>
-                <a:spcPts val="0"/>
-              </a:spcAft>
-              <a:buClr>
-                <a:schemeClr val="lt1"/>
-              </a:buClr>
-              <a:buSzPts val="2800"/>
-              <a:buFont typeface="Montserrat"/>
-              <a:buNone/>
-            </a:pPr>
-            <a:r>
-              <a:rPr lang="ru-RU"/>
-              <a:t>Запуск и подготовка к отладке</a:t>
-            </a:r>
-            <a:endParaRPr/>
-          </a:p>
-        </p:txBody>
-      </p:sp>
-      <p:sp>
-        <p:nvSpPr>
-          <p:cNvPr id="151" name="Google Shape;151;p8"/>
-          <p:cNvSpPr txBox="1"/>
-          <p:nvPr>
-            <p:ph idx="2" type="body"/>
-          </p:nvPr>
-        </p:nvSpPr>
-        <p:spPr>
-          <a:xfrm>
-            <a:off x="559575" y="1771050"/>
-            <a:ext cx="6636600" cy="3170058"/>
-          </a:xfrm>
-          <a:prstGeom prst="rect">
-            <a:avLst/>
-          </a:prstGeom>
-          <a:noFill/>
-          <a:ln>
-            <a:noFill/>
-          </a:ln>
-        </p:spPr>
-        <p:txBody>
-          <a:bodyPr anchorCtr="0" anchor="t" bIns="45700" lIns="91425" spcFirstLastPara="1" rIns="91425" wrap="square" tIns="45700">
-            <a:spAutoFit/>
-          </a:bodyPr>
-          <a:lstStyle/>
-          <a:p>
-            <a:pPr indent="-355600" lvl="0" marL="457200" rtl="0" algn="l">
-              <a:lnSpc>
-                <a:spcPct val="100000"/>
-              </a:lnSpc>
-              <a:spcBef>
-                <a:spcPts val="0"/>
-              </a:spcBef>
-              <a:spcAft>
-                <a:spcPts val="0"/>
-              </a:spcAft>
-              <a:buClr>
-                <a:schemeClr val="dk2"/>
-              </a:buClr>
-              <a:buSzPts val="2000"/>
-              <a:buAutoNum type="arabicPeriod"/>
-            </a:pPr>
-            <a:r>
-              <a:rPr i="1" lang="ru-RU" sz="2000"/>
-              <a:t>gdb ./main</a:t>
-            </a:r>
-            <a:endParaRPr/>
-          </a:p>
-          <a:p>
-            <a:pPr indent="-355600" lvl="0" marL="457200" rtl="0" algn="l">
-              <a:lnSpc>
-                <a:spcPct val="100000"/>
-              </a:lnSpc>
-              <a:spcBef>
-                <a:spcPts val="0"/>
-              </a:spcBef>
-              <a:spcAft>
-                <a:spcPts val="0"/>
-              </a:spcAft>
-              <a:buClr>
-                <a:schemeClr val="dk2"/>
-              </a:buClr>
-              <a:buSzPts val="2000"/>
-              <a:buAutoNum type="arabicPeriod"/>
-            </a:pPr>
-            <a:r>
-              <a:rPr lang="ru-RU" sz="2000"/>
-              <a:t>gdb –args ./main secret</a:t>
-            </a:r>
-            <a:endParaRPr/>
-          </a:p>
-          <a:p>
-            <a:pPr indent="-355600" lvl="0" marL="457200" rtl="0" algn="l">
-              <a:lnSpc>
-                <a:spcPct val="100000"/>
-              </a:lnSpc>
-              <a:spcBef>
-                <a:spcPts val="0"/>
-              </a:spcBef>
-              <a:spcAft>
-                <a:spcPts val="0"/>
-              </a:spcAft>
-              <a:buClr>
-                <a:schemeClr val="dk2"/>
-              </a:buClr>
-              <a:buSzPts val="2000"/>
-              <a:buAutoNum type="arabicPeriod"/>
-            </a:pPr>
-            <a:r>
-              <a:rPr lang="ru-RU" sz="2000"/>
-              <a:t>set args secret</a:t>
-            </a:r>
-            <a:endParaRPr/>
-          </a:p>
-          <a:p>
-            <a:pPr indent="-355600" lvl="0" marL="457200" rtl="0" algn="l">
-              <a:lnSpc>
-                <a:spcPct val="100000"/>
-              </a:lnSpc>
-              <a:spcBef>
-                <a:spcPts val="0"/>
-              </a:spcBef>
-              <a:spcAft>
-                <a:spcPts val="0"/>
-              </a:spcAft>
-              <a:buClr>
-                <a:schemeClr val="dk2"/>
-              </a:buClr>
-              <a:buSzPts val="2000"/>
-              <a:buAutoNum type="arabicPeriod"/>
-            </a:pPr>
-            <a:r>
-              <a:rPr lang="ru-RU" sz="2000"/>
-              <a:t>show args</a:t>
-            </a:r>
-            <a:endParaRPr sz="2000"/>
-          </a:p>
-          <a:p>
-            <a:pPr indent="-355600" lvl="0" marL="457200" rtl="0" algn="l">
-              <a:lnSpc>
-                <a:spcPct val="100000"/>
-              </a:lnSpc>
-              <a:spcBef>
-                <a:spcPts val="0"/>
-              </a:spcBef>
-              <a:spcAft>
-                <a:spcPts val="0"/>
-              </a:spcAft>
-              <a:buClr>
-                <a:schemeClr val="dk2"/>
-              </a:buClr>
-              <a:buSzPts val="2000"/>
-              <a:buAutoNum type="arabicPeriod"/>
-            </a:pPr>
-            <a:r>
-              <a:rPr lang="ru-RU" sz="2000"/>
-              <a:t>run / r (далее можно написать аргументы командной строки)</a:t>
-            </a:r>
-            <a:endParaRPr sz="2000"/>
-          </a:p>
-          <a:p>
-            <a:pPr indent="-355600" lvl="0" marL="457200" rtl="0" algn="l">
-              <a:lnSpc>
-                <a:spcPct val="100000"/>
-              </a:lnSpc>
-              <a:spcBef>
-                <a:spcPts val="0"/>
-              </a:spcBef>
-              <a:spcAft>
-                <a:spcPts val="0"/>
-              </a:spcAft>
-              <a:buClr>
-                <a:schemeClr val="dk2"/>
-              </a:buClr>
-              <a:buSzPts val="2000"/>
-              <a:buAutoNum type="arabicPeriod"/>
-            </a:pPr>
-            <a:r>
-              <a:rPr lang="ru-RU" sz="2000"/>
-              <a:t>quit / q</a:t>
-            </a:r>
-            <a:endParaRPr/>
-          </a:p>
-          <a:p>
-            <a:pPr indent="-228600" lvl="0" marL="457200" rtl="0" algn="l">
-              <a:lnSpc>
-                <a:spcPct val="100000"/>
-              </a:lnSpc>
-              <a:spcBef>
-                <a:spcPts val="0"/>
-              </a:spcBef>
-              <a:spcAft>
-                <a:spcPts val="0"/>
-              </a:spcAft>
-              <a:buClr>
-                <a:schemeClr val="dk2"/>
-              </a:buClr>
-              <a:buSzPts val="2000"/>
-              <a:buNone/>
-            </a:pPr>
-            <a:r>
-              <a:t/>
-            </a:r>
-            <a:endParaRPr sz="2000"/>
-          </a:p>
-          <a:p>
-            <a:pPr indent="-228600" lvl="0" marL="457200" rtl="0" algn="l">
-              <a:lnSpc>
-                <a:spcPct val="100000"/>
-              </a:lnSpc>
-              <a:spcBef>
-                <a:spcPts val="0"/>
-              </a:spcBef>
-              <a:spcAft>
-                <a:spcPts val="0"/>
-              </a:spcAft>
-              <a:buClr>
-                <a:schemeClr val="dk2"/>
-              </a:buClr>
-              <a:buSzPts val="2000"/>
-              <a:buNone/>
-            </a:pPr>
-            <a:r>
-              <a:t/>
-            </a:r>
-            <a:endParaRPr sz="2000"/>
-          </a:p>
-          <a:p>
-            <a:pPr indent="-228600" lvl="0" marL="457200" rtl="0" algn="l">
-              <a:lnSpc>
-                <a:spcPct val="100000"/>
-              </a:lnSpc>
-              <a:spcBef>
-                <a:spcPts val="0"/>
-              </a:spcBef>
-              <a:spcAft>
-                <a:spcPts val="0"/>
-              </a:spcAft>
-              <a:buClr>
-                <a:schemeClr val="dk2"/>
-              </a:buClr>
-              <a:buSzPts val="2000"/>
-              <a:buNone/>
-            </a:pPr>
-            <a:r>
-              <a:t/>
-            </a:r>
-            <a:endParaRPr i="1" sz="2000"/>
-          </a:p>
-        </p:txBody>
-      </p:sp>
-      <p:pic>
-        <p:nvPicPr>
-          <p:cNvPr descr="Devlopment #Developer #Debug #Debugging #Meme #FunnyFriday #FridayFun  #Caddycode" id="152" name="Google Shape;152;p8"/>
-          <p:cNvPicPr preferRelativeResize="0"/>
-          <p:nvPr/>
-        </p:nvPicPr>
-        <p:blipFill rotWithShape="1">
-          <a:blip r:embed="rId3">
-            <a:alphaModFix/>
-          </a:blip>
-          <a:srcRect b="0" l="0" r="0" t="0"/>
-          <a:stretch/>
-        </p:blipFill>
-        <p:spPr>
-          <a:xfrm>
-            <a:off x="7512710" y="2417470"/>
-            <a:ext cx="3849540" cy="3082699"/>
-          </a:xfrm>
-          <a:prstGeom prst="rect">
-            <a:avLst/>
-          </a:prstGeom>
-          <a:noFill/>
-          <a:ln>
-            <a:noFill/>
-          </a:ln>
-        </p:spPr>
-      </p:pic>
-    </p:spTree>
-  </p:cSld>
-  <p:clrMapOvr>
-    <a:masterClrMapping/>
-  </p:clrMapOvr>
-</p:sld>
+<file path=ppt/theme/theme1.xml><?xml version="1.0" encoding="utf-8"?>
+<a:theme xmlns:a="http://schemas.openxmlformats.org/drawingml/2006/main" xmlns:r="http://schemas.openxmlformats.org/officeDocument/2006/relationships">
+  <a:themeElements>
+    <a:clrScheme name="Default">
+      <a:dk1>
+        <a:srgbClr val="000000"/>
+      </a:dk1>
+      <a:lt1>
+        <a:srgbClr val="FFFFFF"/>
+      </a:lt1>
+      <a:dk2>
+        <a:srgbClr val="158158"/>
+      </a:dk2>
+      <a:lt2>
+        <a:srgbClr val="F3F3F3"/>
+      </a:lt2>
+      <a:accent1>
+        <a:srgbClr val="058DC7"/>
+      </a:accent1>
+      <a:accent2>
+        <a:srgbClr val="50B432"/>
+      </a:accent2>
+      <a:accent3>
+        <a:srgbClr val="ED561B"/>
+      </a:accent3>
+      <a:accent4>
+        <a:srgbClr val="EDEF00"/>
+      </a:accent4>
+      <a:accent5>
+        <a:srgbClr val="24CBE5"/>
+      </a:accent5>
+      <a:accent6>
+        <a:srgbClr val="64E572"/>
+      </a:accent6>
+      <a:hlink>
+        <a:srgbClr val="2200CC"/>
+      </a:hlink>
+      <a:folHlink>
+        <a:srgbClr val="551A8B"/>
+      </a:folHlink>
+    </a:clrScheme>
+    <a:fontScheme name="Office">
+      <a:majorFont>
+        <a:latin typeface="Arial"/>
+        <a:ea typeface=""/>
+        <a:cs typeface=""/>
+        <a:font script="Jpan" typeface="ＭＳ Ｐゴシック"/>
+        <a:font script="Hang" typeface="맑은 고딕"/>
+        <a:font script="Hans" typeface="宋体"/>
+        <a:font script="Hant" typeface="新細明體"/>
+        <a:font script="Arab" typeface="Times New Roman"/>
+        <a:font script="Hebr" typeface="Times New Roman"/>
+        <a:font script="Thai" typeface="Angsana New"/>
+        <a:font script="Ethi" typeface="Nyala"/>
+        <a:font script="Beng" typeface="Vrinda"/>
+        <a:font script="Gujr" typeface="Shruti"/>
+        <a:font script="Khmr" typeface="MoolBoran"/>
+        <a:font script="Knda" typeface="Tunga"/>
+        <a:font script="Guru" typeface="Raavi"/>
+        <a:font script="Cans" typeface="Euphemia"/>
+        <a:font script="Cher" typeface="Plantagenet Cherokee"/>
+        <a:font script="Yiii" typeface="Microsoft Yi Baiti"/>
+        <a:font script="Tibt" typeface="Microsoft Himalaya"/>
+        <a:font script="Thaa" typeface="MV Boli"/>
+        <a:font script="Deva" typeface="Mangal"/>
+        <a:font script="Telu" typeface="Gautami"/>
+        <a:font script="Taml" typeface="Latha"/>
+        <a:font script="Syrc" typeface="Estrangelo Edessa"/>
+        <a:font script="Orya" typeface="Kalinga"/>
+        <a:font script="Mlym" typeface="Kartika"/>
+        <a:font script="Laoo" typeface="DokChampa"/>
+        <a:font script="Sinh" typeface="Iskoola Pota"/>
+        <a:font script="Mong" typeface="Mongolian Baiti"/>
+        <a:font script="Viet" typeface="Times New Roman"/>
+        <a:font script="Uigh" typeface="Microsoft Uighur"/>
+        <a:font script="Geor" typeface="Sylfaen"/>
+      </a:majorFont>
+      <a:minorFont>
+        <a:latin typeface="Arial"/>
+        <a:ea typeface=""/>
+        <a:cs typeface=""/>
+        <a:font script="Jpan" typeface="ＭＳ Ｐゴシック"/>
+        <a:font script="Hang" typeface="맑은 고딕"/>
+        <a:font script="Hans" typeface="宋体"/>
+        <a:font script="Hant" typeface="新細明體"/>
+        <a:font script="Arab" typeface="Arial"/>
+        <a:font script="Hebr" typeface="Arial"/>
+        <a:font script="Thai" typeface="Cordia New"/>
+        <a:font script="Ethi" typeface="Nyala"/>
+        <a:font script="Beng" typeface="Vrinda"/>
+        <a:font script="Gujr" typeface="Shruti"/>
+        <a:font script="Khmr" typeface="DaunPenh"/>
+        <a:font script="Knda" typeface="Tunga"/>
+        <a:font script="Guru" typeface="Raavi"/>
+        <a:font script="Cans" typeface="Euphemia"/>
+        <a:font script="Cher" typeface="Plantagenet Cherokee"/>
+        <a:font script="Yiii" typeface="Microsoft Yi Baiti"/>
+        <a:font script="Tibt" typeface="Microsoft Himalaya"/>
+        <a:font script="Thaa" typeface="MV Boli"/>
+        <a:font script="Deva" typeface="Mangal"/>
+        <a:font script="Telu" typeface="Gautami"/>
+        <a:font script="Taml" typeface="Latha"/>
+        <a:font script="Syrc" typeface="Estrangelo Edessa"/>
+        <a:font script="Orya" typeface="Kalinga"/>
+        <a:font script="Mlym" typeface="Kartika"/>
+        <a:font script="Laoo" typeface="DokChampa"/>
+        <a:font script="Sinh" typeface="Iskoola Pota"/>
+        <a:font script="Mong" typeface="Mongolian Baiti"/>
+        <a:font script="Viet" typeface="Arial"/>
+        <a:font script="Uigh" typeface="Microsoft Uighur"/>
+        <a:font script="Geor" typeface="Sylfaen"/>
+      </a:minorFont>
+    </a:fontScheme>
+    <a:fmtScheme name="Office">
+      <a:fillStyleLst>
+        <a:solidFill>
+          <a:schemeClr val="phClr"/>
+        </a:solidFill>
+        <a:gradFill rotWithShape="1">
+          <a:gsLst>
+            <a:gs pos="0">
+              <a:schemeClr val="phClr">
+                <a:tint val="50000"/>
+                <a:satMod val="300000"/>
+              </a:schemeClr>
+            </a:gs>
+            <a:gs pos="35000">
+              <a:schemeClr val="phClr">
+                <a:tint val="37000"/>
+                <a:satMod val="300000"/>
+              </a:schemeClr>
+            </a:gs>
+            <a:gs pos="100000">
+              <a:schemeClr val="phClr">
+                <a:tint val="15000"/>
+                <a:satMod val="350000"/>
+              </a:schemeClr>
+            </a:gs>
+          </a:gsLst>
+          <a:lin ang="16200000" scaled="1"/>
+        </a:gradFill>
+        <a:gradFill rotWithShape="1">
+          <a:gsLst>
+            <a:gs pos="0">
+              <a:schemeClr val="phClr">
+                <a:tint val="100000"/>
+                <a:shade val="100000"/>
+                <a:satMod val="130000"/>
+              </a:schemeClr>
+            </a:gs>
+            <a:gs pos="100000">
+              <a:schemeClr val="phClr">
+                <a:tint val="50000"/>
+                <a:shade val="100000"/>
+                <a:satMod val="350000"/>
+              </a:schemeClr>
+            </a:gs>
+          </a:gsLst>
+          <a:lin ang="16200000" scaled="0"/>
+        </a:gradFill>
+      </a:fillStyleLst>
+      <a:lnStyleLst>
+        <a:ln w="9525" cap="flat" cmpd="sng" algn="ctr">
+          <a:solidFill>
+            <a:schemeClr val="phClr">
+              <a:shade val="95000"/>
+              <a:satMod val="105000"/>
+            </a:schemeClr>
+          </a:solidFill>
+          <a:prstDash val="solid"/>
+        </a:ln>
+        <a:ln w="25400" cap="flat" cmpd="sng" algn="ctr">
+          <a:solidFill>
+            <a:schemeClr val="phClr"/>
+          </a:solidFill>
+          <a:prstDash val="solid"/>
+        </a:ln>
+        <a:ln w="38100" cap="flat" cmpd="sng" algn="ctr">
+          <a:solidFill>
+            <a:schemeClr val="phClr"/>
+          </a:solidFill>
+          <a:prstDash val="solid"/>
+        </a:ln>
+      </a:lnStyleLst>
+      <a:effectStyleLst>
+        <a:effectStyle>
+          <a:effectLst>
+            <a:outerShdw blurRad="40000" dist="20000" dir="5400000" rotWithShape="0">
+              <a:srgbClr val="000000">
+                <a:alpha val="38000"/>
+              </a:srgbClr>
+            </a:outerShdw>
+          </a:effectLst>
+        </a:effectStyle>
+        <a:effectStyle>
+          <a:effectLst>
+            <a:outerShdw blurRad="40000" dist="23000" dir="5400000" rotWithShape="0">
+              <a:srgbClr val="000000">
+                <a:alpha val="35000"/>
+              </a:srgbClr>
+            </a:outerShdw>
+          </a:effectLst>
+        </a:effectStyle>
+        <a:effectStyle>
+          <a:effectLst>
+            <a:outerShdw blurRad="40000" dist="23000" dir="5400000" rotWithShape="0">
+              <a:srgbClr val="000000">
+                <a:alpha val="35000"/>
+              </a:srgbClr>
+            </a:outerShdw>
+          </a:effectLst>
+          <a:scene3d>
+            <a:camera prst="orthographicFront">
+              <a:rot lat="0" lon="0" rev="0"/>
+            </a:camera>
+            <a:lightRig rig="threePt" dir="t">
+              <a:rot lat="0" lon="0" rev="1200000"/>
+            </a:lightRig>
+          </a:scene3d>
+          <a:sp3d>
+            <a:bevelT w="63500" h="25400"/>
+          </a:sp3d>
+        </a:effectStyle>
+      </a:effectStyleLst>
+      <a:bgFillStyleLst>
+        <a:solidFill>
+          <a:schemeClr val="phClr"/>
+        </a:solidFill>
+        <a:gradFill rotWithShape="1">
+          <a:gsLst>
+            <a:gs pos="0">
+              <a:schemeClr val="phClr">
+                <a:tint val="40000"/>
+                <a:satMod val="350000"/>
+              </a:schemeClr>
+            </a:gs>
+            <a:gs pos="40000">
+              <a:schemeClr val="phClr">
+                <a:tint val="45000"/>
+                <a:shade val="99000"/>
+                <a:satMod val="350000"/>
+              </a:schemeClr>
+            </a:gs>
+            <a:gs pos="100000">
+              <a:schemeClr val="phClr">
+                <a:shade val="20000"/>
+                <a:satMod val="255000"/>
+              </a:schemeClr>
+            </a:gs>
+          </a:gsLst>
+          <a:path path="circle">
+            <a:fillToRect l="50000" t="-80000" r="50000" b="180000"/>
+          </a:path>
+        </a:gradFill>
+        <a:gradFill rotWithShape="1">
+          <a:gsLst>
+            <a:gs pos="0">
+              <a:schemeClr val="phClr">
+                <a:tint val="80000"/>
+                <a:satMod val="300000"/>
+              </a:schemeClr>
+            </a:gs>
+            <a:gs pos="100000">
+              <a:schemeClr val="phClr">
+                <a:shade val="30000"/>
+                <a:satMod val="200000"/>
+              </a:schemeClr>
+            </a:gs>
+          </a:gsLst>
+          <a:path path="circle">
+            <a:fillToRect l="50000" t="50000" r="50000" b="50000"/>
+          </a:path>
+        </a:gradFill>
+      </a:bgFillStyleLst>
+    </a:fmtScheme>
+  </a:themeElements>
+</a:theme>
 </file>
 
-<file path=ppt/theme/theme1.xml><?xml version="1.0" encoding="utf-8"?>
+<file path=ppt/theme/theme2.xml><?xml version="1.0" encoding="utf-8"?>
 <a:theme xmlns:a="http://schemas.openxmlformats.org/drawingml/2006/main" xmlns:r="http://schemas.openxmlformats.org/officeDocument/2006/relationships" name="Шаблон МИФИ">
   <a:themeElements>
     <a:clrScheme name="Другая 7">
@@ -21857,283 +23489,4 @@
     </a:fmtScheme>
   </a:themeElements>
 </a:theme>
-</file>
-
-<file path=ppt/theme/theme2.xml><?xml version="1.0" encoding="utf-8"?>
-<a:theme xmlns:a="http://schemas.openxmlformats.org/drawingml/2006/main" xmlns:r="http://schemas.openxmlformats.org/officeDocument/2006/relationships">
-  <a:themeElements>
-    <a:clrScheme name="Default">
-      <a:dk1>
-        <a:srgbClr val="000000"/>
-      </a:dk1>
-      <a:lt1>
-        <a:srgbClr val="FFFFFF"/>
-      </a:lt1>
-      <a:dk2>
-        <a:srgbClr val="158158"/>
-      </a:dk2>
-      <a:lt2>
-        <a:srgbClr val="F3F3F3"/>
-      </a:lt2>
-      <a:accent1>
-        <a:srgbClr val="058DC7"/>
-      </a:accent1>
-      <a:accent2>
-        <a:srgbClr val="50B432"/>
-      </a:accent2>
-      <a:accent3>
-        <a:srgbClr val="ED561B"/>
-      </a:accent3>
-      <a:accent4>
-        <a:srgbClr val="EDEF00"/>
-      </a:accent4>
-      <a:accent5>
-        <a:srgbClr val="24CBE5"/>
-      </a:accent5>
-      <a:accent6>
-        <a:srgbClr val="64E572"/>
-      </a:accent6>
-      <a:hlink>
-        <a:srgbClr val="2200CC"/>
-      </a:hlink>
-      <a:folHlink>
-        <a:srgbClr val="551A8B"/>
-      </a:folHlink>
-    </a:clrScheme>
-    <a:fontScheme name="Office">
-      <a:majorFont>
-        <a:latin typeface="Arial"/>
-        <a:ea typeface=""/>
-        <a:cs typeface=""/>
-        <a:font script="Jpan" typeface="ＭＳ Ｐゴシック"/>
-        <a:font script="Hang" typeface="맑은 고딕"/>
-        <a:font script="Hans" typeface="宋体"/>
-        <a:font script="Hant" typeface="新細明體"/>
-        <a:font script="Arab" typeface="Times New Roman"/>
-        <a:font script="Hebr" typeface="Times New Roman"/>
-        <a:font script="Thai" typeface="Angsana New"/>
-        <a:font script="Ethi" typeface="Nyala"/>
-        <a:font script="Beng" typeface="Vrinda"/>
-        <a:font script="Gujr" typeface="Shruti"/>
-        <a:font script="Khmr" typeface="MoolBoran"/>
-        <a:font script="Knda" typeface="Tunga"/>
-        <a:font script="Guru" typeface="Raavi"/>
-        <a:font script="Cans" typeface="Euphemia"/>
-        <a:font script="Cher" typeface="Plantagenet Cherokee"/>
-        <a:font script="Yiii" typeface="Microsoft Yi Baiti"/>
-        <a:font script="Tibt" typeface="Microsoft Himalaya"/>
-        <a:font script="Thaa" typeface="MV Boli"/>
-        <a:font script="Deva" typeface="Mangal"/>
-        <a:font script="Telu" typeface="Gautami"/>
-        <a:font script="Taml" typeface="Latha"/>
-        <a:font script="Syrc" typeface="Estrangelo Edessa"/>
-        <a:font script="Orya" typeface="Kalinga"/>
-        <a:font script="Mlym" typeface="Kartika"/>
-        <a:font script="Laoo" typeface="DokChampa"/>
-        <a:font script="Sinh" typeface="Iskoola Pota"/>
-        <a:font script="Mong" typeface="Mongolian Baiti"/>
-        <a:font script="Viet" typeface="Times New Roman"/>
-        <a:font script="Uigh" typeface="Microsoft Uighur"/>
-        <a:font script="Geor" typeface="Sylfaen"/>
-      </a:majorFont>
-      <a:minorFont>
-        <a:latin typeface="Arial"/>
-        <a:ea typeface=""/>
-        <a:cs typeface=""/>
-        <a:font script="Jpan" typeface="ＭＳ Ｐゴシック"/>
-        <a:font script="Hang" typeface="맑은 고딕"/>
-        <a:font script="Hans" typeface="宋体"/>
-        <a:font script="Hant" typeface="新細明體"/>
-        <a:font script="Arab" typeface="Arial"/>
-        <a:font script="Hebr" typeface="Arial"/>
-        <a:font script="Thai" typeface="Cordia New"/>
-        <a:font script="Ethi" typeface="Nyala"/>
-        <a:font script="Beng" typeface="Vrinda"/>
-        <a:font script="Gujr" typeface="Shruti"/>
-        <a:font script="Khmr" typeface="DaunPenh"/>
-        <a:font script="Knda" typeface="Tunga"/>
-        <a:font script="Guru" typeface="Raavi"/>
-        <a:font script="Cans" typeface="Euphemia"/>
-        <a:font script="Cher" typeface="Plantagenet Cherokee"/>
-        <a:font script="Yiii" typeface="Microsoft Yi Baiti"/>
-        <a:font script="Tibt" typeface="Microsoft Himalaya"/>
-        <a:font script="Thaa" typeface="MV Boli"/>
-        <a:font script="Deva" typeface="Mangal"/>
-        <a:font script="Telu" typeface="Gautami"/>
-        <a:font script="Taml" typeface="Latha"/>
-        <a:font script="Syrc" typeface="Estrangelo Edessa"/>
-        <a:font script="Orya" typeface="Kalinga"/>
-        <a:font script="Mlym" typeface="Kartika"/>
-        <a:font script="Laoo" typeface="DokChampa"/>
-        <a:font script="Sinh" typeface="Iskoola Pota"/>
-        <a:font script="Mong" typeface="Mongolian Baiti"/>
-        <a:font script="Viet" typeface="Arial"/>
-        <a:font script="Uigh" typeface="Microsoft Uighur"/>
-        <a:font script="Geor" typeface="Sylfaen"/>
-      </a:minorFont>
-    </a:fontScheme>
-    <a:fmtScheme name="Office">
-      <a:fillStyleLst>
-        <a:solidFill>
-          <a:schemeClr val="phClr"/>
-        </a:solidFill>
-        <a:gradFill rotWithShape="1">
-          <a:gsLst>
-            <a:gs pos="0">
-              <a:schemeClr val="phClr">
-                <a:tint val="50000"/>
-                <a:satMod val="300000"/>
-              </a:schemeClr>
-            </a:gs>
-            <a:gs pos="35000">
-              <a:schemeClr val="phClr">
-                <a:tint val="37000"/>
-                <a:satMod val="300000"/>
-              </a:schemeClr>
-            </a:gs>
-            <a:gs pos="100000">
-              <a:schemeClr val="phClr">
-                <a:tint val="15000"/>
-                <a:satMod val="350000"/>
-              </a:schemeClr>
-            </a:gs>
-          </a:gsLst>
-          <a:lin ang="16200000" scaled="1"/>
-        </a:gradFill>
-        <a:gradFill rotWithShape="1">
-          <a:gsLst>
-            <a:gs pos="0">
-              <a:schemeClr val="phClr">
-                <a:tint val="100000"/>
-                <a:shade val="100000"/>
-                <a:satMod val="130000"/>
-              </a:schemeClr>
-            </a:gs>
-            <a:gs pos="100000">
-              <a:schemeClr val="phClr">
-                <a:tint val="50000"/>
-                <a:shade val="100000"/>
-                <a:satMod val="350000"/>
-              </a:schemeClr>
-            </a:gs>
-          </a:gsLst>
-          <a:lin ang="16200000" scaled="0"/>
-        </a:gradFill>
-      </a:fillStyleLst>
-      <a:lnStyleLst>
-        <a:ln w="9525" cap="flat" cmpd="sng" algn="ctr">
-          <a:solidFill>
-            <a:schemeClr val="phClr">
-              <a:shade val="95000"/>
-              <a:satMod val="105000"/>
-            </a:schemeClr>
-          </a:solidFill>
-          <a:prstDash val="solid"/>
-        </a:ln>
-        <a:ln w="25400" cap="flat" cmpd="sng" algn="ctr">
-          <a:solidFill>
-            <a:schemeClr val="phClr"/>
-          </a:solidFill>
-          <a:prstDash val="solid"/>
-        </a:ln>
-        <a:ln w="38100" cap="flat" cmpd="sng" algn="ctr">
-          <a:solidFill>
-            <a:schemeClr val="phClr"/>
-          </a:solidFill>
-          <a:prstDash val="solid"/>
-        </a:ln>
-      </a:lnStyleLst>
-      <a:effectStyleLst>
-        <a:effectStyle>
-          <a:effectLst>
-            <a:outerShdw blurRad="40000" dist="20000" dir="5400000" rotWithShape="0">
-              <a:srgbClr val="000000">
-                <a:alpha val="38000"/>
-              </a:srgbClr>
-            </a:outerShdw>
-          </a:effectLst>
-        </a:effectStyle>
-        <a:effectStyle>
-          <a:effectLst>
-            <a:outerShdw blurRad="40000" dist="23000" dir="5400000" rotWithShape="0">
-              <a:srgbClr val="000000">
-                <a:alpha val="35000"/>
-              </a:srgbClr>
-            </a:outerShdw>
-          </a:effectLst>
-        </a:effectStyle>
-        <a:effectStyle>
-          <a:effectLst>
-            <a:outerShdw blurRad="40000" dist="23000" dir="5400000" rotWithShape="0">
-              <a:srgbClr val="000000">
-                <a:alpha val="35000"/>
-              </a:srgbClr>
-            </a:outerShdw>
-          </a:effectLst>
-          <a:scene3d>
-            <a:camera prst="orthographicFront">
-              <a:rot lat="0" lon="0" rev="0"/>
-            </a:camera>
-            <a:lightRig rig="threePt" dir="t">
-              <a:rot lat="0" lon="0" rev="1200000"/>
-            </a:lightRig>
-          </a:scene3d>
-          <a:sp3d>
-            <a:bevelT w="63500" h="25400"/>
-          </a:sp3d>
-        </a:effectStyle>
-      </a:effectStyleLst>
-      <a:bgFillStyleLst>
-        <a:solidFill>
-          <a:schemeClr val="phClr"/>
-        </a:solidFill>
-        <a:gradFill rotWithShape="1">
-          <a:gsLst>
-            <a:gs pos="0">
-              <a:schemeClr val="phClr">
-                <a:tint val="40000"/>
-                <a:satMod val="350000"/>
-              </a:schemeClr>
-            </a:gs>
-            <a:gs pos="40000">
-              <a:schemeClr val="phClr">
-                <a:tint val="45000"/>
-                <a:shade val="99000"/>
-                <a:satMod val="350000"/>
-              </a:schemeClr>
-            </a:gs>
-            <a:gs pos="100000">
-              <a:schemeClr val="phClr">
-                <a:shade val="20000"/>
-                <a:satMod val="255000"/>
-              </a:schemeClr>
-            </a:gs>
-          </a:gsLst>
-          <a:path path="circle">
-            <a:fillToRect l="50000" t="-80000" r="50000" b="180000"/>
-          </a:path>
-        </a:gradFill>
-        <a:gradFill rotWithShape="1">
-          <a:gsLst>
-            <a:gs pos="0">
-              <a:schemeClr val="phClr">
-                <a:tint val="80000"/>
-                <a:satMod val="300000"/>
-              </a:schemeClr>
-            </a:gs>
-            <a:gs pos="100000">
-              <a:schemeClr val="phClr">
-                <a:shade val="30000"/>
-                <a:satMod val="200000"/>
-              </a:schemeClr>
-            </a:gs>
-          </a:gsLst>
-          <a:path path="circle">
-            <a:fillToRect l="50000" t="50000" r="50000" b="50000"/>
-          </a:path>
-        </a:gradFill>
-      </a:bgFillStyleLst>
-    </a:fmtScheme>
-  </a:themeElements>
-</a:theme>
 </file>